--- a/data-architecture/Conversion_Baseline_Data_Architecture_Summary.pptx
+++ b/data-architecture/Conversion_Baseline_Data_Architecture_Summary.pptx
@@ -16,9 +16,10 @@
     <p:sldId id="264" r:id="rId10"/>
     <p:sldId id="265" r:id="rId11"/>
     <p:sldId id="266" r:id="rId12"/>
+    <p:sldId id="267" r:id="rId13"/>
   </p:sldIdLst>
   <p:notesMasterIdLst>
-    <p:notesMasterId r:id="rId13"/>
+    <p:notesMasterId r:id="rId14"/>
   </p:notesMasterIdLst>
   <p:sldSz cx="12192000" cy="6858000"/>
   <p:notesSz cx="6858000" cy="12192000"/>
@@ -117,31 +118,32 @@
   <p:extLst>
     <p:ext uri="{521415D9-36F7-43E2-AB2F-B90AF26B5E84}">
       <p14:sectionLst xmlns:p14="http://schemas.microsoft.com/office/powerpoint/2010/main">
-        <p14:section name="Why" id="{b996ca08-0fe8-a868-352f-cea4322fe63d}">
+        <p14:section name="Why" id="{2e18cbc8-1900-f405-1e6a-d453f53c59f7}">
           <p14:sldIdLst>
             <p14:sldId id="256"/>
             <p14:sldId id="257"/>
             <p14:sldId id="258"/>
           </p14:sldIdLst>
         </p14:section>
-        <p14:section name="Data" id="{c2f982d0-7b45-8d6a-20d4-dbe35db19a57}">
+        <p14:section name="Data" id="{152eece0-73f9-4f24-8287-1cebaaad4301}">
           <p14:sldIdLst>
             <p14:sldId id="259"/>
             <p14:sldId id="260"/>
+            <p14:sldId id="261"/>
           </p14:sldIdLst>
         </p14:section>
-        <p14:section name="Findings" id="{df4dd4c8-fda2-52be-fe3c-98b4a9b11625}">
+        <p14:section name="Findings" id="{fe3d91ba-fadd-1e20-351e-f08a6ae1bf54}">
           <p14:sldIdLst>
-            <p14:sldId id="261"/>
             <p14:sldId id="262"/>
             <p14:sldId id="263"/>
+            <p14:sldId id="264"/>
           </p14:sldIdLst>
         </p14:section>
-        <p14:section name="Plan" id="{b8ce8deb-4264-6d87-1212-35c1b5b0f2cd}">
+        <p14:section name="Plan" id="{bd1d210e-58dd-81df-b36a-d4ab04e7d5b6}">
           <p14:sldIdLst>
-            <p14:sldId id="264"/>
             <p14:sldId id="265"/>
             <p14:sldId id="266"/>
+            <p14:sldId id="267"/>
           </p14:sldIdLst>
         </p14:section>
       </p14:sectionLst>
@@ -1035,7 +1037,7 @@
           <a:p>
             <a:r>
               <a:rPr lang="en-US" dirty="0"/>
-              <a:t/>
+              <a:t>The 75% in the example is illustrative only, to show how the calculation works. Real rates come from the 3-year data. The baseline will not stay fixed: courses rise and fall in popularity, so show the trend as well as the average.</a:t>
             </a:r>
             <a:endParaRPr lang="en-US" dirty="0"/>
           </a:p>
@@ -1165,6 +1167,94 @@
 </p:notes>
 </file>
 
+<file path=ppt/notesSlides/notesSlide12.xml><?xml version="1.0" encoding="utf-8"?>
+<p:notes xmlns:a="http://schemas.openxmlformats.org/drawingml/2006/main" xmlns:r="http://schemas.openxmlformats.org/officeDocument/2006/relationships" xmlns:p="http://schemas.openxmlformats.org/presentationml/2006/main">
+  <p:cSld>
+    <p:spTree>
+      <p:nvGrpSpPr>
+        <p:cNvPr id="1" name=""/>
+        <p:cNvGrpSpPr/>
+        <p:nvPr/>
+      </p:nvGrpSpPr>
+      <p:grpSpPr>
+        <a:xfrm>
+          <a:off x="0" y="0"/>
+          <a:ext cx="0" cy="0"/>
+          <a:chOff x="0" y="0"/>
+          <a:chExt cx="0" cy="0"/>
+        </a:xfrm>
+      </p:grpSpPr>
+      <p:sp>
+        <p:nvSpPr>
+          <p:cNvPr id="2" name="Slide Image Placeholder 1"/>
+          <p:cNvSpPr>
+            <a:spLocks noGrp="1" noRot="1" noChangeAspect="1"/>
+          </p:cNvSpPr>
+          <p:nvPr>
+            <p:ph type="sldImg"/>
+          </p:nvPr>
+        </p:nvSpPr>
+        <p:spPr/>
+      </p:sp>
+      <p:sp>
+        <p:nvSpPr>
+          <p:cNvPr id="3" name="Notes Placeholder 2"/>
+          <p:cNvSpPr>
+            <a:spLocks noGrp="1"/>
+          </p:cNvSpPr>
+          <p:nvPr>
+            <p:ph type="body" idx="1"/>
+          </p:nvPr>
+        </p:nvSpPr>
+        <p:spPr/>
+        <p:txBody>
+          <a:bodyPr/>
+          <a:lstStyle/>
+          <a:p>
+            <a:r>
+              <a:rPr lang="en-US" dirty="0"/>
+              <a:t/>
+            </a:r>
+            <a:endParaRPr lang="en-US" dirty="0"/>
+          </a:p>
+        </p:txBody>
+      </p:sp>
+      <p:sp>
+        <p:nvSpPr>
+          <p:cNvPr id="4" name="Slide Number Placeholder 3"/>
+          <p:cNvSpPr>
+            <a:spLocks noGrp="1"/>
+          </p:cNvSpPr>
+          <p:nvPr>
+            <p:ph type="sldNum" sz="quarter" idx="10"/>
+          </p:nvPr>
+        </p:nvSpPr>
+        <p:spPr/>
+        <p:txBody>
+          <a:bodyPr/>
+          <a:lstStyle/>
+          <a:p>
+            <a:fld id="{F7021451-1387-4CA6-816F-3879F97B5CBC}" type="slidenum">
+              <a:rPr lang="en-US"/>
+              <a:t>12</a:t>
+            </a:fld>
+            <a:endParaRPr lang="en-US"/>
+          </a:p>
+        </p:txBody>
+      </p:sp>
+    </p:spTree>
+    <p:extLst>
+      <p:ext uri="{BB962C8B-B14F-4D97-AF65-F5344CB8AC3E}">
+        <p14:creationId xmlns:p14="http://schemas.microsoft.com/office/powerpoint/2010/main" val="1024086991"/>
+      </p:ext>
+    </p:extLst>
+  </p:cSld>
+  <p:clrMapOvr>
+    <a:masterClrMapping/>
+  </p:clrMapOvr>
+</p:notes>
+</file>
+
 <file path=ppt/notesSlides/notesSlide2.xml><?xml version="1.0" encoding="utf-8"?>
 <p:notes xmlns:a="http://schemas.openxmlformats.org/drawingml/2006/main" xmlns:r="http://schemas.openxmlformats.org/officeDocument/2006/relationships" xmlns:p="http://schemas.openxmlformats.org/presentationml/2006/main">
   <p:cSld>
@@ -1475,7 +1565,7 @@
           <a:p>
             <a:r>
               <a:rPr lang="en-US" dirty="0"/>
-              <a:t>Lyndsay confirmed we should measure enrolment at the credit claim point, about 6 weeks, not day one.</a:t>
+              <a:t>Simplified from the Student System group in the Lucid working file (1 Oct 2026). Some links are left out for readability, for example UnitE to FVC Portal and iTrent to UnitE; they remain in the detailed map. Editable version: https://lucid.app/lucidchart/a267d6e5-4997-41db-a995-88c7c970fb20/edit</a:t>
             </a:r>
             <a:endParaRPr lang="en-US" dirty="0"/>
           </a:p>
@@ -1563,7 +1653,7 @@
           <a:p>
             <a:r>
               <a:rPr lang="en-US" dirty="0"/>
-              <a:t/>
+              <a:t>Lyndsay confirmed we should measure enrolment at the credit claim point, about 6 weeks, not day one.</a:t>
             </a:r>
             <a:endParaRPr lang="en-US" dirty="0"/>
           </a:p>
@@ -1651,7 +1741,7 @@
           <a:p>
             <a:r>
               <a:rPr lang="en-US" dirty="0"/>
-              <a:t>YCCJ/AL: 36 offers, 116 total applications, 66 live. YCCMT/AL: 15 offers, 87 total, 62 live. A later screenshot showed YCCJ/AL at 40.0% under different filter settings, so filters need recording with every number.</a:t>
+              <a:t/>
             </a:r>
             <a:endParaRPr lang="en-US" dirty="0"/>
           </a:p>
@@ -1739,7 +1829,7 @@
           <a:p>
             <a:r>
               <a:rPr lang="en-US" dirty="0"/>
-              <a:t/>
+              <a:t>YCCJ/AL: 36 offers, 116 total applications, 66 live. YCCMT/AL: 15 offers, 87 total, 62 live. A later screenshot showed YCCJ/AL at 40.0% under different filter settings, so filters need recording with every number.</a:t>
             </a:r>
             <a:endParaRPr lang="en-US" dirty="0"/>
           </a:p>
@@ -1827,7 +1917,7 @@
           <a:p>
             <a:r>
               <a:rPr lang="en-US" dirty="0"/>
-              <a:t>The 75% in the example is illustrative only, to show how the calculation works. Real rates come from the 3-year data. The baseline will not stay fixed: courses rise and fall in popularity, so show the trend as well as the average.</a:t>
+              <a:t/>
             </a:r>
             <a:endParaRPr lang="en-US" dirty="0"/>
           </a:p>
@@ -2710,7 +2800,7 @@
                   <a:schemeClr val="tx2"/>
                 </a:solidFill>
               </a:rPr>
-              <a:t>Progress so far</a:t>
+              <a:t>How we will build the baseline</a:t>
             </a:r>
             <a:endParaRPr lang="en-US" sz="3200" dirty="0"/>
           </a:p>
@@ -2748,7 +2838,7 @@
                   <a:schemeClr val="tx1"/>
                 </a:solidFill>
               </a:rPr>
-              <a:t>Where each piece of work stands at the start of October</a:t>
+              <a:t>Seven steps, starting with construction as the pilot area</a:t>
             </a:r>
             <a:endParaRPr lang="en-US" sz="1500" dirty="0"/>
           </a:p>
@@ -2756,18 +2846,559 @@
       </p:sp>
       <p:sp>
         <p:nvSpPr>
-          <p:cNvPr id="4" name="progress Done"/>
+          <p:cNvPr id="4" name="dot 1"/>
           <p:cNvSpPr/>
           <p:nvPr/>
         </p:nvSpPr>
         <p:spPr>
           <a:xfrm>
-            <a:off x="548640" y="1645920"/>
-            <a:ext cx="3520440" cy="4480560"/>
+            <a:off x="1005840" y="1783080"/>
+            <a:ext cx="548640" cy="548640"/>
+          </a:xfrm>
+          <a:prstGeom prst="ellipse">
+            <a:avLst/>
+          </a:prstGeom>
+          <a:solidFill>
+            <a:schemeClr val="accent1"/>
+          </a:solidFill>
+          <a:ln w="12700">
+            <a:solidFill>
+              <a:schemeClr val="accent1"/>
+            </a:solidFill>
+            <a:prstDash val="solid"/>
+          </a:ln>
+        </p:spPr>
+      </p:sp>
+      <p:sp>
+        <p:nvSpPr>
+          <p:cNvPr id="5" name="Text 3"/>
+          <p:cNvSpPr txBox="1"/>
+          <p:nvPr/>
+        </p:nvSpPr>
+        <p:spPr>
+          <a:xfrm>
+            <a:off x="1005840" y="1783080"/>
+            <a:ext cx="548640" cy="548640"/>
+          </a:xfrm>
+          <a:prstGeom prst="rect">
+            <a:avLst/>
+          </a:prstGeom>
+          <a:noFill/>
+          <a:ln/>
+        </p:spPr>
+        <p:txBody>
+          <a:bodyPr wrap="square" lIns="0" tIns="0" rIns="0" bIns="0" rtlCol="0" anchor="ctr"/>
+          <a:lstStyle/>
+          <a:p>
+            <a:pPr algn="ctr" indent="0" marL="0">
+              <a:buNone/>
+            </a:pPr>
+            <a:r>
+              <a:rPr lang="en-US" sz="1400" b="1" dirty="0">
+                <a:solidFill>
+                  <a:schemeClr val="bg1"/>
+                </a:solidFill>
+              </a:rPr>
+              <a:t>1</a:t>
+            </a:r>
+            <a:endParaRPr lang="en-US" sz="1400" dirty="0"/>
+          </a:p>
+        </p:txBody>
+      </p:sp>
+      <p:sp>
+        <p:nvSpPr>
+          <p:cNvPr id="6" name="step 1"/>
+          <p:cNvSpPr/>
+          <p:nvPr/>
+        </p:nvSpPr>
+        <p:spPr>
+          <a:xfrm>
+            <a:off x="548640" y="2560320"/>
+            <a:ext cx="1463040" cy="2377440"/>
           </a:xfrm>
           <a:prstGeom prst="roundRect">
             <a:avLst>
-              <a:gd name="adj" fmla="val 2078"/>
+              <a:gd name="adj" fmla="val 5000"/>
+            </a:avLst>
+          </a:prstGeom>
+          <a:solidFill>
+            <a:schemeClr val="bg2"/>
+          </a:solidFill>
+          <a:ln w="12700">
+            <a:solidFill>
+              <a:schemeClr val="bg2"/>
+            </a:solidFill>
+            <a:prstDash val="solid"/>
+          </a:ln>
+        </p:spPr>
+      </p:sp>
+      <p:sp>
+        <p:nvSpPr>
+          <p:cNvPr id="7" name="Text 5"/>
+          <p:cNvSpPr txBox="1"/>
+          <p:nvPr/>
+        </p:nvSpPr>
+        <p:spPr>
+          <a:xfrm>
+            <a:off x="640080" y="2697480"/>
+            <a:ext cx="1280160" cy="411480"/>
+          </a:xfrm>
+          <a:prstGeom prst="rect">
+            <a:avLst/>
+          </a:prstGeom>
+          <a:noFill/>
+          <a:ln/>
+        </p:spPr>
+        <p:txBody>
+          <a:bodyPr wrap="square" lIns="0" tIns="0" rIns="0" bIns="0" rtlCol="0" anchor="ctr"/>
+          <a:lstStyle/>
+          <a:p>
+            <a:pPr algn="ctr" indent="0" marL="0">
+              <a:buNone/>
+            </a:pPr>
+            <a:r>
+              <a:rPr lang="en-US" sz="1500" b="1" dirty="0">
+                <a:solidFill>
+                  <a:schemeClr val="tx2"/>
+                </a:solidFill>
+              </a:rPr>
+              <a:t>Collect</a:t>
+            </a:r>
+            <a:endParaRPr lang="en-US" sz="1500" dirty="0"/>
+          </a:p>
+        </p:txBody>
+      </p:sp>
+      <p:sp>
+        <p:nvSpPr>
+          <p:cNvPr id="8" name="Text 6"/>
+          <p:cNvSpPr txBox="1"/>
+          <p:nvPr/>
+        </p:nvSpPr>
+        <p:spPr>
+          <a:xfrm>
+            <a:off x="640080" y="3200400"/>
+            <a:ext cx="1280160" cy="1645920"/>
+          </a:xfrm>
+          <a:prstGeom prst="rect">
+            <a:avLst/>
+          </a:prstGeom>
+          <a:noFill/>
+          <a:ln/>
+        </p:spPr>
+        <p:txBody>
+          <a:bodyPr wrap="square" lIns="0" tIns="0" rIns="0" bIns="0" rtlCol="0" anchor="t"/>
+          <a:lstStyle/>
+          <a:p>
+            <a:pPr algn="ctr" indent="0" marL="0">
+              <a:buNone/>
+            </a:pPr>
+            <a:r>
+              <a:rPr lang="en-US" sz="1250" dirty="0">
+                <a:solidFill>
+                  <a:schemeClr val="tx1"/>
+                </a:solidFill>
+              </a:rPr>
+              <a:t>3 final years (2023/24 to 2025/26), course level</a:t>
+            </a:r>
+            <a:endParaRPr lang="en-US" sz="1250" dirty="0"/>
+          </a:p>
+        </p:txBody>
+      </p:sp>
+      <p:sp>
+        <p:nvSpPr>
+          <p:cNvPr id="9" name="dot 2"/>
+          <p:cNvSpPr/>
+          <p:nvPr/>
+        </p:nvSpPr>
+        <p:spPr>
+          <a:xfrm>
+            <a:off x="2612441" y="1783080"/>
+            <a:ext cx="548640" cy="548640"/>
+          </a:xfrm>
+          <a:prstGeom prst="ellipse">
+            <a:avLst/>
+          </a:prstGeom>
+          <a:solidFill>
+            <a:schemeClr val="accent1"/>
+          </a:solidFill>
+          <a:ln w="12700">
+            <a:solidFill>
+              <a:schemeClr val="accent1"/>
+            </a:solidFill>
+            <a:prstDash val="solid"/>
+          </a:ln>
+        </p:spPr>
+      </p:sp>
+      <p:sp>
+        <p:nvSpPr>
+          <p:cNvPr id="10" name="Text 8"/>
+          <p:cNvSpPr txBox="1"/>
+          <p:nvPr/>
+        </p:nvSpPr>
+        <p:spPr>
+          <a:xfrm>
+            <a:off x="2612441" y="1783080"/>
+            <a:ext cx="548640" cy="548640"/>
+          </a:xfrm>
+          <a:prstGeom prst="rect">
+            <a:avLst/>
+          </a:prstGeom>
+          <a:noFill/>
+          <a:ln/>
+        </p:spPr>
+        <p:txBody>
+          <a:bodyPr wrap="square" lIns="0" tIns="0" rIns="0" bIns="0" rtlCol="0" anchor="ctr"/>
+          <a:lstStyle/>
+          <a:p>
+            <a:pPr algn="ctr" indent="0" marL="0">
+              <a:buNone/>
+            </a:pPr>
+            <a:r>
+              <a:rPr lang="en-US" sz="1400" b="1" dirty="0">
+                <a:solidFill>
+                  <a:schemeClr val="bg1"/>
+                </a:solidFill>
+              </a:rPr>
+              <a:t>2</a:t>
+            </a:r>
+            <a:endParaRPr lang="en-US" sz="1400" dirty="0"/>
+          </a:p>
+        </p:txBody>
+      </p:sp>
+      <p:sp>
+        <p:nvSpPr>
+          <p:cNvPr id="11" name="step 2"/>
+          <p:cNvSpPr/>
+          <p:nvPr/>
+        </p:nvSpPr>
+        <p:spPr>
+          <a:xfrm>
+            <a:off x="2155241" y="2560320"/>
+            <a:ext cx="1463040" cy="2377440"/>
+          </a:xfrm>
+          <a:prstGeom prst="roundRect">
+            <a:avLst>
+              <a:gd name="adj" fmla="val 5000"/>
+            </a:avLst>
+          </a:prstGeom>
+          <a:solidFill>
+            <a:schemeClr val="bg2"/>
+          </a:solidFill>
+          <a:ln w="12700">
+            <a:solidFill>
+              <a:schemeClr val="bg2"/>
+            </a:solidFill>
+            <a:prstDash val="solid"/>
+          </a:ln>
+        </p:spPr>
+      </p:sp>
+      <p:sp>
+        <p:nvSpPr>
+          <p:cNvPr id="12" name="Text 10"/>
+          <p:cNvSpPr txBox="1"/>
+          <p:nvPr/>
+        </p:nvSpPr>
+        <p:spPr>
+          <a:xfrm>
+            <a:off x="2246681" y="2697480"/>
+            <a:ext cx="1280160" cy="411480"/>
+          </a:xfrm>
+          <a:prstGeom prst="rect">
+            <a:avLst/>
+          </a:prstGeom>
+          <a:noFill/>
+          <a:ln/>
+        </p:spPr>
+        <p:txBody>
+          <a:bodyPr wrap="square" lIns="0" tIns="0" rIns="0" bIns="0" rtlCol="0" anchor="ctr"/>
+          <a:lstStyle/>
+          <a:p>
+            <a:pPr algn="ctr" indent="0" marL="0">
+              <a:buNone/>
+            </a:pPr>
+            <a:r>
+              <a:rPr lang="en-US" sz="1500" b="1" dirty="0">
+                <a:solidFill>
+                  <a:schemeClr val="tx2"/>
+                </a:solidFill>
+              </a:rPr>
+              <a:t>Clean</a:t>
+            </a:r>
+            <a:endParaRPr lang="en-US" sz="1500" dirty="0"/>
+          </a:p>
+        </p:txBody>
+      </p:sp>
+      <p:sp>
+        <p:nvSpPr>
+          <p:cNvPr id="13" name="Text 11"/>
+          <p:cNvSpPr txBox="1"/>
+          <p:nvPr/>
+        </p:nvSpPr>
+        <p:spPr>
+          <a:xfrm>
+            <a:off x="2246681" y="3200400"/>
+            <a:ext cx="1280160" cy="1645920"/>
+          </a:xfrm>
+          <a:prstGeom prst="rect">
+            <a:avLst/>
+          </a:prstGeom>
+          <a:noFill/>
+          <a:ln/>
+        </p:spPr>
+        <p:txBody>
+          <a:bodyPr wrap="square" lIns="0" tIns="0" rIns="0" bIns="0" rtlCol="0" anchor="t"/>
+          <a:lstStyle/>
+          <a:p>
+            <a:pPr algn="ctr" indent="0" marL="0">
+              <a:buNone/>
+            </a:pPr>
+            <a:r>
+              <a:rPr lang="en-US" sz="1250" dirty="0">
+                <a:solidFill>
+                  <a:schemeClr val="tx1"/>
+                </a:solidFill>
+              </a:rPr>
+              <a:t>Live applications; group A/B sections; match code changes</a:t>
+            </a:r>
+            <a:endParaRPr lang="en-US" sz="1250" dirty="0"/>
+          </a:p>
+        </p:txBody>
+      </p:sp>
+      <p:sp>
+        <p:nvSpPr>
+          <p:cNvPr id="14" name="dot 3"/>
+          <p:cNvSpPr/>
+          <p:nvPr/>
+        </p:nvSpPr>
+        <p:spPr>
+          <a:xfrm>
+            <a:off x="4219042" y="1783080"/>
+            <a:ext cx="548640" cy="548640"/>
+          </a:xfrm>
+          <a:prstGeom prst="ellipse">
+            <a:avLst/>
+          </a:prstGeom>
+          <a:solidFill>
+            <a:schemeClr val="accent1"/>
+          </a:solidFill>
+          <a:ln w="12700">
+            <a:solidFill>
+              <a:schemeClr val="accent1"/>
+            </a:solidFill>
+            <a:prstDash val="solid"/>
+          </a:ln>
+        </p:spPr>
+      </p:sp>
+      <p:sp>
+        <p:nvSpPr>
+          <p:cNvPr id="15" name="Text 13"/>
+          <p:cNvSpPr txBox="1"/>
+          <p:nvPr/>
+        </p:nvSpPr>
+        <p:spPr>
+          <a:xfrm>
+            <a:off x="4219042" y="1783080"/>
+            <a:ext cx="548640" cy="548640"/>
+          </a:xfrm>
+          <a:prstGeom prst="rect">
+            <a:avLst/>
+          </a:prstGeom>
+          <a:noFill/>
+          <a:ln/>
+        </p:spPr>
+        <p:txBody>
+          <a:bodyPr wrap="square" lIns="0" tIns="0" rIns="0" bIns="0" rtlCol="0" anchor="ctr"/>
+          <a:lstStyle/>
+          <a:p>
+            <a:pPr algn="ctr" indent="0" marL="0">
+              <a:buNone/>
+            </a:pPr>
+            <a:r>
+              <a:rPr lang="en-US" sz="1400" b="1" dirty="0">
+                <a:solidFill>
+                  <a:schemeClr val="bg1"/>
+                </a:solidFill>
+              </a:rPr>
+              <a:t>3</a:t>
+            </a:r>
+            <a:endParaRPr lang="en-US" sz="1400" dirty="0"/>
+          </a:p>
+        </p:txBody>
+      </p:sp>
+      <p:sp>
+        <p:nvSpPr>
+          <p:cNvPr id="16" name="step 3"/>
+          <p:cNvSpPr/>
+          <p:nvPr/>
+        </p:nvSpPr>
+        <p:spPr>
+          <a:xfrm>
+            <a:off x="3761842" y="2560320"/>
+            <a:ext cx="1463040" cy="2377440"/>
+          </a:xfrm>
+          <a:prstGeom prst="roundRect">
+            <a:avLst>
+              <a:gd name="adj" fmla="val 5000"/>
+            </a:avLst>
+          </a:prstGeom>
+          <a:solidFill>
+            <a:schemeClr val="bg2"/>
+          </a:solidFill>
+          <a:ln w="12700">
+            <a:solidFill>
+              <a:schemeClr val="bg2"/>
+            </a:solidFill>
+            <a:prstDash val="solid"/>
+          </a:ln>
+        </p:spPr>
+      </p:sp>
+      <p:sp>
+        <p:nvSpPr>
+          <p:cNvPr id="17" name="Text 15"/>
+          <p:cNvSpPr txBox="1"/>
+          <p:nvPr/>
+        </p:nvSpPr>
+        <p:spPr>
+          <a:xfrm>
+            <a:off x="3853282" y="2697480"/>
+            <a:ext cx="1280160" cy="411480"/>
+          </a:xfrm>
+          <a:prstGeom prst="rect">
+            <a:avLst/>
+          </a:prstGeom>
+          <a:noFill/>
+          <a:ln/>
+        </p:spPr>
+        <p:txBody>
+          <a:bodyPr wrap="square" lIns="0" tIns="0" rIns="0" bIns="0" rtlCol="0" anchor="ctr"/>
+          <a:lstStyle/>
+          <a:p>
+            <a:pPr algn="ctr" indent="0" marL="0">
+              <a:buNone/>
+            </a:pPr>
+            <a:r>
+              <a:rPr lang="en-US" sz="1500" b="1" dirty="0">
+                <a:solidFill>
+                  <a:schemeClr val="tx2"/>
+                </a:solidFill>
+              </a:rPr>
+              <a:t>Calculate</a:t>
+            </a:r>
+            <a:endParaRPr lang="en-US" sz="1500" dirty="0"/>
+          </a:p>
+        </p:txBody>
+      </p:sp>
+      <p:sp>
+        <p:nvSpPr>
+          <p:cNvPr id="18" name="Text 16"/>
+          <p:cNvSpPr txBox="1"/>
+          <p:nvPr/>
+        </p:nvSpPr>
+        <p:spPr>
+          <a:xfrm>
+            <a:off x="3853282" y="3200400"/>
+            <a:ext cx="1280160" cy="1645920"/>
+          </a:xfrm>
+          <a:prstGeom prst="rect">
+            <a:avLst/>
+          </a:prstGeom>
+          <a:noFill/>
+          <a:ln/>
+        </p:spPr>
+        <p:txBody>
+          <a:bodyPr wrap="square" lIns="0" tIns="0" rIns="0" bIns="0" rtlCol="0" anchor="t"/>
+          <a:lstStyle/>
+          <a:p>
+            <a:pPr algn="ctr" indent="0" marL="0">
+              <a:buNone/>
+            </a:pPr>
+            <a:r>
+              <a:rPr lang="en-US" sz="1250" dirty="0">
+                <a:solidFill>
+                  <a:schemeClr val="tx1"/>
+                </a:solidFill>
+              </a:rPr>
+              <a:t>App → offer, offer → enrolment, enrolment → 6 weeks</a:t>
+            </a:r>
+            <a:endParaRPr lang="en-US" sz="1250" dirty="0"/>
+          </a:p>
+        </p:txBody>
+      </p:sp>
+      <p:sp>
+        <p:nvSpPr>
+          <p:cNvPr id="19" name="dot 4"/>
+          <p:cNvSpPr/>
+          <p:nvPr/>
+        </p:nvSpPr>
+        <p:spPr>
+          <a:xfrm>
+            <a:off x="5825642" y="1783080"/>
+            <a:ext cx="548640" cy="548640"/>
+          </a:xfrm>
+          <a:prstGeom prst="ellipse">
+            <a:avLst/>
+          </a:prstGeom>
+          <a:solidFill>
+            <a:schemeClr val="accent2"/>
+          </a:solidFill>
+          <a:ln w="12700">
+            <a:solidFill>
+              <a:schemeClr val="accent2"/>
+            </a:solidFill>
+            <a:prstDash val="solid"/>
+          </a:ln>
+        </p:spPr>
+      </p:sp>
+      <p:sp>
+        <p:nvSpPr>
+          <p:cNvPr id="20" name="Text 18"/>
+          <p:cNvSpPr txBox="1"/>
+          <p:nvPr/>
+        </p:nvSpPr>
+        <p:spPr>
+          <a:xfrm>
+            <a:off x="5825642" y="1783080"/>
+            <a:ext cx="548640" cy="548640"/>
+          </a:xfrm>
+          <a:prstGeom prst="rect">
+            <a:avLst/>
+          </a:prstGeom>
+          <a:noFill/>
+          <a:ln/>
+        </p:spPr>
+        <p:txBody>
+          <a:bodyPr wrap="square" lIns="0" tIns="0" rIns="0" bIns="0" rtlCol="0" anchor="ctr"/>
+          <a:lstStyle/>
+          <a:p>
+            <a:pPr algn="ctr" indent="0" marL="0">
+              <a:buNone/>
+            </a:pPr>
+            <a:r>
+              <a:rPr lang="en-US" sz="1400" b="1" dirty="0">
+                <a:solidFill>
+                  <a:schemeClr val="bg1"/>
+                </a:solidFill>
+              </a:rPr>
+              <a:t>4</a:t>
+            </a:r>
+            <a:endParaRPr lang="en-US" sz="1400" dirty="0"/>
+          </a:p>
+        </p:txBody>
+      </p:sp>
+      <p:sp>
+        <p:nvSpPr>
+          <p:cNvPr id="21" name="step 4"/>
+          <p:cNvSpPr/>
+          <p:nvPr/>
+        </p:nvSpPr>
+        <p:spPr>
+          <a:xfrm>
+            <a:off x="5368442" y="2560320"/>
+            <a:ext cx="1463040" cy="2377440"/>
+          </a:xfrm>
+          <a:prstGeom prst="roundRect">
+            <a:avLst>
+              <a:gd name="adj" fmla="val 5000"/>
             </a:avLst>
           </a:prstGeom>
           <a:solidFill>
@@ -2783,26 +3414,96 @@
       </p:sp>
       <p:sp>
         <p:nvSpPr>
-          <p:cNvPr id="5" name="progress tag Done"/>
+          <p:cNvPr id="22" name="Text 20"/>
+          <p:cNvSpPr txBox="1"/>
+          <p:nvPr/>
+        </p:nvSpPr>
+        <p:spPr>
+          <a:xfrm>
+            <a:off x="5459882" y="2697480"/>
+            <a:ext cx="1280160" cy="411480"/>
+          </a:xfrm>
+          <a:prstGeom prst="rect">
+            <a:avLst/>
+          </a:prstGeom>
+          <a:noFill/>
+          <a:ln/>
+        </p:spPr>
+        <p:txBody>
+          <a:bodyPr wrap="square" lIns="0" tIns="0" rIns="0" bIns="0" rtlCol="0" anchor="ctr"/>
+          <a:lstStyle/>
+          <a:p>
+            <a:pPr algn="ctr" indent="0" marL="0">
+              <a:buNone/>
+            </a:pPr>
+            <a:r>
+              <a:rPr lang="en-US" sz="1500" b="1" dirty="0">
+                <a:solidFill>
+                  <a:schemeClr val="tx2"/>
+                </a:solidFill>
+              </a:rPr>
+              <a:t>Work back</a:t>
+            </a:r>
+            <a:endParaRPr lang="en-US" sz="1500" dirty="0"/>
+          </a:p>
+        </p:txBody>
+      </p:sp>
+      <p:sp>
+        <p:nvSpPr>
+          <p:cNvPr id="23" name="Text 21"/>
+          <p:cNvSpPr txBox="1"/>
+          <p:nvPr/>
+        </p:nvSpPr>
+        <p:spPr>
+          <a:xfrm>
+            <a:off x="5459882" y="3200400"/>
+            <a:ext cx="1280160" cy="1645920"/>
+          </a:xfrm>
+          <a:prstGeom prst="rect">
+            <a:avLst/>
+          </a:prstGeom>
+          <a:noFill/>
+          <a:ln/>
+        </p:spPr>
+        <p:txBody>
+          <a:bodyPr wrap="square" lIns="0" tIns="0" rIns="0" bIns="0" rtlCol="0" anchor="t"/>
+          <a:lstStyle/>
+          <a:p>
+            <a:pPr algn="ctr" indent="0" marL="0">
+              <a:buNone/>
+            </a:pPr>
+            <a:r>
+              <a:rPr lang="en-US" sz="1250" dirty="0">
+                <a:solidFill>
+                  <a:schemeClr val="tx1"/>
+                </a:solidFill>
+              </a:rPr>
+              <a:t>Target enrolments ÷ rates = target offers and applications</a:t>
+            </a:r>
+            <a:endParaRPr lang="en-US" sz="1250" dirty="0"/>
+          </a:p>
+        </p:txBody>
+      </p:sp>
+      <p:sp>
+        <p:nvSpPr>
+          <p:cNvPr id="24" name="dot 5"/>
           <p:cNvSpPr/>
           <p:nvPr/>
         </p:nvSpPr>
         <p:spPr>
           <a:xfrm>
-            <a:off x="822960" y="1874520"/>
-            <a:ext cx="1828800" cy="411480"/>
-          </a:xfrm>
-          <a:prstGeom prst="roundRect">
-            <a:avLst>
-              <a:gd name="adj" fmla="val 48889"/>
-            </a:avLst>
+            <a:off x="7432243" y="1783080"/>
+            <a:ext cx="548640" cy="548640"/>
+          </a:xfrm>
+          <a:prstGeom prst="ellipse">
+            <a:avLst/>
           </a:prstGeom>
           <a:solidFill>
-            <a:schemeClr val="accent2"/>
+            <a:schemeClr val="accent1"/>
           </a:solidFill>
           <a:ln w="12700">
             <a:solidFill>
-              <a:schemeClr val="accent2"/>
+              <a:schemeClr val="accent1"/>
             </a:solidFill>
             <a:prstDash val="solid"/>
           </a:ln>
@@ -2810,14 +3511,14 @@
       </p:sp>
       <p:sp>
         <p:nvSpPr>
-          <p:cNvPr id="6" name="Text 4"/>
+          <p:cNvPr id="25" name="Text 23"/>
           <p:cNvSpPr txBox="1"/>
           <p:nvPr/>
         </p:nvSpPr>
         <p:spPr>
           <a:xfrm>
-            <a:off x="822960" y="1874520"/>
-            <a:ext cx="1828800" cy="411480"/>
+            <a:off x="7432243" y="1783080"/>
+            <a:ext cx="548640" cy="548640"/>
           </a:xfrm>
           <a:prstGeom prst="rect">
             <a:avLst/>
@@ -2838,7 +3539,7 @@
                   <a:schemeClr val="bg1"/>
                 </a:solidFill>
               </a:rPr>
-              <a:t>Done</a:t>
+              <a:t>5</a:t>
             </a:r>
             <a:endParaRPr lang="en-US" sz="1400" dirty="0"/>
           </a:p>
@@ -2846,112 +3547,437 @@
       </p:sp>
       <p:sp>
         <p:nvSpPr>
-          <p:cNvPr id="7" name="Text 5"/>
-          <p:cNvSpPr txBox="1"/>
-          <p:nvPr/>
-        </p:nvSpPr>
-        <p:spPr>
-          <a:xfrm>
-            <a:off x="822960" y="2514600"/>
-            <a:ext cx="3017520" cy="3474720"/>
-          </a:xfrm>
-          <a:prstGeom prst="rect">
-            <a:avLst/>
-          </a:prstGeom>
-          <a:noFill/>
-          <a:ln/>
-        </p:spPr>
-        <p:txBody>
-          <a:bodyPr wrap="square" lIns="0" tIns="0" rIns="0" bIns="0" rtlCol="0" anchor="t"/>
-          <a:lstStyle/>
-          <a:p>
-            <a:pPr marL="342900" indent="-342900">
-              <a:spcAft>
-                <a:spcPts val="1000"/>
-              </a:spcAft>
-              <a:buSzPct val="100000"/>
-              <a:buChar char="•"/>
-            </a:pPr>
-            <a:r>
-              <a:rPr lang="en-US" sz="1400" dirty="0">
-                <a:solidFill>
-                  <a:schemeClr val="tx1"/>
-                </a:solidFill>
-              </a:rPr>
-              <a:t>Meeting summary, report and plan</a:t>
-            </a:r>
-            <a:endParaRPr lang="en-US" sz="1400" dirty="0"/>
-          </a:p>
-          <a:p>
-            <a:pPr marL="342900" indent="-342900">
-              <a:spcAft>
-                <a:spcPts val="1000"/>
-              </a:spcAft>
-              <a:buSzPct val="100000"/>
-              <a:buChar char="•"/>
-            </a:pPr>
-            <a:r>
-              <a:rPr lang="en-US" sz="1400" dirty="0">
-                <a:solidFill>
-                  <a:schemeClr val="tx1"/>
-                </a:solidFill>
-              </a:rPr>
-              <a:t>Student system data map (209 systems, 98 connections), aligned with Kevin</a:t>
-            </a:r>
-            <a:endParaRPr lang="en-US" sz="1400" dirty="0"/>
-          </a:p>
-          <a:p>
-            <a:pPr marL="342900" indent="-342900">
-              <a:spcAft>
-                <a:spcPts val="1000"/>
-              </a:spcAft>
-              <a:buSzPct val="100000"/>
-              <a:buChar char="•"/>
-            </a:pPr>
-            <a:r>
-              <a:rPr lang="en-US" sz="1400" dirty="0">
-                <a:solidFill>
-                  <a:schemeClr val="tx1"/>
-                </a:solidFill>
-              </a:rPr>
-              <a:t>Plan and data request sent to Lyndsay, cc Darren</a:t>
-            </a:r>
-            <a:endParaRPr lang="en-US" sz="1400" dirty="0"/>
-          </a:p>
-          <a:p>
-            <a:pPr marL="342900" indent="-342900">
-              <a:spcAft>
-                <a:spcPts val="1000"/>
-              </a:spcAft>
-              <a:buSzPct val="100000"/>
-              <a:buChar char="•"/>
-            </a:pPr>
-            <a:r>
-              <a:rPr lang="en-US" sz="1400" dirty="0">
-                <a:solidFill>
-                  <a:schemeClr val="tx1"/>
-                </a:solidFill>
-              </a:rPr>
-              <a:t>RA5 exploration log set up</a:t>
-            </a:r>
-            <a:endParaRPr lang="en-US" sz="1400" dirty="0"/>
-          </a:p>
-        </p:txBody>
-      </p:sp>
-      <p:sp>
-        <p:nvSpPr>
-          <p:cNvPr id="8" name="progress In progress"/>
+          <p:cNvPr id="26" name="step 5"/>
           <p:cNvSpPr/>
           <p:nvPr/>
         </p:nvSpPr>
         <p:spPr>
           <a:xfrm>
-            <a:off x="4297680" y="1645920"/>
-            <a:ext cx="3520440" cy="4480560"/>
+            <a:off x="6975043" y="2560320"/>
+            <a:ext cx="1463040" cy="2377440"/>
           </a:xfrm>
           <a:prstGeom prst="roundRect">
             <a:avLst>
-              <a:gd name="adj" fmla="val 2078"/>
+              <a:gd name="adj" fmla="val 5000"/>
+            </a:avLst>
+          </a:prstGeom>
+          <a:solidFill>
+            <a:schemeClr val="bg2"/>
+          </a:solidFill>
+          <a:ln w="12700">
+            <a:solidFill>
+              <a:schemeClr val="bg2"/>
+            </a:solidFill>
+            <a:prstDash val="solid"/>
+          </a:ln>
+        </p:spPr>
+      </p:sp>
+      <p:sp>
+        <p:nvSpPr>
+          <p:cNvPr id="27" name="Text 25"/>
+          <p:cNvSpPr txBox="1"/>
+          <p:nvPr/>
+        </p:nvSpPr>
+        <p:spPr>
+          <a:xfrm>
+            <a:off x="7066483" y="2697480"/>
+            <a:ext cx="1280160" cy="411480"/>
+          </a:xfrm>
+          <a:prstGeom prst="rect">
+            <a:avLst/>
+          </a:prstGeom>
+          <a:noFill/>
+          <a:ln/>
+        </p:spPr>
+        <p:txBody>
+          <a:bodyPr wrap="square" lIns="0" tIns="0" rIns="0" bIns="0" rtlCol="0" anchor="ctr"/>
+          <a:lstStyle/>
+          <a:p>
+            <a:pPr algn="ctr" indent="0" marL="0">
+              <a:buNone/>
+            </a:pPr>
+            <a:r>
+              <a:rPr lang="en-US" sz="1500" b="1" dirty="0">
+                <a:solidFill>
+                  <a:schemeClr val="tx2"/>
+                </a:solidFill>
+              </a:rPr>
+              <a:t>Compare</a:t>
+            </a:r>
+            <a:endParaRPr lang="en-US" sz="1500" dirty="0"/>
+          </a:p>
+        </p:txBody>
+      </p:sp>
+      <p:sp>
+        <p:nvSpPr>
+          <p:cNvPr id="28" name="Text 26"/>
+          <p:cNvSpPr txBox="1"/>
+          <p:nvPr/>
+        </p:nvSpPr>
+        <p:spPr>
+          <a:xfrm>
+            <a:off x="7066483" y="3200400"/>
+            <a:ext cx="1280160" cy="1645920"/>
+          </a:xfrm>
+          <a:prstGeom prst="rect">
+            <a:avLst/>
+          </a:prstGeom>
+          <a:noFill/>
+          <a:ln/>
+        </p:spPr>
+        <p:txBody>
+          <a:bodyPr wrap="square" lIns="0" tIns="0" rIns="0" bIns="0" rtlCol="0" anchor="t"/>
+          <a:lstStyle/>
+          <a:p>
+            <a:pPr algn="ctr" indent="0" marL="0">
+              <a:buNone/>
+            </a:pPr>
+            <a:r>
+              <a:rPr lang="en-US" sz="1250" dirty="0">
+                <a:solidFill>
+                  <a:schemeClr val="tx1"/>
+                </a:solidFill>
+              </a:rPr>
+              <a:t>Course-specific targets vs the 200% / 120% rule</a:t>
+            </a:r>
+            <a:endParaRPr lang="en-US" sz="1250" dirty="0"/>
+          </a:p>
+        </p:txBody>
+      </p:sp>
+      <p:sp>
+        <p:nvSpPr>
+          <p:cNvPr id="29" name="dot 6"/>
+          <p:cNvSpPr/>
+          <p:nvPr/>
+        </p:nvSpPr>
+        <p:spPr>
+          <a:xfrm>
+            <a:off x="9038844" y="1783080"/>
+            <a:ext cx="548640" cy="548640"/>
+          </a:xfrm>
+          <a:prstGeom prst="ellipse">
+            <a:avLst/>
+          </a:prstGeom>
+          <a:solidFill>
+            <a:schemeClr val="accent1"/>
+          </a:solidFill>
+          <a:ln w="12700">
+            <a:solidFill>
+              <a:schemeClr val="accent1"/>
+            </a:solidFill>
+            <a:prstDash val="solid"/>
+          </a:ln>
+        </p:spPr>
+      </p:sp>
+      <p:sp>
+        <p:nvSpPr>
+          <p:cNvPr id="30" name="Text 28"/>
+          <p:cNvSpPr txBox="1"/>
+          <p:nvPr/>
+        </p:nvSpPr>
+        <p:spPr>
+          <a:xfrm>
+            <a:off x="9038844" y="1783080"/>
+            <a:ext cx="548640" cy="548640"/>
+          </a:xfrm>
+          <a:prstGeom prst="rect">
+            <a:avLst/>
+          </a:prstGeom>
+          <a:noFill/>
+          <a:ln/>
+        </p:spPr>
+        <p:txBody>
+          <a:bodyPr wrap="square" lIns="0" tIns="0" rIns="0" bIns="0" rtlCol="0" anchor="ctr"/>
+          <a:lstStyle/>
+          <a:p>
+            <a:pPr algn="ctr" indent="0" marL="0">
+              <a:buNone/>
+            </a:pPr>
+            <a:r>
+              <a:rPr lang="en-US" sz="1400" b="1" dirty="0">
+                <a:solidFill>
+                  <a:schemeClr val="bg1"/>
+                </a:solidFill>
+              </a:rPr>
+              <a:t>6</a:t>
+            </a:r>
+            <a:endParaRPr lang="en-US" sz="1400" dirty="0"/>
+          </a:p>
+        </p:txBody>
+      </p:sp>
+      <p:sp>
+        <p:nvSpPr>
+          <p:cNvPr id="31" name="step 6"/>
+          <p:cNvSpPr/>
+          <p:nvPr/>
+        </p:nvSpPr>
+        <p:spPr>
+          <a:xfrm>
+            <a:off x="8581644" y="2560320"/>
+            <a:ext cx="1463040" cy="2377440"/>
+          </a:xfrm>
+          <a:prstGeom prst="roundRect">
+            <a:avLst>
+              <a:gd name="adj" fmla="val 5000"/>
+            </a:avLst>
+          </a:prstGeom>
+          <a:solidFill>
+            <a:schemeClr val="bg2"/>
+          </a:solidFill>
+          <a:ln w="12700">
+            <a:solidFill>
+              <a:schemeClr val="bg2"/>
+            </a:solidFill>
+            <a:prstDash val="solid"/>
+          </a:ln>
+        </p:spPr>
+      </p:sp>
+      <p:sp>
+        <p:nvSpPr>
+          <p:cNvPr id="32" name="Text 30"/>
+          <p:cNvSpPr txBox="1"/>
+          <p:nvPr/>
+        </p:nvSpPr>
+        <p:spPr>
+          <a:xfrm>
+            <a:off x="8673084" y="2697480"/>
+            <a:ext cx="1280160" cy="411480"/>
+          </a:xfrm>
+          <a:prstGeom prst="rect">
+            <a:avLst/>
+          </a:prstGeom>
+          <a:noFill/>
+          <a:ln/>
+        </p:spPr>
+        <p:txBody>
+          <a:bodyPr wrap="square" lIns="0" tIns="0" rIns="0" bIns="0" rtlCol="0" anchor="ctr"/>
+          <a:lstStyle/>
+          <a:p>
+            <a:pPr algn="ctr" indent="0" marL="0">
+              <a:buNone/>
+            </a:pPr>
+            <a:r>
+              <a:rPr lang="en-US" sz="1500" b="1" dirty="0">
+                <a:solidFill>
+                  <a:schemeClr val="tx2"/>
+                </a:solidFill>
+              </a:rPr>
+              <a:t>Flag</a:t>
+            </a:r>
+            <a:endParaRPr lang="en-US" sz="1500" dirty="0"/>
+          </a:p>
+        </p:txBody>
+      </p:sp>
+      <p:sp>
+        <p:nvSpPr>
+          <p:cNvPr id="33" name="Text 31"/>
+          <p:cNvSpPr txBox="1"/>
+          <p:nvPr/>
+        </p:nvSpPr>
+        <p:spPr>
+          <a:xfrm>
+            <a:off x="8673084" y="3200400"/>
+            <a:ext cx="1280160" cy="1645920"/>
+          </a:xfrm>
+          <a:prstGeom prst="rect">
+            <a:avLst/>
+          </a:prstGeom>
+          <a:noFill/>
+          <a:ln/>
+        </p:spPr>
+        <p:txBody>
+          <a:bodyPr wrap="square" lIns="0" tIns="0" rIns="0" bIns="0" rtlCol="0" anchor="t"/>
+          <a:lstStyle/>
+          <a:p>
+            <a:pPr algn="ctr" indent="0" marL="0">
+              <a:buNone/>
+            </a:pPr>
+            <a:r>
+              <a:rPr lang="en-US" sz="1250" dirty="0">
+                <a:solidFill>
+                  <a:schemeClr val="tx1"/>
+                </a:solidFill>
+              </a:rPr>
+              <a:t>Low converters, drop-off stage, small or new courses</a:t>
+            </a:r>
+            <a:endParaRPr lang="en-US" sz="1250" dirty="0"/>
+          </a:p>
+        </p:txBody>
+      </p:sp>
+      <p:sp>
+        <p:nvSpPr>
+          <p:cNvPr id="34" name="dot 7"/>
+          <p:cNvSpPr/>
+          <p:nvPr/>
+        </p:nvSpPr>
+        <p:spPr>
+          <a:xfrm>
+            <a:off x="10645445" y="1783080"/>
+            <a:ext cx="548640" cy="548640"/>
+          </a:xfrm>
+          <a:prstGeom prst="ellipse">
+            <a:avLst/>
+          </a:prstGeom>
+          <a:solidFill>
+            <a:schemeClr val="accent1"/>
+          </a:solidFill>
+          <a:ln w="12700">
+            <a:solidFill>
+              <a:schemeClr val="accent1"/>
+            </a:solidFill>
+            <a:prstDash val="solid"/>
+          </a:ln>
+        </p:spPr>
+      </p:sp>
+      <p:sp>
+        <p:nvSpPr>
+          <p:cNvPr id="35" name="Text 33"/>
+          <p:cNvSpPr txBox="1"/>
+          <p:nvPr/>
+        </p:nvSpPr>
+        <p:spPr>
+          <a:xfrm>
+            <a:off x="10645445" y="1783080"/>
+            <a:ext cx="548640" cy="548640"/>
+          </a:xfrm>
+          <a:prstGeom prst="rect">
+            <a:avLst/>
+          </a:prstGeom>
+          <a:noFill/>
+          <a:ln/>
+        </p:spPr>
+        <p:txBody>
+          <a:bodyPr wrap="square" lIns="0" tIns="0" rIns="0" bIns="0" rtlCol="0" anchor="ctr"/>
+          <a:lstStyle/>
+          <a:p>
+            <a:pPr algn="ctr" indent="0" marL="0">
+              <a:buNone/>
+            </a:pPr>
+            <a:r>
+              <a:rPr lang="en-US" sz="1400" b="1" dirty="0">
+                <a:solidFill>
+                  <a:schemeClr val="bg1"/>
+                </a:solidFill>
+              </a:rPr>
+              <a:t>7</a:t>
+            </a:r>
+            <a:endParaRPr lang="en-US" sz="1400" dirty="0"/>
+          </a:p>
+        </p:txBody>
+      </p:sp>
+      <p:sp>
+        <p:nvSpPr>
+          <p:cNvPr id="36" name="step 7"/>
+          <p:cNvSpPr/>
+          <p:nvPr/>
+        </p:nvSpPr>
+        <p:spPr>
+          <a:xfrm>
+            <a:off x="10188245" y="2560320"/>
+            <a:ext cx="1463040" cy="2377440"/>
+          </a:xfrm>
+          <a:prstGeom prst="roundRect">
+            <a:avLst>
+              <a:gd name="adj" fmla="val 5000"/>
+            </a:avLst>
+          </a:prstGeom>
+          <a:solidFill>
+            <a:schemeClr val="bg2"/>
+          </a:solidFill>
+          <a:ln w="12700">
+            <a:solidFill>
+              <a:schemeClr val="bg2"/>
+            </a:solidFill>
+            <a:prstDash val="solid"/>
+          </a:ln>
+        </p:spPr>
+      </p:sp>
+      <p:sp>
+        <p:nvSpPr>
+          <p:cNvPr id="37" name="Text 35"/>
+          <p:cNvSpPr txBox="1"/>
+          <p:nvPr/>
+        </p:nvSpPr>
+        <p:spPr>
+          <a:xfrm>
+            <a:off x="10279685" y="2697480"/>
+            <a:ext cx="1280160" cy="411480"/>
+          </a:xfrm>
+          <a:prstGeom prst="rect">
+            <a:avLst/>
+          </a:prstGeom>
+          <a:noFill/>
+          <a:ln/>
+        </p:spPr>
+        <p:txBody>
+          <a:bodyPr wrap="square" lIns="0" tIns="0" rIns="0" bIns="0" rtlCol="0" anchor="ctr"/>
+          <a:lstStyle/>
+          <a:p>
+            <a:pPr algn="ctr" indent="0" marL="0">
+              <a:buNone/>
+            </a:pPr>
+            <a:r>
+              <a:rPr lang="en-US" sz="1500" b="1" dirty="0">
+                <a:solidFill>
+                  <a:schemeClr val="tx2"/>
+                </a:solidFill>
+              </a:rPr>
+              <a:t>Review</a:t>
+            </a:r>
+            <a:endParaRPr lang="en-US" sz="1500" dirty="0"/>
+          </a:p>
+        </p:txBody>
+      </p:sp>
+      <p:sp>
+        <p:nvSpPr>
+          <p:cNvPr id="38" name="Text 36"/>
+          <p:cNvSpPr txBox="1"/>
+          <p:nvPr/>
+        </p:nvSpPr>
+        <p:spPr>
+          <a:xfrm>
+            <a:off x="10279685" y="3200400"/>
+            <a:ext cx="1280160" cy="1645920"/>
+          </a:xfrm>
+          <a:prstGeom prst="rect">
+            <a:avLst/>
+          </a:prstGeom>
+          <a:noFill/>
+          <a:ln/>
+        </p:spPr>
+        <p:txBody>
+          <a:bodyPr wrap="square" lIns="0" tIns="0" rIns="0" bIns="0" rtlCol="0" anchor="t"/>
+          <a:lstStyle/>
+          <a:p>
+            <a:pPr algn="ctr" indent="0" marL="0">
+              <a:buNone/>
+            </a:pPr>
+            <a:r>
+              <a:rPr lang="en-US" sz="1250" dirty="0">
+                <a:solidFill>
+                  <a:schemeClr val="tx1"/>
+                </a:solidFill>
+              </a:rPr>
+              <a:t>Lesley and Lyndsay, then Directors and Sarah</a:t>
+            </a:r>
+            <a:endParaRPr lang="en-US" sz="1250" dirty="0"/>
+          </a:p>
+        </p:txBody>
+      </p:sp>
+      <p:sp>
+        <p:nvSpPr>
+          <p:cNvPr id="39" name="example"/>
+          <p:cNvSpPr/>
+          <p:nvPr/>
+        </p:nvSpPr>
+        <p:spPr>
+          <a:xfrm>
+            <a:off x="548640" y="5257800"/>
+            <a:ext cx="11064240" cy="868680"/>
+          </a:xfrm>
+          <a:prstGeom prst="roundRect">
+            <a:avLst>
+              <a:gd name="adj" fmla="val 8421"/>
             </a:avLst>
           </a:prstGeom>
           <a:solidFill>
@@ -2967,41 +3993,14 @@
       </p:sp>
       <p:sp>
         <p:nvSpPr>
-          <p:cNvPr id="9" name="progress tag In progress"/>
-          <p:cNvSpPr/>
-          <p:nvPr/>
-        </p:nvSpPr>
-        <p:spPr>
-          <a:xfrm>
-            <a:off x="4572000" y="1874520"/>
-            <a:ext cx="1828800" cy="411480"/>
-          </a:xfrm>
-          <a:prstGeom prst="roundRect">
-            <a:avLst>
-              <a:gd name="adj" fmla="val 48889"/>
-            </a:avLst>
-          </a:prstGeom>
-          <a:solidFill>
-            <a:schemeClr val="accent1"/>
-          </a:solidFill>
-          <a:ln w="12700">
-            <a:solidFill>
-              <a:schemeClr val="accent1"/>
-            </a:solidFill>
-            <a:prstDash val="solid"/>
-          </a:ln>
-        </p:spPr>
-      </p:sp>
-      <p:sp>
-        <p:nvSpPr>
-          <p:cNvPr id="10" name="Text 8"/>
+          <p:cNvPr id="40" name="Text 38"/>
           <p:cNvSpPr txBox="1"/>
           <p:nvPr/>
         </p:nvSpPr>
         <p:spPr>
           <a:xfrm>
-            <a:off x="4572000" y="1874520"/>
-            <a:ext cx="1828800" cy="411480"/>
+            <a:off x="822960" y="5257800"/>
+            <a:ext cx="10607040" cy="868680"/>
           </a:xfrm>
           <a:prstGeom prst="rect">
             <a:avLst/>
@@ -3013,48 +4012,19 @@
           <a:bodyPr wrap="square" lIns="0" tIns="0" rIns="0" bIns="0" rtlCol="0" anchor="ctr"/>
           <a:lstStyle/>
           <a:p>
-            <a:pPr algn="ctr" indent="0" marL="0">
+            <a:pPr indent="0" marL="0">
               <a:buNone/>
             </a:pPr>
             <a:r>
               <a:rPr lang="en-US" sz="1400" b="1" dirty="0">
                 <a:solidFill>
-                  <a:schemeClr val="bg1"/>
-                </a:solidFill>
-              </a:rPr>
-              <a:t>In progress</a:t>
-            </a:r>
-            <a:endParaRPr lang="en-US" sz="1400" dirty="0"/>
-          </a:p>
-        </p:txBody>
-      </p:sp>
-      <p:sp>
-        <p:nvSpPr>
-          <p:cNvPr id="11" name="Text 9"/>
-          <p:cNvSpPr txBox="1"/>
-          <p:nvPr/>
-        </p:nvSpPr>
-        <p:spPr>
-          <a:xfrm>
-            <a:off x="4572000" y="2514600"/>
-            <a:ext cx="3017520" cy="3474720"/>
-          </a:xfrm>
-          <a:prstGeom prst="rect">
-            <a:avLst/>
-          </a:prstGeom>
-          <a:noFill/>
-          <a:ln/>
-        </p:spPr>
-        <p:txBody>
-          <a:bodyPr wrap="square" lIns="0" tIns="0" rIns="0" bIns="0" rtlCol="0" anchor="t"/>
-          <a:lstStyle/>
-          <a:p>
-            <a:pPr marL="342900" indent="-342900">
-              <a:spcAft>
-                <a:spcPts val="1000"/>
-              </a:spcAft>
-              <a:buSzPct val="100000"/>
-              <a:buChar char="•"/>
+                  <a:schemeClr val="tx2"/>
+                </a:solidFill>
+              </a:rPr>
+              <a:t>Example of step 4:  </a:t>
+            </a:r>
+            <a:pPr indent="0" marL="0">
+              <a:buNone/>
             </a:pPr>
             <a:r>
               <a:rPr lang="en-US" sz="1400" dirty="0">
@@ -3062,209 +4032,7 @@
                   <a:schemeClr val="tx1"/>
                 </a:solidFill>
               </a:rPr>
-              <a:t>Exploring RA5: pages, filters, definitions</a:t>
-            </a:r>
-            <a:endParaRPr lang="en-US" sz="1400" dirty="0"/>
-          </a:p>
-          <a:p>
-            <a:pPr marL="342900" indent="-342900">
-              <a:spcAft>
-                <a:spcPts val="1000"/>
-              </a:spcAft>
-              <a:buSzPct val="100000"/>
-              <a:buChar char="•"/>
-            </a:pPr>
-            <a:r>
-              <a:rPr lang="en-US" sz="1400" dirty="0">
-                <a:solidFill>
-                  <a:schemeClr val="tx1"/>
-                </a:solidFill>
-              </a:rPr>
-              <a:t>Hand checks of conversion rates, course by course</a:t>
-            </a:r>
-            <a:endParaRPr lang="en-US" sz="1400" dirty="0"/>
-          </a:p>
-          <a:p>
-            <a:pPr marL="342900" indent="-342900">
-              <a:spcAft>
-                <a:spcPts val="1000"/>
-              </a:spcAft>
-              <a:buSzPct val="100000"/>
-              <a:buChar char="•"/>
-            </a:pPr>
-            <a:r>
-              <a:rPr lang="en-US" sz="1400" dirty="0">
-                <a:solidFill>
-                  <a:schemeClr val="tx1"/>
-                </a:solidFill>
-              </a:rPr>
-              <a:t>Recording filters with every number</a:t>
-            </a:r>
-            <a:endParaRPr lang="en-US" sz="1400" dirty="0"/>
-          </a:p>
-        </p:txBody>
-      </p:sp>
-      <p:sp>
-        <p:nvSpPr>
-          <p:cNvPr id="12" name="progress Waiting on others"/>
-          <p:cNvSpPr/>
-          <p:nvPr/>
-        </p:nvSpPr>
-        <p:spPr>
-          <a:xfrm>
-            <a:off x="8046720" y="1645920"/>
-            <a:ext cx="3520440" cy="4480560"/>
-          </a:xfrm>
-          <a:prstGeom prst="roundRect">
-            <a:avLst>
-              <a:gd name="adj" fmla="val 2078"/>
-            </a:avLst>
-          </a:prstGeom>
-          <a:solidFill>
-            <a:srgbClr val="FDF0DF"/>
-          </a:solidFill>
-          <a:ln w="12700">
-            <a:solidFill>
-              <a:srgbClr val="FDF0DF"/>
-            </a:solidFill>
-            <a:prstDash val="solid"/>
-          </a:ln>
-        </p:spPr>
-      </p:sp>
-      <p:sp>
-        <p:nvSpPr>
-          <p:cNvPr id="13" name="progress tag Waiting on others"/>
-          <p:cNvSpPr/>
-          <p:nvPr/>
-        </p:nvSpPr>
-        <p:spPr>
-          <a:xfrm>
-            <a:off x="8321040" y="1874520"/>
-            <a:ext cx="1828800" cy="411480"/>
-          </a:xfrm>
-          <a:prstGeom prst="roundRect">
-            <a:avLst>
-              <a:gd name="adj" fmla="val 48889"/>
-            </a:avLst>
-          </a:prstGeom>
-          <a:solidFill>
-            <a:schemeClr val="accent3"/>
-          </a:solidFill>
-          <a:ln w="12700">
-            <a:solidFill>
-              <a:schemeClr val="accent3"/>
-            </a:solidFill>
-            <a:prstDash val="solid"/>
-          </a:ln>
-        </p:spPr>
-      </p:sp>
-      <p:sp>
-        <p:nvSpPr>
-          <p:cNvPr id="14" name="Text 12"/>
-          <p:cNvSpPr txBox="1"/>
-          <p:nvPr/>
-        </p:nvSpPr>
-        <p:spPr>
-          <a:xfrm>
-            <a:off x="8321040" y="1874520"/>
-            <a:ext cx="1828800" cy="411480"/>
-          </a:xfrm>
-          <a:prstGeom prst="rect">
-            <a:avLst/>
-          </a:prstGeom>
-          <a:noFill/>
-          <a:ln/>
-        </p:spPr>
-        <p:txBody>
-          <a:bodyPr wrap="square" lIns="0" tIns="0" rIns="0" bIns="0" rtlCol="0" anchor="ctr"/>
-          <a:lstStyle/>
-          <a:p>
-            <a:pPr algn="ctr" indent="0" marL="0">
-              <a:buNone/>
-            </a:pPr>
-            <a:r>
-              <a:rPr lang="en-US" sz="1400" b="1" dirty="0">
-                <a:solidFill>
-                  <a:schemeClr val="bg1"/>
-                </a:solidFill>
-              </a:rPr>
-              <a:t>Waiting on others</a:t>
-            </a:r>
-            <a:endParaRPr lang="en-US" sz="1400" dirty="0"/>
-          </a:p>
-        </p:txBody>
-      </p:sp>
-      <p:sp>
-        <p:nvSpPr>
-          <p:cNvPr id="15" name="Text 13"/>
-          <p:cNvSpPr txBox="1"/>
-          <p:nvPr/>
-        </p:nvSpPr>
-        <p:spPr>
-          <a:xfrm>
-            <a:off x="8321040" y="2514600"/>
-            <a:ext cx="3017520" cy="3474720"/>
-          </a:xfrm>
-          <a:prstGeom prst="rect">
-            <a:avLst/>
-          </a:prstGeom>
-          <a:noFill/>
-          <a:ln/>
-        </p:spPr>
-        <p:txBody>
-          <a:bodyPr wrap="square" lIns="0" tIns="0" rIns="0" bIns="0" rtlCol="0" anchor="t"/>
-          <a:lstStyle/>
-          <a:p>
-            <a:pPr marL="342900" indent="-342900">
-              <a:spcAft>
-                <a:spcPts val="1000"/>
-              </a:spcAft>
-              <a:buSzPct val="100000"/>
-              <a:buChar char="•"/>
-            </a:pPr>
-            <a:r>
-              <a:rPr lang="en-US" sz="1400" dirty="0">
-                <a:solidFill>
-                  <a:schemeClr val="tx1"/>
-                </a:solidFill>
-              </a:rPr>
-              <a:t>Lesley: conversion measure, past years, credit statuses</a:t>
-            </a:r>
-            <a:endParaRPr lang="en-US" sz="1400" dirty="0"/>
-          </a:p>
-          <a:p>
-            <a:pPr marL="342900" indent="-342900">
-              <a:spcAft>
-                <a:spcPts val="1000"/>
-              </a:spcAft>
-              <a:buSzPct val="100000"/>
-              <a:buChar char="•"/>
-            </a:pPr>
-            <a:r>
-              <a:rPr lang="en-US" sz="1400" dirty="0">
-                <a:solidFill>
-                  <a:schemeClr val="tx1"/>
-                </a:solidFill>
-              </a:rPr>
-              <a:t>Lyndsay: targets, capacities, credits report, waiting list</a:t>
-            </a:r>
-            <a:endParaRPr lang="en-US" sz="1400" dirty="0"/>
-          </a:p>
-          <a:p>
-            <a:pPr marL="342900" indent="-342900">
-              <a:spcAft>
-                <a:spcPts val="1000"/>
-              </a:spcAft>
-              <a:buSzPct val="100000"/>
-              <a:buChar char="•"/>
-            </a:pPr>
-            <a:r>
-              <a:rPr lang="en-US" sz="1400" dirty="0">
-                <a:solidFill>
-                  <a:schemeClr val="tx1"/>
-                </a:solidFill>
-              </a:rPr>
-              <a:t>Kevin: tables behind the RA5 semantic model</a:t>
+              <a:t>if 75% of a course's offers become enrolments, 20 places need about 27 offers, not the 24 the blanket rule gives.</a:t>
             </a:r>
             <a:endParaRPr lang="en-US" sz="1400" dirty="0"/>
           </a:p>
@@ -3372,7 +4140,7 @@
                   <a:schemeClr val="tx2"/>
                 </a:solidFill>
               </a:rPr>
-              <a:t>Next steps and what I need</a:t>
+              <a:t>Progress so far</a:t>
             </a:r>
             <a:endParaRPr lang="en-US" sz="3200" dirty="0"/>
           </a:p>
@@ -3410,7 +4178,7 @@
                   <a:schemeClr val="tx1"/>
                 </a:solidFill>
               </a:rPr>
-              <a:t>Aim: a construction prototype ready for the check-in after the October break; the full baseline before Christmas</a:t>
+              <a:t>Where each piece of work stands at the start of October</a:t>
             </a:r>
             <a:endParaRPr lang="en-US" sz="1500" dirty="0"/>
           </a:p>
@@ -3418,17 +4186,230 @@
       </p:sp>
       <p:sp>
         <p:nvSpPr>
-          <p:cNvPr id="4" name="dot 1"/>
+          <p:cNvPr id="4" name="progress Done"/>
           <p:cNvSpPr/>
           <p:nvPr/>
         </p:nvSpPr>
         <p:spPr>
           <a:xfrm>
-            <a:off x="1527048" y="1737360"/>
-            <a:ext cx="640080" cy="640080"/>
-          </a:xfrm>
-          <a:prstGeom prst="ellipse">
-            <a:avLst/>
+            <a:off x="548640" y="1645920"/>
+            <a:ext cx="3520440" cy="4480560"/>
+          </a:xfrm>
+          <a:prstGeom prst="roundRect">
+            <a:avLst>
+              <a:gd name="adj" fmla="val 2078"/>
+            </a:avLst>
+          </a:prstGeom>
+          <a:solidFill>
+            <a:schemeClr val="accent6"/>
+          </a:solidFill>
+          <a:ln w="12700">
+            <a:solidFill>
+              <a:schemeClr val="accent6"/>
+            </a:solidFill>
+            <a:prstDash val="solid"/>
+          </a:ln>
+        </p:spPr>
+      </p:sp>
+      <p:sp>
+        <p:nvSpPr>
+          <p:cNvPr id="5" name="progress tag Done"/>
+          <p:cNvSpPr/>
+          <p:nvPr/>
+        </p:nvSpPr>
+        <p:spPr>
+          <a:xfrm>
+            <a:off x="822960" y="1874520"/>
+            <a:ext cx="1828800" cy="411480"/>
+          </a:xfrm>
+          <a:prstGeom prst="roundRect">
+            <a:avLst>
+              <a:gd name="adj" fmla="val 48889"/>
+            </a:avLst>
+          </a:prstGeom>
+          <a:solidFill>
+            <a:schemeClr val="accent2"/>
+          </a:solidFill>
+          <a:ln w="12700">
+            <a:solidFill>
+              <a:schemeClr val="accent2"/>
+            </a:solidFill>
+            <a:prstDash val="solid"/>
+          </a:ln>
+        </p:spPr>
+      </p:sp>
+      <p:sp>
+        <p:nvSpPr>
+          <p:cNvPr id="6" name="Text 4"/>
+          <p:cNvSpPr txBox="1"/>
+          <p:nvPr/>
+        </p:nvSpPr>
+        <p:spPr>
+          <a:xfrm>
+            <a:off x="822960" y="1874520"/>
+            <a:ext cx="1828800" cy="411480"/>
+          </a:xfrm>
+          <a:prstGeom prst="rect">
+            <a:avLst/>
+          </a:prstGeom>
+          <a:noFill/>
+          <a:ln/>
+        </p:spPr>
+        <p:txBody>
+          <a:bodyPr wrap="square" lIns="0" tIns="0" rIns="0" bIns="0" rtlCol="0" anchor="ctr"/>
+          <a:lstStyle/>
+          <a:p>
+            <a:pPr algn="ctr" indent="0" marL="0">
+              <a:buNone/>
+            </a:pPr>
+            <a:r>
+              <a:rPr lang="en-US" sz="1400" b="1" dirty="0">
+                <a:solidFill>
+                  <a:schemeClr val="bg1"/>
+                </a:solidFill>
+              </a:rPr>
+              <a:t>Done</a:t>
+            </a:r>
+            <a:endParaRPr lang="en-US" sz="1400" dirty="0"/>
+          </a:p>
+        </p:txBody>
+      </p:sp>
+      <p:sp>
+        <p:nvSpPr>
+          <p:cNvPr id="7" name="Text 5"/>
+          <p:cNvSpPr txBox="1"/>
+          <p:nvPr/>
+        </p:nvSpPr>
+        <p:spPr>
+          <a:xfrm>
+            <a:off x="822960" y="2514600"/>
+            <a:ext cx="3017520" cy="3474720"/>
+          </a:xfrm>
+          <a:prstGeom prst="rect">
+            <a:avLst/>
+          </a:prstGeom>
+          <a:noFill/>
+          <a:ln/>
+        </p:spPr>
+        <p:txBody>
+          <a:bodyPr wrap="square" lIns="0" tIns="0" rIns="0" bIns="0" rtlCol="0" anchor="t"/>
+          <a:lstStyle/>
+          <a:p>
+            <a:pPr marL="342900" indent="-342900">
+              <a:spcAft>
+                <a:spcPts val="1000"/>
+              </a:spcAft>
+              <a:buSzPct val="100000"/>
+              <a:buChar char="•"/>
+            </a:pPr>
+            <a:r>
+              <a:rPr lang="en-US" sz="1400" dirty="0">
+                <a:solidFill>
+                  <a:schemeClr val="tx1"/>
+                </a:solidFill>
+              </a:rPr>
+              <a:t>Meeting summary, report and plan</a:t>
+            </a:r>
+            <a:endParaRPr lang="en-US" sz="1400" dirty="0"/>
+          </a:p>
+          <a:p>
+            <a:pPr marL="342900" indent="-342900">
+              <a:spcAft>
+                <a:spcPts val="1000"/>
+              </a:spcAft>
+              <a:buSzPct val="100000"/>
+              <a:buChar char="•"/>
+            </a:pPr>
+            <a:r>
+              <a:rPr lang="en-US" sz="1400" dirty="0">
+                <a:solidFill>
+                  <a:schemeClr val="tx1"/>
+                </a:solidFill>
+              </a:rPr>
+              <a:t>Student system data map (209 systems, 98 connections), aligned with Kevin</a:t>
+            </a:r>
+            <a:endParaRPr lang="en-US" sz="1400" dirty="0"/>
+          </a:p>
+          <a:p>
+            <a:pPr marL="342900" indent="-342900">
+              <a:spcAft>
+                <a:spcPts val="1000"/>
+              </a:spcAft>
+              <a:buSzPct val="100000"/>
+              <a:buChar char="•"/>
+            </a:pPr>
+            <a:r>
+              <a:rPr lang="en-US" sz="1400" dirty="0">
+                <a:solidFill>
+                  <a:schemeClr val="tx1"/>
+                </a:solidFill>
+              </a:rPr>
+              <a:t>Plan and data request sent to Lyndsay, cc Darren</a:t>
+            </a:r>
+            <a:endParaRPr lang="en-US" sz="1400" dirty="0"/>
+          </a:p>
+          <a:p>
+            <a:pPr marL="342900" indent="-342900">
+              <a:spcAft>
+                <a:spcPts val="1000"/>
+              </a:spcAft>
+              <a:buSzPct val="100000"/>
+              <a:buChar char="•"/>
+            </a:pPr>
+            <a:r>
+              <a:rPr lang="en-US" sz="1400" dirty="0">
+                <a:solidFill>
+                  <a:schemeClr val="tx1"/>
+                </a:solidFill>
+              </a:rPr>
+              <a:t>RA5 exploration log set up</a:t>
+            </a:r>
+            <a:endParaRPr lang="en-US" sz="1400" dirty="0"/>
+          </a:p>
+        </p:txBody>
+      </p:sp>
+      <p:sp>
+        <p:nvSpPr>
+          <p:cNvPr id="8" name="progress In progress"/>
+          <p:cNvSpPr/>
+          <p:nvPr/>
+        </p:nvSpPr>
+        <p:spPr>
+          <a:xfrm>
+            <a:off x="4297680" y="1645920"/>
+            <a:ext cx="3520440" cy="4480560"/>
+          </a:xfrm>
+          <a:prstGeom prst="roundRect">
+            <a:avLst>
+              <a:gd name="adj" fmla="val 2078"/>
+            </a:avLst>
+          </a:prstGeom>
+          <a:solidFill>
+            <a:schemeClr val="accent5"/>
+          </a:solidFill>
+          <a:ln w="12700">
+            <a:solidFill>
+              <a:schemeClr val="accent5"/>
+            </a:solidFill>
+            <a:prstDash val="solid"/>
+          </a:ln>
+        </p:spPr>
+      </p:sp>
+      <p:sp>
+        <p:nvSpPr>
+          <p:cNvPr id="9" name="progress tag In progress"/>
+          <p:cNvSpPr/>
+          <p:nvPr/>
+        </p:nvSpPr>
+        <p:spPr>
+          <a:xfrm>
+            <a:off x="4572000" y="1874520"/>
+            <a:ext cx="1828800" cy="411480"/>
+          </a:xfrm>
+          <a:prstGeom prst="roundRect">
+            <a:avLst>
+              <a:gd name="adj" fmla="val 48889"/>
+            </a:avLst>
           </a:prstGeom>
           <a:solidFill>
             <a:schemeClr val="accent1"/>
@@ -3443,6 +4424,455 @@
       </p:sp>
       <p:sp>
         <p:nvSpPr>
+          <p:cNvPr id="10" name="Text 8"/>
+          <p:cNvSpPr txBox="1"/>
+          <p:nvPr/>
+        </p:nvSpPr>
+        <p:spPr>
+          <a:xfrm>
+            <a:off x="4572000" y="1874520"/>
+            <a:ext cx="1828800" cy="411480"/>
+          </a:xfrm>
+          <a:prstGeom prst="rect">
+            <a:avLst/>
+          </a:prstGeom>
+          <a:noFill/>
+          <a:ln/>
+        </p:spPr>
+        <p:txBody>
+          <a:bodyPr wrap="square" lIns="0" tIns="0" rIns="0" bIns="0" rtlCol="0" anchor="ctr"/>
+          <a:lstStyle/>
+          <a:p>
+            <a:pPr algn="ctr" indent="0" marL="0">
+              <a:buNone/>
+            </a:pPr>
+            <a:r>
+              <a:rPr lang="en-US" sz="1400" b="1" dirty="0">
+                <a:solidFill>
+                  <a:schemeClr val="bg1"/>
+                </a:solidFill>
+              </a:rPr>
+              <a:t>In progress</a:t>
+            </a:r>
+            <a:endParaRPr lang="en-US" sz="1400" dirty="0"/>
+          </a:p>
+        </p:txBody>
+      </p:sp>
+      <p:sp>
+        <p:nvSpPr>
+          <p:cNvPr id="11" name="Text 9"/>
+          <p:cNvSpPr txBox="1"/>
+          <p:nvPr/>
+        </p:nvSpPr>
+        <p:spPr>
+          <a:xfrm>
+            <a:off x="4572000" y="2514600"/>
+            <a:ext cx="3017520" cy="3474720"/>
+          </a:xfrm>
+          <a:prstGeom prst="rect">
+            <a:avLst/>
+          </a:prstGeom>
+          <a:noFill/>
+          <a:ln/>
+        </p:spPr>
+        <p:txBody>
+          <a:bodyPr wrap="square" lIns="0" tIns="0" rIns="0" bIns="0" rtlCol="0" anchor="t"/>
+          <a:lstStyle/>
+          <a:p>
+            <a:pPr marL="342900" indent="-342900">
+              <a:spcAft>
+                <a:spcPts val="1000"/>
+              </a:spcAft>
+              <a:buSzPct val="100000"/>
+              <a:buChar char="•"/>
+            </a:pPr>
+            <a:r>
+              <a:rPr lang="en-US" sz="1400" dirty="0">
+                <a:solidFill>
+                  <a:schemeClr val="tx1"/>
+                </a:solidFill>
+              </a:rPr>
+              <a:t>Exploring RA5: pages, filters, definitions</a:t>
+            </a:r>
+            <a:endParaRPr lang="en-US" sz="1400" dirty="0"/>
+          </a:p>
+          <a:p>
+            <a:pPr marL="342900" indent="-342900">
+              <a:spcAft>
+                <a:spcPts val="1000"/>
+              </a:spcAft>
+              <a:buSzPct val="100000"/>
+              <a:buChar char="•"/>
+            </a:pPr>
+            <a:r>
+              <a:rPr lang="en-US" sz="1400" dirty="0">
+                <a:solidFill>
+                  <a:schemeClr val="tx1"/>
+                </a:solidFill>
+              </a:rPr>
+              <a:t>Hand checks of conversion rates, course by course</a:t>
+            </a:r>
+            <a:endParaRPr lang="en-US" sz="1400" dirty="0"/>
+          </a:p>
+          <a:p>
+            <a:pPr marL="342900" indent="-342900">
+              <a:spcAft>
+                <a:spcPts val="1000"/>
+              </a:spcAft>
+              <a:buSzPct val="100000"/>
+              <a:buChar char="•"/>
+            </a:pPr>
+            <a:r>
+              <a:rPr lang="en-US" sz="1400" dirty="0">
+                <a:solidFill>
+                  <a:schemeClr val="tx1"/>
+                </a:solidFill>
+              </a:rPr>
+              <a:t>Recording filters with every number</a:t>
+            </a:r>
+            <a:endParaRPr lang="en-US" sz="1400" dirty="0"/>
+          </a:p>
+        </p:txBody>
+      </p:sp>
+      <p:sp>
+        <p:nvSpPr>
+          <p:cNvPr id="12" name="progress Waiting on others"/>
+          <p:cNvSpPr/>
+          <p:nvPr/>
+        </p:nvSpPr>
+        <p:spPr>
+          <a:xfrm>
+            <a:off x="8046720" y="1645920"/>
+            <a:ext cx="3520440" cy="4480560"/>
+          </a:xfrm>
+          <a:prstGeom prst="roundRect">
+            <a:avLst>
+              <a:gd name="adj" fmla="val 2078"/>
+            </a:avLst>
+          </a:prstGeom>
+          <a:solidFill>
+            <a:srgbClr val="FDF0DF"/>
+          </a:solidFill>
+          <a:ln w="12700">
+            <a:solidFill>
+              <a:srgbClr val="FDF0DF"/>
+            </a:solidFill>
+            <a:prstDash val="solid"/>
+          </a:ln>
+        </p:spPr>
+      </p:sp>
+      <p:sp>
+        <p:nvSpPr>
+          <p:cNvPr id="13" name="progress tag Waiting on others"/>
+          <p:cNvSpPr/>
+          <p:nvPr/>
+        </p:nvSpPr>
+        <p:spPr>
+          <a:xfrm>
+            <a:off x="8321040" y="1874520"/>
+            <a:ext cx="1828800" cy="411480"/>
+          </a:xfrm>
+          <a:prstGeom prst="roundRect">
+            <a:avLst>
+              <a:gd name="adj" fmla="val 48889"/>
+            </a:avLst>
+          </a:prstGeom>
+          <a:solidFill>
+            <a:schemeClr val="accent3"/>
+          </a:solidFill>
+          <a:ln w="12700">
+            <a:solidFill>
+              <a:schemeClr val="accent3"/>
+            </a:solidFill>
+            <a:prstDash val="solid"/>
+          </a:ln>
+        </p:spPr>
+      </p:sp>
+      <p:sp>
+        <p:nvSpPr>
+          <p:cNvPr id="14" name="Text 12"/>
+          <p:cNvSpPr txBox="1"/>
+          <p:nvPr/>
+        </p:nvSpPr>
+        <p:spPr>
+          <a:xfrm>
+            <a:off x="8321040" y="1874520"/>
+            <a:ext cx="1828800" cy="411480"/>
+          </a:xfrm>
+          <a:prstGeom prst="rect">
+            <a:avLst/>
+          </a:prstGeom>
+          <a:noFill/>
+          <a:ln/>
+        </p:spPr>
+        <p:txBody>
+          <a:bodyPr wrap="square" lIns="0" tIns="0" rIns="0" bIns="0" rtlCol="0" anchor="ctr"/>
+          <a:lstStyle/>
+          <a:p>
+            <a:pPr algn="ctr" indent="0" marL="0">
+              <a:buNone/>
+            </a:pPr>
+            <a:r>
+              <a:rPr lang="en-US" sz="1400" b="1" dirty="0">
+                <a:solidFill>
+                  <a:schemeClr val="bg1"/>
+                </a:solidFill>
+              </a:rPr>
+              <a:t>Waiting on others</a:t>
+            </a:r>
+            <a:endParaRPr lang="en-US" sz="1400" dirty="0"/>
+          </a:p>
+        </p:txBody>
+      </p:sp>
+      <p:sp>
+        <p:nvSpPr>
+          <p:cNvPr id="15" name="Text 13"/>
+          <p:cNvSpPr txBox="1"/>
+          <p:nvPr/>
+        </p:nvSpPr>
+        <p:spPr>
+          <a:xfrm>
+            <a:off x="8321040" y="2514600"/>
+            <a:ext cx="3017520" cy="3474720"/>
+          </a:xfrm>
+          <a:prstGeom prst="rect">
+            <a:avLst/>
+          </a:prstGeom>
+          <a:noFill/>
+          <a:ln/>
+        </p:spPr>
+        <p:txBody>
+          <a:bodyPr wrap="square" lIns="0" tIns="0" rIns="0" bIns="0" rtlCol="0" anchor="t"/>
+          <a:lstStyle/>
+          <a:p>
+            <a:pPr marL="342900" indent="-342900">
+              <a:spcAft>
+                <a:spcPts val="1000"/>
+              </a:spcAft>
+              <a:buSzPct val="100000"/>
+              <a:buChar char="•"/>
+            </a:pPr>
+            <a:r>
+              <a:rPr lang="en-US" sz="1400" dirty="0">
+                <a:solidFill>
+                  <a:schemeClr val="tx1"/>
+                </a:solidFill>
+              </a:rPr>
+              <a:t>Lesley: conversion measure, past years, credit statuses</a:t>
+            </a:r>
+            <a:endParaRPr lang="en-US" sz="1400" dirty="0"/>
+          </a:p>
+          <a:p>
+            <a:pPr marL="342900" indent="-342900">
+              <a:spcAft>
+                <a:spcPts val="1000"/>
+              </a:spcAft>
+              <a:buSzPct val="100000"/>
+              <a:buChar char="•"/>
+            </a:pPr>
+            <a:r>
+              <a:rPr lang="en-US" sz="1400" dirty="0">
+                <a:solidFill>
+                  <a:schemeClr val="tx1"/>
+                </a:solidFill>
+              </a:rPr>
+              <a:t>Lyndsay: targets, capacities, credits report, waiting list</a:t>
+            </a:r>
+            <a:endParaRPr lang="en-US" sz="1400" dirty="0"/>
+          </a:p>
+          <a:p>
+            <a:pPr marL="342900" indent="-342900">
+              <a:spcAft>
+                <a:spcPts val="1000"/>
+              </a:spcAft>
+              <a:buSzPct val="100000"/>
+              <a:buChar char="•"/>
+            </a:pPr>
+            <a:r>
+              <a:rPr lang="en-US" sz="1400" dirty="0">
+                <a:solidFill>
+                  <a:schemeClr val="tx1"/>
+                </a:solidFill>
+              </a:rPr>
+              <a:t>Kevin: tables behind the RA5 semantic model</a:t>
+            </a:r>
+            <a:endParaRPr lang="en-US" sz="1400" dirty="0"/>
+          </a:p>
+        </p:txBody>
+      </p:sp>
+      <p:sp>
+        <p:nvSpPr>
+          <p:cNvPr id="25" name="Slide Number Placeholder 0"/>
+          <p:cNvSpPr>
+            <a:spLocks noGrp="1"/>
+          </p:cNvSpPr>
+          <p:nvPr>
+            <p:ph type="sldNum" sz="quarter" idx="4294967295"/>
+          </p:nvPr>
+        </p:nvSpPr>
+        <p:spPr>
+          <a:xfrm>
+            <a:off x="11247120" y="6446520"/>
+            <a:ext cx="457200" cy="274320"/>
+          </a:xfrm>
+          <a:prstGeom prst="rect">
+            <a:avLst/>
+          </a:prstGeom>
+          <a:extLst>
+            <a:ext uri="{C572A759-6A51-4108-AA02-DFA0A04FC94B}">
+              <ma14:wrappingTextBoxFlag xmlns:ma14="http://schemas.microsoft.com/office/mac/drawingml/2011/main" val="0"/>
+            </a:ext>
+          </a:extLst>
+        </p:spPr>
+        <p:txBody>
+          <a:bodyPr/>
+          <a:lstStyle>
+            <a:lvl1pPr>
+              <a:defRPr sz="1000">
+                <a:solidFill>
+                  <a:srgbClr val="6B6F80"/>
+                </a:solidFill>
+              </a:defRPr>
+            </a:lvl1pPr>
+          </a:lstStyle>
+          <a:p>
+            <a:pPr algn="r"/>
+            <a:fld id="{F7021451-1387-4CA6-816F-3879F97B5CBC}" type="slidenum">
+              <a:rPr b="0" lang="en-US"/>
+              <a:t>11</a:t>
+            </a:fld>
+            <a:endParaRPr lang="en-US"/>
+          </a:p>
+        </p:txBody>
+      </p:sp>
+    </p:spTree>
+  </p:cSld>
+  <p:clrMapOvr>
+    <a:masterClrMapping/>
+  </p:clrMapOvr>
+</p:sld>
+</file>
+
+<file path=ppt/slides/slide12.xml><?xml version="1.0" encoding="utf-8"?>
+<p:sld xmlns:a="http://schemas.openxmlformats.org/drawingml/2006/main" xmlns:r="http://schemas.openxmlformats.org/officeDocument/2006/relationships" xmlns:p="http://schemas.openxmlformats.org/presentationml/2006/main">
+  <p:cSld name="Slide 12">
+    <p:spTree>
+      <p:nvGrpSpPr>
+        <p:cNvPr id="1" name=""/>
+        <p:cNvGrpSpPr/>
+        <p:nvPr/>
+      </p:nvGrpSpPr>
+      <p:grpSpPr>
+        <a:xfrm>
+          <a:off x="0" y="0"/>
+          <a:ext cx="0" cy="0"/>
+          <a:chOff x="0" y="0"/>
+          <a:chExt cx="0" cy="0"/>
+        </a:xfrm>
+      </p:grpSpPr>
+      <p:sp>
+        <p:nvSpPr>
+          <p:cNvPr id="2" name="Text 0"/>
+          <p:cNvSpPr/>
+          <p:nvPr>
+            <p:ph idx="100" type="title" hasCustomPrompt="1"/>
+          </p:nvPr>
+        </p:nvSpPr>
+        <p:spPr>
+          <a:xfrm>
+            <a:off x="548640" y="320040"/>
+            <a:ext cx="11064240" cy="731520"/>
+          </a:xfrm>
+          <a:prstGeom prst="rect">
+            <a:avLst/>
+          </a:prstGeom>
+          <a:noFill/>
+          <a:ln/>
+        </p:spPr>
+        <p:txBody>
+          <a:bodyPr wrap="square" lIns="0" tIns="0" rIns="0" bIns="0" rtlCol="0" anchor="ctr"/>
+          <a:lstStyle/>
+          <a:p>
+            <a:pPr indent="0" marL="0">
+              <a:buNone/>
+            </a:pPr>
+            <a:r>
+              <a:rPr lang="en-US" sz="3200" b="1" dirty="0">
+                <a:solidFill>
+                  <a:schemeClr val="tx2"/>
+                </a:solidFill>
+              </a:rPr>
+              <a:t>Next steps and what I need</a:t>
+            </a:r>
+            <a:endParaRPr lang="en-US" sz="3200" dirty="0"/>
+          </a:p>
+        </p:txBody>
+      </p:sp>
+      <p:sp>
+        <p:nvSpPr>
+          <p:cNvPr id="3" name="Text 0"/>
+          <p:cNvSpPr/>
+          <p:nvPr>
+            <p:ph idx="101" type="body" hasCustomPrompt="1"/>
+          </p:nvPr>
+        </p:nvSpPr>
+        <p:spPr>
+          <a:xfrm>
+            <a:off x="548640" y="1005840"/>
+            <a:ext cx="11064240" cy="411480"/>
+          </a:xfrm>
+          <a:prstGeom prst="rect">
+            <a:avLst/>
+          </a:prstGeom>
+          <a:noFill/>
+          <a:ln/>
+        </p:spPr>
+        <p:txBody>
+          <a:bodyPr wrap="square" lIns="0" tIns="0" rIns="0" bIns="0" rtlCol="0" anchor="t"/>
+          <a:lstStyle/>
+          <a:p>
+            <a:pPr indent="0" marL="0">
+              <a:buNone/>
+            </a:pPr>
+            <a:r>
+              <a:rPr lang="en-US" sz="1500" dirty="0">
+                <a:solidFill>
+                  <a:schemeClr val="tx1"/>
+                </a:solidFill>
+              </a:rPr>
+              <a:t>Aim: a construction prototype ready for the check-in after the October break; the full baseline before Christmas</a:t>
+            </a:r>
+            <a:endParaRPr lang="en-US" sz="1500" dirty="0"/>
+          </a:p>
+        </p:txBody>
+      </p:sp>
+      <p:sp>
+        <p:nvSpPr>
+          <p:cNvPr id="4" name="dot 1"/>
+          <p:cNvSpPr/>
+          <p:nvPr/>
+        </p:nvSpPr>
+        <p:spPr>
+          <a:xfrm>
+            <a:off x="1527048" y="1737360"/>
+            <a:ext cx="640080" cy="640080"/>
+          </a:xfrm>
+          <a:prstGeom prst="ellipse">
+            <a:avLst/>
+          </a:prstGeom>
+          <a:solidFill>
+            <a:schemeClr val="accent1"/>
+          </a:solidFill>
+          <a:ln w="12700">
+            <a:solidFill>
+              <a:schemeClr val="accent1"/>
+            </a:solidFill>
+            <a:prstDash val="solid"/>
+          </a:ln>
+        </p:spPr>
+      </p:sp>
+      <p:sp>
+        <p:nvSpPr>
           <p:cNvPr id="5" name="Text 3"/>
           <p:cNvSpPr txBox="1"/>
           <p:nvPr/>
@@ -4395,7 +5825,7 @@
             <a:pPr algn="r"/>
             <a:fld id="{F7021451-1387-4CA6-816F-3879F97B5CBC}" type="slidenum">
               <a:rPr b="0" lang="en-US"/>
-              <a:t>11</a:t>
+              <a:t>12</a:t>
             </a:fld>
             <a:endParaRPr lang="en-US"/>
           </a:p>
@@ -7183,7 +8613,7 @@
                   <a:schemeClr val="tx2"/>
                 </a:solidFill>
               </a:rPr>
-              <a:t>Where students drop out</a:t>
+              <a:t>Student System: the high-level map</a:t>
             </a:r>
             <a:endParaRPr lang="en-US" sz="3200" dirty="0"/>
           </a:p>
@@ -7221,103 +8651,50 @@
                   <a:schemeClr val="tx1"/>
                 </a:solidFill>
               </a:rPr>
-              <a:t>Once the rates are clean, we can see the stage where each course loses people</a:t>
+              <a:t>16 systems grouped into four zones, drawn from the Lucid working file</a:t>
             </a:r>
             <a:endParaRPr lang="en-US" sz="1500" dirty="0"/>
           </a:p>
         </p:txBody>
       </p:sp>
-      <p:sp>
-        <p:nvSpPr>
-          <p:cNvPr id="4" name="funnel 1"/>
+      <p:pic>
+        <p:nvPicPr>
+          <p:cNvPr id="4" name="Image 0" descr="Student System high-level data architecture: four zones (Capture, Engage and support, Core record, Student-facing services) feeding a SQL Server data connector and Power BI">    </p:cNvPr>
+          <p:cNvPicPr>
+            <a:picLocks noChangeAspect="1"/>
+          </p:cNvPicPr>
+          <p:nvPr/>
+        </p:nvPicPr>
+        <p:blipFill>
+          <a:blip r:embed="rId1"/>
+          <a:stretch>
+            <a:fillRect/>
+          </a:stretch>
+        </p:blipFill>
+        <p:spPr>
+          <a:xfrm>
+            <a:off x="548640" y="1554480"/>
+            <a:ext cx="6272784" cy="4754880"/>
+          </a:xfrm>
+          <a:prstGeom prst="rect">
+            <a:avLst/>
+          </a:prstGeom>
+        </p:spPr>
+      </p:pic>
+      <p:sp>
+        <p:nvSpPr>
+          <p:cNvPr id="5" name="map guide"/>
           <p:cNvSpPr/>
           <p:nvPr/>
         </p:nvSpPr>
         <p:spPr>
           <a:xfrm>
-            <a:off x="548640" y="1645920"/>
-            <a:ext cx="5120640" cy="749808"/>
+            <a:off x="7086600" y="1554480"/>
+            <a:ext cx="4526280" cy="4754880"/>
           </a:xfrm>
           <a:prstGeom prst="roundRect">
             <a:avLst>
-              <a:gd name="adj" fmla="val 9756"/>
-            </a:avLst>
-          </a:prstGeom>
-          <a:solidFill>
-            <a:schemeClr val="accent1"/>
-          </a:solidFill>
-          <a:ln w="12700">
-            <a:solidFill>
-              <a:schemeClr val="accent1"/>
-            </a:solidFill>
-            <a:prstDash val="solid"/>
-          </a:ln>
-        </p:spPr>
-      </p:sp>
-      <p:sp>
-        <p:nvSpPr>
-          <p:cNvPr id="5" name="Text 3"/>
-          <p:cNvSpPr txBox="1"/>
-          <p:nvPr/>
-        </p:nvSpPr>
-        <p:spPr>
-          <a:xfrm>
-            <a:off x="548640" y="1645920"/>
-            <a:ext cx="5120640" cy="749808"/>
-          </a:xfrm>
-          <a:prstGeom prst="rect">
-            <a:avLst/>
-          </a:prstGeom>
-          <a:noFill/>
-          <a:ln/>
-        </p:spPr>
-        <p:txBody>
-          <a:bodyPr wrap="square" lIns="0" tIns="0" rIns="0" bIns="0" rtlCol="0" anchor="ctr"/>
-          <a:lstStyle/>
-          <a:p>
-            <a:pPr algn="ctr" indent="0" marL="0">
-              <a:buNone/>
-            </a:pPr>
-            <a:r>
-              <a:rPr lang="en-US" sz="1400" b="1" dirty="0">
-                <a:solidFill>
-                  <a:schemeClr val="bg1"/>
-                </a:solidFill>
-              </a:rPr>
-              <a:t>Application</a:t>
-            </a:r>
-            <a:endParaRPr lang="en-US" sz="1400" dirty="0"/>
-          </a:p>
-          <a:p>
-            <a:pPr algn="ctr" indent="0" marL="0">
-              <a:buNone/>
-            </a:pPr>
-            <a:r>
-              <a:rPr lang="en-US" sz="1100" dirty="0">
-                <a:solidFill>
-                  <a:schemeClr val="bg1"/>
-                </a:solidFill>
-              </a:rPr>
-              <a:t>Applied for the course</a:t>
-            </a:r>
-            <a:endParaRPr lang="en-US" sz="1400" dirty="0"/>
-          </a:p>
-        </p:txBody>
-      </p:sp>
-      <p:sp>
-        <p:nvSpPr>
-          <p:cNvPr id="6" name="cause 1"/>
-          <p:cNvSpPr/>
-          <p:nvPr/>
-        </p:nvSpPr>
-        <p:spPr>
-          <a:xfrm>
-            <a:off x="6035040" y="1645920"/>
-            <a:ext cx="5577840" cy="749808"/>
-          </a:xfrm>
-          <a:prstGeom prst="roundRect">
-            <a:avLst>
-              <a:gd name="adj" fmla="val 9756"/>
+              <a:gd name="adj" fmla="val 1616"/>
             </a:avLst>
           </a:prstGeom>
           <a:solidFill>
@@ -7333,649 +8710,148 @@
       </p:sp>
       <p:sp>
         <p:nvSpPr>
-          <p:cNvPr id="7" name="Text 5"/>
+          <p:cNvPr id="6" name="Text 3"/>
           <p:cNvSpPr txBox="1"/>
           <p:nvPr/>
         </p:nvSpPr>
         <p:spPr>
           <a:xfrm>
-            <a:off x="6263640" y="1645920"/>
-            <a:ext cx="5212080" cy="749808"/>
-          </a:xfrm>
-          <a:prstGeom prst="rect">
-            <a:avLst/>
-          </a:prstGeom>
-          <a:noFill/>
-          <a:ln/>
-        </p:spPr>
-        <p:txBody>
-          <a:bodyPr wrap="square" lIns="0" tIns="0" rIns="0" bIns="0" rtlCol="0" anchor="ctr"/>
+            <a:off x="7315200" y="1737360"/>
+            <a:ext cx="4114800" cy="4023360"/>
+          </a:xfrm>
+          <a:prstGeom prst="rect">
+            <a:avLst/>
+          </a:prstGeom>
+          <a:noFill/>
+          <a:ln/>
+        </p:spPr>
+        <p:txBody>
+          <a:bodyPr wrap="square" lIns="0" tIns="0" rIns="0" bIns="0" rtlCol="0" anchor="t"/>
           <a:lstStyle/>
           <a:p>
             <a:pPr indent="0" marL="0">
-              <a:buNone/>
-            </a:pPr>
-            <a:r>
-              <a:rPr lang="en-US" sz="1300" dirty="0">
+              <a:spcAft>
+                <a:spcPts val="800"/>
+              </a:spcAft>
+              <a:buNone/>
+            </a:pPr>
+            <a:r>
+              <a:rPr lang="en-US" sz="1700" b="1" dirty="0">
+                <a:solidFill>
+                  <a:schemeClr val="tx2"/>
+                </a:solidFill>
+              </a:rPr>
+              <a:t>How to read it</a:t>
+            </a:r>
+            <a:endParaRPr lang="en-US" sz="1350" dirty="0"/>
+          </a:p>
+          <a:p>
+            <a:pPr marL="342900" indent="-342900">
+              <a:spcAft>
+                <a:spcPts val="800"/>
+              </a:spcAft>
+              <a:buSzPct val="100000"/>
+              <a:buChar char="•"/>
+            </a:pPr>
+            <a:r>
+              <a:rPr lang="en-US" sz="1350" dirty="0">
                 <a:solidFill>
                   <a:schemeClr val="tx1"/>
                 </a:solidFill>
               </a:rPr>
-              <a:t>People don't turn up to the skills test (construction)</a:t>
-            </a:r>
-            <a:endParaRPr lang="en-US" sz="1300" dirty="0"/>
-          </a:p>
-        </p:txBody>
-      </p:sp>
-      <p:sp>
-        <p:nvSpPr>
-          <p:cNvPr id="8" name="funnel 2"/>
-          <p:cNvSpPr/>
-          <p:nvPr/>
-        </p:nvSpPr>
-        <p:spPr>
-          <a:xfrm>
-            <a:off x="868680" y="2560320"/>
-            <a:ext cx="4480560" cy="749808"/>
-          </a:xfrm>
-          <a:prstGeom prst="roundRect">
-            <a:avLst>
-              <a:gd name="adj" fmla="val 9756"/>
-            </a:avLst>
-          </a:prstGeom>
-          <a:solidFill>
-            <a:schemeClr val="accent1">
-              <a:alpha val="92000"/>
-            </a:schemeClr>
-          </a:solidFill>
-          <a:ln w="12700">
-            <a:solidFill>
-              <a:schemeClr val="accent1">
-                <a:alpha val="92000"/>
-              </a:schemeClr>
-            </a:solidFill>
-            <a:prstDash val="solid"/>
-          </a:ln>
-        </p:spPr>
-      </p:sp>
-      <p:sp>
-        <p:nvSpPr>
-          <p:cNvPr id="9" name="Text 7"/>
+              <a:t>Data flows left to right: captured, worked on, held in UnitE, then served to students.</a:t>
+            </a:r>
+            <a:endParaRPr lang="en-US" sz="1350" dirty="0"/>
+          </a:p>
+          <a:p>
+            <a:pPr marL="342900" indent="-342900">
+              <a:spcAft>
+                <a:spcPts val="800"/>
+              </a:spcAft>
+              <a:buSzPct val="100000"/>
+              <a:buChar char="•"/>
+            </a:pPr>
+            <a:r>
+              <a:rPr lang="en-US" sz="1350" dirty="0">
+                <a:solidFill>
+                  <a:schemeClr val="tx1"/>
+                </a:solidFill>
+              </a:rPr>
+              <a:t>Purple boxes are the two core systems: Enquirer and UnitE.</a:t>
+            </a:r>
+            <a:endParaRPr lang="en-US" sz="1350" dirty="0"/>
+          </a:p>
+          <a:p>
+            <a:pPr marL="342900" indent="-342900">
+              <a:spcAft>
+                <a:spcPts val="800"/>
+              </a:spcAft>
+              <a:buSzPct val="100000"/>
+              <a:buChar char="•"/>
+            </a:pPr>
+            <a:r>
+              <a:rPr lang="en-US" sz="1350" dirty="0">
+                <a:solidFill>
+                  <a:schemeClr val="tx1"/>
+                </a:solidFill>
+              </a:rPr>
+              <a:t>Amber dashed lines are manual hand-offs, including applications going into UnitE and student updates coming back.</a:t>
+            </a:r>
+            <a:endParaRPr lang="en-US" sz="1350" dirty="0"/>
+          </a:p>
+          <a:p>
+            <a:pPr marL="342900" indent="-342900">
+              <a:spcAft>
+                <a:spcPts val="800"/>
+              </a:spcAft>
+              <a:buSzPct val="100000"/>
+              <a:buChar char="•"/>
+            </a:pPr>
+            <a:r>
+              <a:rPr lang="en-US" sz="1350" dirty="0">
+                <a:solidFill>
+                  <a:schemeClr val="tx1"/>
+                </a:solidFill>
+              </a:rPr>
+              <a:t>Enquirer, TripleS, Bursary, UnitE and iTrent feed Power BI through the SQL Server connector.</a:t>
+            </a:r>
+            <a:endParaRPr lang="en-US" sz="1350" dirty="0"/>
+          </a:p>
+        </p:txBody>
+      </p:sp>
+      <p:sp>
+        <p:nvSpPr>
+          <p:cNvPr id="7" name="Text 4"/>
           <p:cNvSpPr txBox="1"/>
           <p:nvPr/>
         </p:nvSpPr>
         <p:spPr>
           <a:xfrm>
-            <a:off x="868680" y="2560320"/>
-            <a:ext cx="4480560" cy="749808"/>
-          </a:xfrm>
-          <a:prstGeom prst="rect">
-            <a:avLst/>
-          </a:prstGeom>
-          <a:noFill/>
-          <a:ln/>
-        </p:spPr>
-        <p:txBody>
-          <a:bodyPr wrap="square" lIns="0" tIns="0" rIns="0" bIns="0" rtlCol="0" anchor="ctr"/>
-          <a:lstStyle/>
-          <a:p>
-            <a:pPr algn="ctr" indent="0" marL="0">
-              <a:buNone/>
-            </a:pPr>
-            <a:r>
-              <a:rPr lang="en-US" sz="1400" b="1" dirty="0">
-                <a:solidFill>
-                  <a:schemeClr val="bg1"/>
-                </a:solidFill>
-              </a:rPr>
-              <a:t>Interview / skills test</a:t>
-            </a:r>
-            <a:endParaRPr lang="en-US" sz="1400" dirty="0"/>
-          </a:p>
-          <a:p>
-            <a:pPr algn="ctr" indent="0" marL="0">
-              <a:buNone/>
-            </a:pPr>
-            <a:r>
-              <a:rPr lang="en-US" sz="1100" dirty="0">
-                <a:solidFill>
-                  <a:schemeClr val="bg1"/>
-                </a:solidFill>
-              </a:rPr>
-              <a:t>Seen by the department</a:t>
-            </a:r>
-            <a:endParaRPr lang="en-US" sz="1400" dirty="0"/>
-          </a:p>
-        </p:txBody>
-      </p:sp>
-      <p:sp>
-        <p:nvSpPr>
-          <p:cNvPr id="10" name="cause 2"/>
-          <p:cNvSpPr/>
-          <p:nvPr/>
-        </p:nvSpPr>
-        <p:spPr>
-          <a:xfrm>
-            <a:off x="6035040" y="2560320"/>
-            <a:ext cx="5577840" cy="749808"/>
-          </a:xfrm>
-          <a:prstGeom prst="roundRect">
-            <a:avLst>
-              <a:gd name="adj" fmla="val 9756"/>
-            </a:avLst>
-          </a:prstGeom>
-          <a:solidFill>
-            <a:schemeClr val="bg2"/>
-          </a:solidFill>
-          <a:ln w="12700">
-            <a:solidFill>
-              <a:schemeClr val="bg2"/>
-            </a:solidFill>
-            <a:prstDash val="solid"/>
-          </a:ln>
-        </p:spPr>
-      </p:sp>
-      <p:sp>
-        <p:nvSpPr>
-          <p:cNvPr id="11" name="Text 9"/>
-          <p:cNvSpPr txBox="1"/>
-          <p:nvPr/>
-        </p:nvSpPr>
-        <p:spPr>
-          <a:xfrm>
-            <a:off x="6263640" y="2560320"/>
-            <a:ext cx="5212080" cy="749808"/>
-          </a:xfrm>
-          <a:prstGeom prst="rect">
-            <a:avLst/>
-          </a:prstGeom>
-          <a:noFill/>
-          <a:ln/>
-        </p:spPr>
-        <p:txBody>
-          <a:bodyPr wrap="square" lIns="0" tIns="0" rIns="0" bIns="0" rtlCol="0" anchor="ctr"/>
+            <a:off x="7315200" y="5760720"/>
+            <a:ext cx="4114800" cy="457200"/>
+          </a:xfrm>
+          <a:prstGeom prst="rect">
+            <a:avLst/>
+          </a:prstGeom>
+          <a:noFill/>
+          <a:ln/>
+        </p:spPr>
+        <p:txBody>
+          <a:bodyPr wrap="square" lIns="0" tIns="0" rIns="0" bIns="0" rtlCol="0" anchor="b"/>
           <a:lstStyle/>
           <a:p>
             <a:pPr indent="0" marL="0">
               <a:buNone/>
             </a:pPr>
             <a:r>
-              <a:rPr lang="en-US" sz="1300" dirty="0">
-                <a:solidFill>
-                  <a:schemeClr val="tx1"/>
-                </a:solidFill>
-              </a:rPr>
-              <a:t>Lecturers hold back, or make waiting-list offers</a:t>
-            </a:r>
-            <a:endParaRPr lang="en-US" sz="1300" dirty="0"/>
-          </a:p>
-        </p:txBody>
-      </p:sp>
-      <p:sp>
-        <p:nvSpPr>
-          <p:cNvPr id="12" name="funnel 3"/>
-          <p:cNvSpPr/>
-          <p:nvPr/>
-        </p:nvSpPr>
-        <p:spPr>
-          <a:xfrm>
-            <a:off x="1188720" y="3474720"/>
-            <a:ext cx="3840480" cy="749808"/>
-          </a:xfrm>
-          <a:prstGeom prst="roundRect">
-            <a:avLst>
-              <a:gd name="adj" fmla="val 9756"/>
-            </a:avLst>
-          </a:prstGeom>
-          <a:solidFill>
-            <a:schemeClr val="accent1">
-              <a:alpha val="84000"/>
-            </a:schemeClr>
-          </a:solidFill>
-          <a:ln w="12700">
-            <a:solidFill>
-              <a:schemeClr val="accent1">
-                <a:alpha val="84000"/>
-              </a:schemeClr>
-            </a:solidFill>
-            <a:prstDash val="solid"/>
-          </a:ln>
-        </p:spPr>
-      </p:sp>
-      <p:sp>
-        <p:nvSpPr>
-          <p:cNvPr id="13" name="Text 11"/>
-          <p:cNvSpPr txBox="1"/>
-          <p:nvPr/>
-        </p:nvSpPr>
-        <p:spPr>
-          <a:xfrm>
-            <a:off x="1188720" y="3474720"/>
-            <a:ext cx="3840480" cy="749808"/>
-          </a:xfrm>
-          <a:prstGeom prst="rect">
-            <a:avLst/>
-          </a:prstGeom>
-          <a:noFill/>
-          <a:ln/>
-        </p:spPr>
-        <p:txBody>
-          <a:bodyPr wrap="square" lIns="0" tIns="0" rIns="0" bIns="0" rtlCol="0" anchor="ctr"/>
-          <a:lstStyle/>
-          <a:p>
-            <a:pPr algn="ctr" indent="0" marL="0">
-              <a:buNone/>
-            </a:pPr>
-            <a:r>
-              <a:rPr lang="en-US" sz="1400" b="1" dirty="0">
-                <a:solidFill>
-                  <a:schemeClr val="bg1"/>
-                </a:solidFill>
-              </a:rPr>
-              <a:t>Offer</a:t>
-            </a:r>
-            <a:endParaRPr lang="en-US" sz="1400" dirty="0"/>
-          </a:p>
-          <a:p>
-            <a:pPr algn="ctr" indent="0" marL="0">
-              <a:buNone/>
-            </a:pPr>
-            <a:r>
-              <a:rPr lang="en-US" sz="1100" dirty="0">
-                <a:solidFill>
-                  <a:schemeClr val="bg1"/>
-                </a:solidFill>
-              </a:rPr>
-              <a:t>Offer made</a:t>
-            </a:r>
-            <a:endParaRPr lang="en-US" sz="1400" dirty="0"/>
-          </a:p>
-        </p:txBody>
-      </p:sp>
-      <p:sp>
-        <p:nvSpPr>
-          <p:cNvPr id="14" name="cause 3"/>
-          <p:cNvSpPr/>
-          <p:nvPr/>
-        </p:nvSpPr>
-        <p:spPr>
-          <a:xfrm>
-            <a:off x="6035040" y="3474720"/>
-            <a:ext cx="5577840" cy="749808"/>
-          </a:xfrm>
-          <a:prstGeom prst="roundRect">
-            <a:avLst>
-              <a:gd name="adj" fmla="val 9756"/>
-            </a:avLst>
-          </a:prstGeom>
-          <a:solidFill>
-            <a:schemeClr val="bg2"/>
-          </a:solidFill>
-          <a:ln w="12700">
-            <a:solidFill>
-              <a:schemeClr val="bg2"/>
-            </a:solidFill>
-            <a:prstDash val="solid"/>
-          </a:ln>
-        </p:spPr>
-      </p:sp>
-      <p:sp>
-        <p:nvSpPr>
-          <p:cNvPr id="15" name="Text 13"/>
-          <p:cNvSpPr txBox="1"/>
-          <p:nvPr/>
-        </p:nvSpPr>
-        <p:spPr>
-          <a:xfrm>
-            <a:off x="6263640" y="3474720"/>
-            <a:ext cx="5212080" cy="749808"/>
-          </a:xfrm>
-          <a:prstGeom prst="rect">
-            <a:avLst/>
-          </a:prstGeom>
-          <a:noFill/>
-          <a:ln/>
-        </p:spPr>
-        <p:txBody>
-          <a:bodyPr wrap="square" lIns="0" tIns="0" rIns="0" bIns="0" rtlCol="0" anchor="ctr"/>
-          <a:lstStyle/>
-          <a:p>
-            <a:pPr indent="0" marL="0">
-              <a:buNone/>
-            </a:pPr>
-            <a:r>
-              <a:rPr lang="en-US" sz="1300" dirty="0">
-                <a:solidFill>
-                  <a:schemeClr val="tx1"/>
-                </a:solidFill>
-              </a:rPr>
-              <a:t>Offers turned down; waiting-list offers go to people unlikely to come</a:t>
-            </a:r>
-            <a:endParaRPr lang="en-US" sz="1300" dirty="0"/>
-          </a:p>
-        </p:txBody>
-      </p:sp>
-      <p:sp>
-        <p:nvSpPr>
-          <p:cNvPr id="16" name="funnel 4"/>
-          <p:cNvSpPr/>
-          <p:nvPr/>
-        </p:nvSpPr>
-        <p:spPr>
-          <a:xfrm>
-            <a:off x="1508760" y="4389120"/>
-            <a:ext cx="3200400" cy="749808"/>
-          </a:xfrm>
-          <a:prstGeom prst="roundRect">
-            <a:avLst>
-              <a:gd name="adj" fmla="val 9756"/>
-            </a:avLst>
-          </a:prstGeom>
-          <a:solidFill>
-            <a:schemeClr val="accent1">
-              <a:alpha val="76000"/>
-            </a:schemeClr>
-          </a:solidFill>
-          <a:ln w="12700">
-            <a:solidFill>
-              <a:schemeClr val="accent1">
-                <a:alpha val="76000"/>
-              </a:schemeClr>
-            </a:solidFill>
-            <a:prstDash val="solid"/>
-          </a:ln>
-        </p:spPr>
-      </p:sp>
-      <p:sp>
-        <p:nvSpPr>
-          <p:cNvPr id="17" name="Text 15"/>
-          <p:cNvSpPr txBox="1"/>
-          <p:nvPr/>
-        </p:nvSpPr>
-        <p:spPr>
-          <a:xfrm>
-            <a:off x="1508760" y="4389120"/>
-            <a:ext cx="3200400" cy="749808"/>
-          </a:xfrm>
-          <a:prstGeom prst="rect">
-            <a:avLst/>
-          </a:prstGeom>
-          <a:noFill/>
-          <a:ln/>
-        </p:spPr>
-        <p:txBody>
-          <a:bodyPr wrap="square" lIns="0" tIns="0" rIns="0" bIns="0" rtlCol="0" anchor="ctr"/>
-          <a:lstStyle/>
-          <a:p>
-            <a:pPr algn="ctr" indent="0" marL="0">
-              <a:buNone/>
-            </a:pPr>
-            <a:r>
-              <a:rPr lang="en-US" sz="1400" b="1" dirty="0">
-                <a:solidFill>
-                  <a:schemeClr val="bg1"/>
-                </a:solidFill>
-              </a:rPr>
-              <a:t>Enrolment (day one)</a:t>
-            </a:r>
-            <a:endParaRPr lang="en-US" sz="1400" dirty="0"/>
-          </a:p>
-          <a:p>
-            <a:pPr algn="ctr" indent="0" marL="0">
-              <a:buNone/>
-            </a:pPr>
-            <a:r>
-              <a:rPr lang="en-US" sz="1100" dirty="0">
-                <a:solidFill>
-                  <a:schemeClr val="bg1"/>
-                </a:solidFill>
-              </a:rPr>
-              <a:t>Starts the course</a:t>
-            </a:r>
-            <a:endParaRPr lang="en-US" sz="1400" dirty="0"/>
-          </a:p>
-        </p:txBody>
-      </p:sp>
-      <p:sp>
-        <p:nvSpPr>
-          <p:cNvPr id="18" name="cause 4"/>
-          <p:cNvSpPr/>
-          <p:nvPr/>
-        </p:nvSpPr>
-        <p:spPr>
-          <a:xfrm>
-            <a:off x="6035040" y="4389120"/>
-            <a:ext cx="5577840" cy="749808"/>
-          </a:xfrm>
-          <a:prstGeom prst="roundRect">
-            <a:avLst>
-              <a:gd name="adj" fmla="val 9756"/>
-            </a:avLst>
-          </a:prstGeom>
-          <a:solidFill>
-            <a:schemeClr val="bg2"/>
-          </a:solidFill>
-          <a:ln w="12700">
-            <a:solidFill>
-              <a:schemeClr val="bg2"/>
-            </a:solidFill>
-            <a:prstDash val="solid"/>
-          </a:ln>
-        </p:spPr>
-      </p:sp>
-      <p:sp>
-        <p:nvSpPr>
-          <p:cNvPr id="19" name="Text 17"/>
-          <p:cNvSpPr txBox="1"/>
-          <p:nvPr/>
-        </p:nvSpPr>
-        <p:spPr>
-          <a:xfrm>
-            <a:off x="6263640" y="4389120"/>
-            <a:ext cx="5212080" cy="749808"/>
-          </a:xfrm>
-          <a:prstGeom prst="rect">
-            <a:avLst/>
-          </a:prstGeom>
-          <a:noFill/>
-          <a:ln/>
-        </p:spPr>
-        <p:txBody>
-          <a:bodyPr wrap="square" lIns="0" tIns="0" rIns="0" bIns="0" rtlCol="0" anchor="ctr"/>
-          <a:lstStyle/>
-          <a:p>
-            <a:pPr indent="0" marL="0">
-              <a:buNone/>
-            </a:pPr>
-            <a:r>
-              <a:rPr lang="en-US" sz="1300" dirty="0">
-                <a:solidFill>
-                  <a:schemeClr val="tx1"/>
-                </a:solidFill>
-              </a:rPr>
-              <a:t>Early dropout before credits are claimed</a:t>
-            </a:r>
-            <a:endParaRPr lang="en-US" sz="1300" dirty="0"/>
-          </a:p>
-        </p:txBody>
-      </p:sp>
-      <p:sp>
-        <p:nvSpPr>
-          <p:cNvPr id="20" name="funnel 5"/>
-          <p:cNvSpPr/>
-          <p:nvPr/>
-        </p:nvSpPr>
-        <p:spPr>
-          <a:xfrm>
-            <a:off x="1828800" y="5303520"/>
-            <a:ext cx="2560320" cy="749808"/>
-          </a:xfrm>
-          <a:prstGeom prst="roundRect">
-            <a:avLst>
-              <a:gd name="adj" fmla="val 9756"/>
-            </a:avLst>
-          </a:prstGeom>
-          <a:solidFill>
-            <a:schemeClr val="accent2">
-              <a:alpha val="68000"/>
-            </a:schemeClr>
-          </a:solidFill>
-          <a:ln w="12700">
-            <a:solidFill>
-              <a:schemeClr val="accent2">
-                <a:alpha val="68000"/>
-              </a:schemeClr>
-            </a:solidFill>
-            <a:prstDash val="solid"/>
-          </a:ln>
-        </p:spPr>
-      </p:sp>
-      <p:sp>
-        <p:nvSpPr>
-          <p:cNvPr id="21" name="Text 19"/>
-          <p:cNvSpPr txBox="1"/>
-          <p:nvPr/>
-        </p:nvSpPr>
-        <p:spPr>
-          <a:xfrm>
-            <a:off x="1828800" y="5303520"/>
-            <a:ext cx="2560320" cy="749808"/>
-          </a:xfrm>
-          <a:prstGeom prst="rect">
-            <a:avLst/>
-          </a:prstGeom>
-          <a:noFill/>
-          <a:ln/>
-        </p:spPr>
-        <p:txBody>
-          <a:bodyPr wrap="square" lIns="0" tIns="0" rIns="0" bIns="0" rtlCol="0" anchor="ctr"/>
-          <a:lstStyle/>
-          <a:p>
-            <a:pPr algn="ctr" indent="0" marL="0">
-              <a:buNone/>
-            </a:pPr>
-            <a:r>
-              <a:rPr lang="en-US" sz="1400" b="1" dirty="0">
-                <a:solidFill>
-                  <a:schemeClr val="bg1"/>
-                </a:solidFill>
-              </a:rPr>
-              <a:t>Enrolled at ~6 weeks</a:t>
-            </a:r>
-            <a:endParaRPr lang="en-US" sz="1400" dirty="0"/>
-          </a:p>
-          <a:p>
-            <a:pPr algn="ctr" indent="0" marL="0">
-              <a:buNone/>
-            </a:pPr>
-            <a:r>
-              <a:rPr lang="en-US" sz="1100" dirty="0">
-                <a:solidFill>
-                  <a:schemeClr val="bg1"/>
-                </a:solidFill>
-              </a:rPr>
-              <a:t>Credits claimed</a:t>
-            </a:r>
-            <a:endParaRPr lang="en-US" sz="1400" dirty="0"/>
-          </a:p>
-        </p:txBody>
-      </p:sp>
-      <p:sp>
-        <p:nvSpPr>
-          <p:cNvPr id="22" name="cause 5"/>
-          <p:cNvSpPr/>
-          <p:nvPr/>
-        </p:nvSpPr>
-        <p:spPr>
-          <a:xfrm>
-            <a:off x="6035040" y="5303520"/>
-            <a:ext cx="5577840" cy="749808"/>
-          </a:xfrm>
-          <a:prstGeom prst="roundRect">
-            <a:avLst>
-              <a:gd name="adj" fmla="val 9756"/>
-            </a:avLst>
-          </a:prstGeom>
-          <a:solidFill>
-            <a:schemeClr val="accent6"/>
-          </a:solidFill>
-          <a:ln w="12700">
-            <a:solidFill>
-              <a:schemeClr val="accent6"/>
-            </a:solidFill>
-            <a:prstDash val="solid"/>
-          </a:ln>
-        </p:spPr>
-      </p:sp>
-      <p:sp>
-        <p:nvSpPr>
-          <p:cNvPr id="23" name="Text 21"/>
-          <p:cNvSpPr txBox="1"/>
-          <p:nvPr/>
-        </p:nvSpPr>
-        <p:spPr>
-          <a:xfrm>
-            <a:off x="6263640" y="5303520"/>
-            <a:ext cx="5212080" cy="749808"/>
-          </a:xfrm>
-          <a:prstGeom prst="rect">
-            <a:avLst/>
-          </a:prstGeom>
-          <a:noFill/>
-          <a:ln/>
-        </p:spPr>
-        <p:txBody>
-          <a:bodyPr wrap="square" lIns="0" tIns="0" rIns="0" bIns="0" rtlCol="0" anchor="ctr"/>
-          <a:lstStyle/>
-          <a:p>
-            <a:pPr indent="0" marL="0">
-              <a:buNone/>
-            </a:pPr>
-            <a:r>
-              <a:rPr lang="en-US" sz="1300" dirty="0">
-                <a:solidFill>
-                  <a:schemeClr val="tx1"/>
-                </a:solidFill>
-              </a:rPr>
-              <a:t>The point that counts for funding</a:t>
-            </a:r>
-            <a:endParaRPr lang="en-US" sz="1300" dirty="0"/>
-          </a:p>
-        </p:txBody>
-      </p:sp>
-      <p:sp>
-        <p:nvSpPr>
-          <p:cNvPr id="24" name="Text 22"/>
-          <p:cNvSpPr txBox="1"/>
-          <p:nvPr/>
-        </p:nvSpPr>
-        <p:spPr>
-          <a:xfrm>
-            <a:off x="6035040" y="1325880"/>
-            <a:ext cx="5577840" cy="274320"/>
-          </a:xfrm>
-          <a:prstGeom prst="rect">
-            <a:avLst/>
-          </a:prstGeom>
-          <a:noFill/>
-          <a:ln/>
-        </p:spPr>
-        <p:txBody>
-          <a:bodyPr wrap="square" lIns="0" tIns="0" rIns="0" bIns="0" rtlCol="0" anchor="ctr"/>
-          <a:lstStyle/>
-          <a:p>
-            <a:pPr indent="0" marL="0">
-              <a:buNone/>
-            </a:pPr>
-            <a:r>
-              <a:rPr lang="en-US" sz="1100" b="1" dirty="0">
+              <a:rPr lang="en-US" sz="1050" i="1" dirty="0">
                 <a:solidFill>
                   <a:srgbClr val="6B6F80"/>
                 </a:solidFill>
               </a:rPr>
-              <a:t>Possible cause of drop-off (from the meeting)</a:t>
-            </a:r>
-            <a:endParaRPr lang="en-US" sz="1100" dirty="0"/>
+              <a:t>Full detail stays in the Lucid working file.</a:t>
+            </a:r>
+            <a:endParaRPr lang="en-US" sz="1050" dirty="0"/>
           </a:p>
         </p:txBody>
       </p:sp>
@@ -8081,7 +8957,7 @@
                   <a:schemeClr val="tx2"/>
                 </a:solidFill>
               </a:rPr>
-              <a:t>Why the numbers look too high, and the fix</a:t>
+              <a:t>Where students drop out</a:t>
             </a:r>
             <a:endParaRPr lang="en-US" sz="3200" dirty="0"/>
           </a:p>
@@ -8119,6 +8995,904 @@
                   <a:schemeClr val="tx1"/>
                 </a:solidFill>
               </a:rPr>
+              <a:t>Once the rates are clean, we can see the stage where each course loses people</a:t>
+            </a:r>
+            <a:endParaRPr lang="en-US" sz="1500" dirty="0"/>
+          </a:p>
+        </p:txBody>
+      </p:sp>
+      <p:sp>
+        <p:nvSpPr>
+          <p:cNvPr id="4" name="funnel 1"/>
+          <p:cNvSpPr/>
+          <p:nvPr/>
+        </p:nvSpPr>
+        <p:spPr>
+          <a:xfrm>
+            <a:off x="548640" y="1645920"/>
+            <a:ext cx="5120640" cy="749808"/>
+          </a:xfrm>
+          <a:prstGeom prst="roundRect">
+            <a:avLst>
+              <a:gd name="adj" fmla="val 9756"/>
+            </a:avLst>
+          </a:prstGeom>
+          <a:solidFill>
+            <a:schemeClr val="accent1"/>
+          </a:solidFill>
+          <a:ln w="12700">
+            <a:solidFill>
+              <a:schemeClr val="accent1"/>
+            </a:solidFill>
+            <a:prstDash val="solid"/>
+          </a:ln>
+        </p:spPr>
+      </p:sp>
+      <p:sp>
+        <p:nvSpPr>
+          <p:cNvPr id="5" name="Text 3"/>
+          <p:cNvSpPr txBox="1"/>
+          <p:nvPr/>
+        </p:nvSpPr>
+        <p:spPr>
+          <a:xfrm>
+            <a:off x="548640" y="1645920"/>
+            <a:ext cx="5120640" cy="749808"/>
+          </a:xfrm>
+          <a:prstGeom prst="rect">
+            <a:avLst/>
+          </a:prstGeom>
+          <a:noFill/>
+          <a:ln/>
+        </p:spPr>
+        <p:txBody>
+          <a:bodyPr wrap="square" lIns="0" tIns="0" rIns="0" bIns="0" rtlCol="0" anchor="ctr"/>
+          <a:lstStyle/>
+          <a:p>
+            <a:pPr algn="ctr" indent="0" marL="0">
+              <a:buNone/>
+            </a:pPr>
+            <a:r>
+              <a:rPr lang="en-US" sz="1400" b="1" dirty="0">
+                <a:solidFill>
+                  <a:schemeClr val="bg1"/>
+                </a:solidFill>
+              </a:rPr>
+              <a:t>Application</a:t>
+            </a:r>
+            <a:endParaRPr lang="en-US" sz="1400" dirty="0"/>
+          </a:p>
+          <a:p>
+            <a:pPr algn="ctr" indent="0" marL="0">
+              <a:buNone/>
+            </a:pPr>
+            <a:r>
+              <a:rPr lang="en-US" sz="1100" dirty="0">
+                <a:solidFill>
+                  <a:schemeClr val="bg1"/>
+                </a:solidFill>
+              </a:rPr>
+              <a:t>Applied for the course</a:t>
+            </a:r>
+            <a:endParaRPr lang="en-US" sz="1400" dirty="0"/>
+          </a:p>
+        </p:txBody>
+      </p:sp>
+      <p:sp>
+        <p:nvSpPr>
+          <p:cNvPr id="6" name="cause 1"/>
+          <p:cNvSpPr/>
+          <p:nvPr/>
+        </p:nvSpPr>
+        <p:spPr>
+          <a:xfrm>
+            <a:off x="6035040" y="1645920"/>
+            <a:ext cx="5577840" cy="749808"/>
+          </a:xfrm>
+          <a:prstGeom prst="roundRect">
+            <a:avLst>
+              <a:gd name="adj" fmla="val 9756"/>
+            </a:avLst>
+          </a:prstGeom>
+          <a:solidFill>
+            <a:schemeClr val="bg2"/>
+          </a:solidFill>
+          <a:ln w="12700">
+            <a:solidFill>
+              <a:schemeClr val="bg2"/>
+            </a:solidFill>
+            <a:prstDash val="solid"/>
+          </a:ln>
+        </p:spPr>
+      </p:sp>
+      <p:sp>
+        <p:nvSpPr>
+          <p:cNvPr id="7" name="Text 5"/>
+          <p:cNvSpPr txBox="1"/>
+          <p:nvPr/>
+        </p:nvSpPr>
+        <p:spPr>
+          <a:xfrm>
+            <a:off x="6263640" y="1645920"/>
+            <a:ext cx="5212080" cy="749808"/>
+          </a:xfrm>
+          <a:prstGeom prst="rect">
+            <a:avLst/>
+          </a:prstGeom>
+          <a:noFill/>
+          <a:ln/>
+        </p:spPr>
+        <p:txBody>
+          <a:bodyPr wrap="square" lIns="0" tIns="0" rIns="0" bIns="0" rtlCol="0" anchor="ctr"/>
+          <a:lstStyle/>
+          <a:p>
+            <a:pPr indent="0" marL="0">
+              <a:buNone/>
+            </a:pPr>
+            <a:r>
+              <a:rPr lang="en-US" sz="1300" dirty="0">
+                <a:solidFill>
+                  <a:schemeClr val="tx1"/>
+                </a:solidFill>
+              </a:rPr>
+              <a:t>People don't turn up to the skills test (construction)</a:t>
+            </a:r>
+            <a:endParaRPr lang="en-US" sz="1300" dirty="0"/>
+          </a:p>
+        </p:txBody>
+      </p:sp>
+      <p:sp>
+        <p:nvSpPr>
+          <p:cNvPr id="8" name="funnel 2"/>
+          <p:cNvSpPr/>
+          <p:nvPr/>
+        </p:nvSpPr>
+        <p:spPr>
+          <a:xfrm>
+            <a:off x="868680" y="2560320"/>
+            <a:ext cx="4480560" cy="749808"/>
+          </a:xfrm>
+          <a:prstGeom prst="roundRect">
+            <a:avLst>
+              <a:gd name="adj" fmla="val 9756"/>
+            </a:avLst>
+          </a:prstGeom>
+          <a:solidFill>
+            <a:schemeClr val="accent1">
+              <a:alpha val="92000"/>
+            </a:schemeClr>
+          </a:solidFill>
+          <a:ln w="12700">
+            <a:solidFill>
+              <a:schemeClr val="accent1">
+                <a:alpha val="92000"/>
+              </a:schemeClr>
+            </a:solidFill>
+            <a:prstDash val="solid"/>
+          </a:ln>
+        </p:spPr>
+      </p:sp>
+      <p:sp>
+        <p:nvSpPr>
+          <p:cNvPr id="9" name="Text 7"/>
+          <p:cNvSpPr txBox="1"/>
+          <p:nvPr/>
+        </p:nvSpPr>
+        <p:spPr>
+          <a:xfrm>
+            <a:off x="868680" y="2560320"/>
+            <a:ext cx="4480560" cy="749808"/>
+          </a:xfrm>
+          <a:prstGeom prst="rect">
+            <a:avLst/>
+          </a:prstGeom>
+          <a:noFill/>
+          <a:ln/>
+        </p:spPr>
+        <p:txBody>
+          <a:bodyPr wrap="square" lIns="0" tIns="0" rIns="0" bIns="0" rtlCol="0" anchor="ctr"/>
+          <a:lstStyle/>
+          <a:p>
+            <a:pPr algn="ctr" indent="0" marL="0">
+              <a:buNone/>
+            </a:pPr>
+            <a:r>
+              <a:rPr lang="en-US" sz="1400" b="1" dirty="0">
+                <a:solidFill>
+                  <a:schemeClr val="bg1"/>
+                </a:solidFill>
+              </a:rPr>
+              <a:t>Interview / skills test</a:t>
+            </a:r>
+            <a:endParaRPr lang="en-US" sz="1400" dirty="0"/>
+          </a:p>
+          <a:p>
+            <a:pPr algn="ctr" indent="0" marL="0">
+              <a:buNone/>
+            </a:pPr>
+            <a:r>
+              <a:rPr lang="en-US" sz="1100" dirty="0">
+                <a:solidFill>
+                  <a:schemeClr val="bg1"/>
+                </a:solidFill>
+              </a:rPr>
+              <a:t>Seen by the department</a:t>
+            </a:r>
+            <a:endParaRPr lang="en-US" sz="1400" dirty="0"/>
+          </a:p>
+        </p:txBody>
+      </p:sp>
+      <p:sp>
+        <p:nvSpPr>
+          <p:cNvPr id="10" name="cause 2"/>
+          <p:cNvSpPr/>
+          <p:nvPr/>
+        </p:nvSpPr>
+        <p:spPr>
+          <a:xfrm>
+            <a:off x="6035040" y="2560320"/>
+            <a:ext cx="5577840" cy="749808"/>
+          </a:xfrm>
+          <a:prstGeom prst="roundRect">
+            <a:avLst>
+              <a:gd name="adj" fmla="val 9756"/>
+            </a:avLst>
+          </a:prstGeom>
+          <a:solidFill>
+            <a:schemeClr val="bg2"/>
+          </a:solidFill>
+          <a:ln w="12700">
+            <a:solidFill>
+              <a:schemeClr val="bg2"/>
+            </a:solidFill>
+            <a:prstDash val="solid"/>
+          </a:ln>
+        </p:spPr>
+      </p:sp>
+      <p:sp>
+        <p:nvSpPr>
+          <p:cNvPr id="11" name="Text 9"/>
+          <p:cNvSpPr txBox="1"/>
+          <p:nvPr/>
+        </p:nvSpPr>
+        <p:spPr>
+          <a:xfrm>
+            <a:off x="6263640" y="2560320"/>
+            <a:ext cx="5212080" cy="749808"/>
+          </a:xfrm>
+          <a:prstGeom prst="rect">
+            <a:avLst/>
+          </a:prstGeom>
+          <a:noFill/>
+          <a:ln/>
+        </p:spPr>
+        <p:txBody>
+          <a:bodyPr wrap="square" lIns="0" tIns="0" rIns="0" bIns="0" rtlCol="0" anchor="ctr"/>
+          <a:lstStyle/>
+          <a:p>
+            <a:pPr indent="0" marL="0">
+              <a:buNone/>
+            </a:pPr>
+            <a:r>
+              <a:rPr lang="en-US" sz="1300" dirty="0">
+                <a:solidFill>
+                  <a:schemeClr val="tx1"/>
+                </a:solidFill>
+              </a:rPr>
+              <a:t>Lecturers hold back, or make waiting-list offers</a:t>
+            </a:r>
+            <a:endParaRPr lang="en-US" sz="1300" dirty="0"/>
+          </a:p>
+        </p:txBody>
+      </p:sp>
+      <p:sp>
+        <p:nvSpPr>
+          <p:cNvPr id="12" name="funnel 3"/>
+          <p:cNvSpPr/>
+          <p:nvPr/>
+        </p:nvSpPr>
+        <p:spPr>
+          <a:xfrm>
+            <a:off x="1188720" y="3474720"/>
+            <a:ext cx="3840480" cy="749808"/>
+          </a:xfrm>
+          <a:prstGeom prst="roundRect">
+            <a:avLst>
+              <a:gd name="adj" fmla="val 9756"/>
+            </a:avLst>
+          </a:prstGeom>
+          <a:solidFill>
+            <a:schemeClr val="accent1">
+              <a:alpha val="84000"/>
+            </a:schemeClr>
+          </a:solidFill>
+          <a:ln w="12700">
+            <a:solidFill>
+              <a:schemeClr val="accent1">
+                <a:alpha val="84000"/>
+              </a:schemeClr>
+            </a:solidFill>
+            <a:prstDash val="solid"/>
+          </a:ln>
+        </p:spPr>
+      </p:sp>
+      <p:sp>
+        <p:nvSpPr>
+          <p:cNvPr id="13" name="Text 11"/>
+          <p:cNvSpPr txBox="1"/>
+          <p:nvPr/>
+        </p:nvSpPr>
+        <p:spPr>
+          <a:xfrm>
+            <a:off x="1188720" y="3474720"/>
+            <a:ext cx="3840480" cy="749808"/>
+          </a:xfrm>
+          <a:prstGeom prst="rect">
+            <a:avLst/>
+          </a:prstGeom>
+          <a:noFill/>
+          <a:ln/>
+        </p:spPr>
+        <p:txBody>
+          <a:bodyPr wrap="square" lIns="0" tIns="0" rIns="0" bIns="0" rtlCol="0" anchor="ctr"/>
+          <a:lstStyle/>
+          <a:p>
+            <a:pPr algn="ctr" indent="0" marL="0">
+              <a:buNone/>
+            </a:pPr>
+            <a:r>
+              <a:rPr lang="en-US" sz="1400" b="1" dirty="0">
+                <a:solidFill>
+                  <a:schemeClr val="bg1"/>
+                </a:solidFill>
+              </a:rPr>
+              <a:t>Offer</a:t>
+            </a:r>
+            <a:endParaRPr lang="en-US" sz="1400" dirty="0"/>
+          </a:p>
+          <a:p>
+            <a:pPr algn="ctr" indent="0" marL="0">
+              <a:buNone/>
+            </a:pPr>
+            <a:r>
+              <a:rPr lang="en-US" sz="1100" dirty="0">
+                <a:solidFill>
+                  <a:schemeClr val="bg1"/>
+                </a:solidFill>
+              </a:rPr>
+              <a:t>Offer made</a:t>
+            </a:r>
+            <a:endParaRPr lang="en-US" sz="1400" dirty="0"/>
+          </a:p>
+        </p:txBody>
+      </p:sp>
+      <p:sp>
+        <p:nvSpPr>
+          <p:cNvPr id="14" name="cause 3"/>
+          <p:cNvSpPr/>
+          <p:nvPr/>
+        </p:nvSpPr>
+        <p:spPr>
+          <a:xfrm>
+            <a:off x="6035040" y="3474720"/>
+            <a:ext cx="5577840" cy="749808"/>
+          </a:xfrm>
+          <a:prstGeom prst="roundRect">
+            <a:avLst>
+              <a:gd name="adj" fmla="val 9756"/>
+            </a:avLst>
+          </a:prstGeom>
+          <a:solidFill>
+            <a:schemeClr val="bg2"/>
+          </a:solidFill>
+          <a:ln w="12700">
+            <a:solidFill>
+              <a:schemeClr val="bg2"/>
+            </a:solidFill>
+            <a:prstDash val="solid"/>
+          </a:ln>
+        </p:spPr>
+      </p:sp>
+      <p:sp>
+        <p:nvSpPr>
+          <p:cNvPr id="15" name="Text 13"/>
+          <p:cNvSpPr txBox="1"/>
+          <p:nvPr/>
+        </p:nvSpPr>
+        <p:spPr>
+          <a:xfrm>
+            <a:off x="6263640" y="3474720"/>
+            <a:ext cx="5212080" cy="749808"/>
+          </a:xfrm>
+          <a:prstGeom prst="rect">
+            <a:avLst/>
+          </a:prstGeom>
+          <a:noFill/>
+          <a:ln/>
+        </p:spPr>
+        <p:txBody>
+          <a:bodyPr wrap="square" lIns="0" tIns="0" rIns="0" bIns="0" rtlCol="0" anchor="ctr"/>
+          <a:lstStyle/>
+          <a:p>
+            <a:pPr indent="0" marL="0">
+              <a:buNone/>
+            </a:pPr>
+            <a:r>
+              <a:rPr lang="en-US" sz="1300" dirty="0">
+                <a:solidFill>
+                  <a:schemeClr val="tx1"/>
+                </a:solidFill>
+              </a:rPr>
+              <a:t>Offers turned down; waiting-list offers go to people unlikely to come</a:t>
+            </a:r>
+            <a:endParaRPr lang="en-US" sz="1300" dirty="0"/>
+          </a:p>
+        </p:txBody>
+      </p:sp>
+      <p:sp>
+        <p:nvSpPr>
+          <p:cNvPr id="16" name="funnel 4"/>
+          <p:cNvSpPr/>
+          <p:nvPr/>
+        </p:nvSpPr>
+        <p:spPr>
+          <a:xfrm>
+            <a:off x="1508760" y="4389120"/>
+            <a:ext cx="3200400" cy="749808"/>
+          </a:xfrm>
+          <a:prstGeom prst="roundRect">
+            <a:avLst>
+              <a:gd name="adj" fmla="val 9756"/>
+            </a:avLst>
+          </a:prstGeom>
+          <a:solidFill>
+            <a:schemeClr val="accent1">
+              <a:alpha val="76000"/>
+            </a:schemeClr>
+          </a:solidFill>
+          <a:ln w="12700">
+            <a:solidFill>
+              <a:schemeClr val="accent1">
+                <a:alpha val="76000"/>
+              </a:schemeClr>
+            </a:solidFill>
+            <a:prstDash val="solid"/>
+          </a:ln>
+        </p:spPr>
+      </p:sp>
+      <p:sp>
+        <p:nvSpPr>
+          <p:cNvPr id="17" name="Text 15"/>
+          <p:cNvSpPr txBox="1"/>
+          <p:nvPr/>
+        </p:nvSpPr>
+        <p:spPr>
+          <a:xfrm>
+            <a:off x="1508760" y="4389120"/>
+            <a:ext cx="3200400" cy="749808"/>
+          </a:xfrm>
+          <a:prstGeom prst="rect">
+            <a:avLst/>
+          </a:prstGeom>
+          <a:noFill/>
+          <a:ln/>
+        </p:spPr>
+        <p:txBody>
+          <a:bodyPr wrap="square" lIns="0" tIns="0" rIns="0" bIns="0" rtlCol="0" anchor="ctr"/>
+          <a:lstStyle/>
+          <a:p>
+            <a:pPr algn="ctr" indent="0" marL="0">
+              <a:buNone/>
+            </a:pPr>
+            <a:r>
+              <a:rPr lang="en-US" sz="1400" b="1" dirty="0">
+                <a:solidFill>
+                  <a:schemeClr val="bg1"/>
+                </a:solidFill>
+              </a:rPr>
+              <a:t>Enrolment (day one)</a:t>
+            </a:r>
+            <a:endParaRPr lang="en-US" sz="1400" dirty="0"/>
+          </a:p>
+          <a:p>
+            <a:pPr algn="ctr" indent="0" marL="0">
+              <a:buNone/>
+            </a:pPr>
+            <a:r>
+              <a:rPr lang="en-US" sz="1100" dirty="0">
+                <a:solidFill>
+                  <a:schemeClr val="bg1"/>
+                </a:solidFill>
+              </a:rPr>
+              <a:t>Starts the course</a:t>
+            </a:r>
+            <a:endParaRPr lang="en-US" sz="1400" dirty="0"/>
+          </a:p>
+        </p:txBody>
+      </p:sp>
+      <p:sp>
+        <p:nvSpPr>
+          <p:cNvPr id="18" name="cause 4"/>
+          <p:cNvSpPr/>
+          <p:nvPr/>
+        </p:nvSpPr>
+        <p:spPr>
+          <a:xfrm>
+            <a:off x="6035040" y="4389120"/>
+            <a:ext cx="5577840" cy="749808"/>
+          </a:xfrm>
+          <a:prstGeom prst="roundRect">
+            <a:avLst>
+              <a:gd name="adj" fmla="val 9756"/>
+            </a:avLst>
+          </a:prstGeom>
+          <a:solidFill>
+            <a:schemeClr val="bg2"/>
+          </a:solidFill>
+          <a:ln w="12700">
+            <a:solidFill>
+              <a:schemeClr val="bg2"/>
+            </a:solidFill>
+            <a:prstDash val="solid"/>
+          </a:ln>
+        </p:spPr>
+      </p:sp>
+      <p:sp>
+        <p:nvSpPr>
+          <p:cNvPr id="19" name="Text 17"/>
+          <p:cNvSpPr txBox="1"/>
+          <p:nvPr/>
+        </p:nvSpPr>
+        <p:spPr>
+          <a:xfrm>
+            <a:off x="6263640" y="4389120"/>
+            <a:ext cx="5212080" cy="749808"/>
+          </a:xfrm>
+          <a:prstGeom prst="rect">
+            <a:avLst/>
+          </a:prstGeom>
+          <a:noFill/>
+          <a:ln/>
+        </p:spPr>
+        <p:txBody>
+          <a:bodyPr wrap="square" lIns="0" tIns="0" rIns="0" bIns="0" rtlCol="0" anchor="ctr"/>
+          <a:lstStyle/>
+          <a:p>
+            <a:pPr indent="0" marL="0">
+              <a:buNone/>
+            </a:pPr>
+            <a:r>
+              <a:rPr lang="en-US" sz="1300" dirty="0">
+                <a:solidFill>
+                  <a:schemeClr val="tx1"/>
+                </a:solidFill>
+              </a:rPr>
+              <a:t>Early dropout before credits are claimed</a:t>
+            </a:r>
+            <a:endParaRPr lang="en-US" sz="1300" dirty="0"/>
+          </a:p>
+        </p:txBody>
+      </p:sp>
+      <p:sp>
+        <p:nvSpPr>
+          <p:cNvPr id="20" name="funnel 5"/>
+          <p:cNvSpPr/>
+          <p:nvPr/>
+        </p:nvSpPr>
+        <p:spPr>
+          <a:xfrm>
+            <a:off x="1828800" y="5303520"/>
+            <a:ext cx="2560320" cy="749808"/>
+          </a:xfrm>
+          <a:prstGeom prst="roundRect">
+            <a:avLst>
+              <a:gd name="adj" fmla="val 9756"/>
+            </a:avLst>
+          </a:prstGeom>
+          <a:solidFill>
+            <a:schemeClr val="accent2">
+              <a:alpha val="68000"/>
+            </a:schemeClr>
+          </a:solidFill>
+          <a:ln w="12700">
+            <a:solidFill>
+              <a:schemeClr val="accent2">
+                <a:alpha val="68000"/>
+              </a:schemeClr>
+            </a:solidFill>
+            <a:prstDash val="solid"/>
+          </a:ln>
+        </p:spPr>
+      </p:sp>
+      <p:sp>
+        <p:nvSpPr>
+          <p:cNvPr id="21" name="Text 19"/>
+          <p:cNvSpPr txBox="1"/>
+          <p:nvPr/>
+        </p:nvSpPr>
+        <p:spPr>
+          <a:xfrm>
+            <a:off x="1828800" y="5303520"/>
+            <a:ext cx="2560320" cy="749808"/>
+          </a:xfrm>
+          <a:prstGeom prst="rect">
+            <a:avLst/>
+          </a:prstGeom>
+          <a:noFill/>
+          <a:ln/>
+        </p:spPr>
+        <p:txBody>
+          <a:bodyPr wrap="square" lIns="0" tIns="0" rIns="0" bIns="0" rtlCol="0" anchor="ctr"/>
+          <a:lstStyle/>
+          <a:p>
+            <a:pPr algn="ctr" indent="0" marL="0">
+              <a:buNone/>
+            </a:pPr>
+            <a:r>
+              <a:rPr lang="en-US" sz="1400" b="1" dirty="0">
+                <a:solidFill>
+                  <a:schemeClr val="bg1"/>
+                </a:solidFill>
+              </a:rPr>
+              <a:t>Enrolled at ~6 weeks</a:t>
+            </a:r>
+            <a:endParaRPr lang="en-US" sz="1400" dirty="0"/>
+          </a:p>
+          <a:p>
+            <a:pPr algn="ctr" indent="0" marL="0">
+              <a:buNone/>
+            </a:pPr>
+            <a:r>
+              <a:rPr lang="en-US" sz="1100" dirty="0">
+                <a:solidFill>
+                  <a:schemeClr val="bg1"/>
+                </a:solidFill>
+              </a:rPr>
+              <a:t>Credits claimed</a:t>
+            </a:r>
+            <a:endParaRPr lang="en-US" sz="1400" dirty="0"/>
+          </a:p>
+        </p:txBody>
+      </p:sp>
+      <p:sp>
+        <p:nvSpPr>
+          <p:cNvPr id="22" name="cause 5"/>
+          <p:cNvSpPr/>
+          <p:nvPr/>
+        </p:nvSpPr>
+        <p:spPr>
+          <a:xfrm>
+            <a:off x="6035040" y="5303520"/>
+            <a:ext cx="5577840" cy="749808"/>
+          </a:xfrm>
+          <a:prstGeom prst="roundRect">
+            <a:avLst>
+              <a:gd name="adj" fmla="val 9756"/>
+            </a:avLst>
+          </a:prstGeom>
+          <a:solidFill>
+            <a:schemeClr val="accent6"/>
+          </a:solidFill>
+          <a:ln w="12700">
+            <a:solidFill>
+              <a:schemeClr val="accent6"/>
+            </a:solidFill>
+            <a:prstDash val="solid"/>
+          </a:ln>
+        </p:spPr>
+      </p:sp>
+      <p:sp>
+        <p:nvSpPr>
+          <p:cNvPr id="23" name="Text 21"/>
+          <p:cNvSpPr txBox="1"/>
+          <p:nvPr/>
+        </p:nvSpPr>
+        <p:spPr>
+          <a:xfrm>
+            <a:off x="6263640" y="5303520"/>
+            <a:ext cx="5212080" cy="749808"/>
+          </a:xfrm>
+          <a:prstGeom prst="rect">
+            <a:avLst/>
+          </a:prstGeom>
+          <a:noFill/>
+          <a:ln/>
+        </p:spPr>
+        <p:txBody>
+          <a:bodyPr wrap="square" lIns="0" tIns="0" rIns="0" bIns="0" rtlCol="0" anchor="ctr"/>
+          <a:lstStyle/>
+          <a:p>
+            <a:pPr indent="0" marL="0">
+              <a:buNone/>
+            </a:pPr>
+            <a:r>
+              <a:rPr lang="en-US" sz="1300" dirty="0">
+                <a:solidFill>
+                  <a:schemeClr val="tx1"/>
+                </a:solidFill>
+              </a:rPr>
+              <a:t>The point that counts for funding</a:t>
+            </a:r>
+            <a:endParaRPr lang="en-US" sz="1300" dirty="0"/>
+          </a:p>
+        </p:txBody>
+      </p:sp>
+      <p:sp>
+        <p:nvSpPr>
+          <p:cNvPr id="24" name="Text 22"/>
+          <p:cNvSpPr txBox="1"/>
+          <p:nvPr/>
+        </p:nvSpPr>
+        <p:spPr>
+          <a:xfrm>
+            <a:off x="6035040" y="1325880"/>
+            <a:ext cx="5577840" cy="274320"/>
+          </a:xfrm>
+          <a:prstGeom prst="rect">
+            <a:avLst/>
+          </a:prstGeom>
+          <a:noFill/>
+          <a:ln/>
+        </p:spPr>
+        <p:txBody>
+          <a:bodyPr wrap="square" lIns="0" tIns="0" rIns="0" bIns="0" rtlCol="0" anchor="ctr"/>
+          <a:lstStyle/>
+          <a:p>
+            <a:pPr indent="0" marL="0">
+              <a:buNone/>
+            </a:pPr>
+            <a:r>
+              <a:rPr lang="en-US" sz="1100" b="1" dirty="0">
+                <a:solidFill>
+                  <a:srgbClr val="6B6F80"/>
+                </a:solidFill>
+              </a:rPr>
+              <a:t>Possible cause of drop-off (from the meeting)</a:t>
+            </a:r>
+            <a:endParaRPr lang="en-US" sz="1100" dirty="0"/>
+          </a:p>
+        </p:txBody>
+      </p:sp>
+      <p:sp>
+        <p:nvSpPr>
+          <p:cNvPr id="25" name="Slide Number Placeholder 0"/>
+          <p:cNvSpPr>
+            <a:spLocks noGrp="1"/>
+          </p:cNvSpPr>
+          <p:nvPr>
+            <p:ph type="sldNum" sz="quarter" idx="4294967295"/>
+          </p:nvPr>
+        </p:nvSpPr>
+        <p:spPr>
+          <a:xfrm>
+            <a:off x="11247120" y="6446520"/>
+            <a:ext cx="457200" cy="274320"/>
+          </a:xfrm>
+          <a:prstGeom prst="rect">
+            <a:avLst/>
+          </a:prstGeom>
+          <a:extLst>
+            <a:ext uri="{C572A759-6A51-4108-AA02-DFA0A04FC94B}">
+              <ma14:wrappingTextBoxFlag xmlns:ma14="http://schemas.microsoft.com/office/mac/drawingml/2011/main" val="0"/>
+            </a:ext>
+          </a:extLst>
+        </p:spPr>
+        <p:txBody>
+          <a:bodyPr/>
+          <a:lstStyle>
+            <a:lvl1pPr>
+              <a:defRPr sz="1000">
+                <a:solidFill>
+                  <a:srgbClr val="6B6F80"/>
+                </a:solidFill>
+              </a:defRPr>
+            </a:lvl1pPr>
+          </a:lstStyle>
+          <a:p>
+            <a:pPr algn="r"/>
+            <a:fld id="{F7021451-1387-4CA6-816F-3879F97B5CBC}" type="slidenum">
+              <a:rPr b="0" lang="en-US"/>
+              <a:t>6</a:t>
+            </a:fld>
+            <a:endParaRPr lang="en-US"/>
+          </a:p>
+        </p:txBody>
+      </p:sp>
+    </p:spTree>
+  </p:cSld>
+  <p:clrMapOvr>
+    <a:masterClrMapping/>
+  </p:clrMapOvr>
+</p:sld>
+</file>
+
+<file path=ppt/slides/slide7.xml><?xml version="1.0" encoding="utf-8"?>
+<p:sld xmlns:a="http://schemas.openxmlformats.org/drawingml/2006/main" xmlns:r="http://schemas.openxmlformats.org/officeDocument/2006/relationships" xmlns:p="http://schemas.openxmlformats.org/presentationml/2006/main">
+  <p:cSld name="Slide 7">
+    <p:spTree>
+      <p:nvGrpSpPr>
+        <p:cNvPr id="1" name=""/>
+        <p:cNvGrpSpPr/>
+        <p:nvPr/>
+      </p:nvGrpSpPr>
+      <p:grpSpPr>
+        <a:xfrm>
+          <a:off x="0" y="0"/>
+          <a:ext cx="0" cy="0"/>
+          <a:chOff x="0" y="0"/>
+          <a:chExt cx="0" cy="0"/>
+        </a:xfrm>
+      </p:grpSpPr>
+      <p:sp>
+        <p:nvSpPr>
+          <p:cNvPr id="2" name="Text 0"/>
+          <p:cNvSpPr/>
+          <p:nvPr>
+            <p:ph idx="100" type="title" hasCustomPrompt="1"/>
+          </p:nvPr>
+        </p:nvSpPr>
+        <p:spPr>
+          <a:xfrm>
+            <a:off x="548640" y="320040"/>
+            <a:ext cx="11064240" cy="731520"/>
+          </a:xfrm>
+          <a:prstGeom prst="rect">
+            <a:avLst/>
+          </a:prstGeom>
+          <a:noFill/>
+          <a:ln/>
+        </p:spPr>
+        <p:txBody>
+          <a:bodyPr wrap="square" lIns="0" tIns="0" rIns="0" bIns="0" rtlCol="0" anchor="ctr"/>
+          <a:lstStyle/>
+          <a:p>
+            <a:pPr indent="0" marL="0">
+              <a:buNone/>
+            </a:pPr>
+            <a:r>
+              <a:rPr lang="en-US" sz="3200" b="1" dirty="0">
+                <a:solidFill>
+                  <a:schemeClr val="tx2"/>
+                </a:solidFill>
+              </a:rPr>
+              <a:t>Why the numbers look too high, and the fix</a:t>
+            </a:r>
+            <a:endParaRPr lang="en-US" sz="3200" dirty="0"/>
+          </a:p>
+        </p:txBody>
+      </p:sp>
+      <p:sp>
+        <p:nvSpPr>
+          <p:cNvPr id="3" name="Text 0"/>
+          <p:cNvSpPr/>
+          <p:nvPr>
+            <p:ph idx="101" type="body" hasCustomPrompt="1"/>
+          </p:nvPr>
+        </p:nvSpPr>
+        <p:spPr>
+          <a:xfrm>
+            <a:off x="548640" y="1005840"/>
+            <a:ext cx="11064240" cy="411480"/>
+          </a:xfrm>
+          <a:prstGeom prst="rect">
+            <a:avLst/>
+          </a:prstGeom>
+          <a:noFill/>
+          <a:ln/>
+        </p:spPr>
+        <p:txBody>
+          <a:bodyPr wrap="square" lIns="0" tIns="0" rIns="0" bIns="0" rtlCol="0" anchor="t"/>
+          <a:lstStyle/>
+          <a:p>
+            <a:pPr indent="0" marL="0">
+              <a:buNone/>
+            </a:pPr>
+            <a:r>
+              <a:rPr lang="en-US" sz="1500" dirty="0">
+                <a:solidFill>
+                  <a:schemeClr val="tx1"/>
+                </a:solidFill>
+              </a:rPr>
               <a:t>Sarah felt the figures were overestimated. These are the likely causes</a:t>
             </a:r>
             <a:endParaRPr lang="en-US" sz="1500" dirty="0"/>
@@ -8127,7 +9901,7 @@
       </p:sp>
       <p:graphicFrame>
         <p:nvGraphicFramePr>
-          <p:cNvPr id="7" name="too high table"/>
+          <p:cNvPr id="8" name="too high table"/>
           <p:cNvGraphicFramePr>
             <a:graphicFrameLocks noGrp="1"/>
           </p:cNvGraphicFramePr>
@@ -9490,399 +11264,6 @@
             <a:pPr algn="r"/>
             <a:fld id="{F7021451-1387-4CA6-816F-3879F97B5CBC}" type="slidenum">
               <a:rPr b="0" lang="en-US"/>
-              <a:t>6</a:t>
-            </a:fld>
-            <a:endParaRPr lang="en-US"/>
-          </a:p>
-        </p:txBody>
-      </p:sp>
-    </p:spTree>
-  </p:cSld>
-  <p:clrMapOvr>
-    <a:masterClrMapping/>
-  </p:clrMapOvr>
-</p:sld>
-</file>
-
-<file path=ppt/slides/slide7.xml><?xml version="1.0" encoding="utf-8"?>
-<p:sld xmlns:a="http://schemas.openxmlformats.org/drawingml/2006/main" xmlns:r="http://schemas.openxmlformats.org/officeDocument/2006/relationships" xmlns:p="http://schemas.openxmlformats.org/presentationml/2006/main">
-  <p:cSld name="Slide 7">
-    <p:spTree>
-      <p:nvGrpSpPr>
-        <p:cNvPr id="1" name=""/>
-        <p:cNvGrpSpPr/>
-        <p:nvPr/>
-      </p:nvGrpSpPr>
-      <p:grpSpPr>
-        <a:xfrm>
-          <a:off x="0" y="0"/>
-          <a:ext cx="0" cy="0"/>
-          <a:chOff x="0" y="0"/>
-          <a:chExt cx="0" cy="0"/>
-        </a:xfrm>
-      </p:grpSpPr>
-      <p:sp>
-        <p:nvSpPr>
-          <p:cNvPr id="2" name="Text 0"/>
-          <p:cNvSpPr/>
-          <p:nvPr>
-            <p:ph idx="100" type="title" hasCustomPrompt="1"/>
-          </p:nvPr>
-        </p:nvSpPr>
-        <p:spPr>
-          <a:xfrm>
-            <a:off x="548640" y="320040"/>
-            <a:ext cx="11064240" cy="731520"/>
-          </a:xfrm>
-          <a:prstGeom prst="rect">
-            <a:avLst/>
-          </a:prstGeom>
-          <a:noFill/>
-          <a:ln/>
-        </p:spPr>
-        <p:txBody>
-          <a:bodyPr wrap="square" lIns="0" tIns="0" rIns="0" bIns="0" rtlCol="0" anchor="ctr"/>
-          <a:lstStyle/>
-          <a:p>
-            <a:pPr indent="0" marL="0">
-              <a:buNone/>
-            </a:pPr>
-            <a:r>
-              <a:rPr lang="en-US" sz="3200" b="1" dirty="0">
-                <a:solidFill>
-                  <a:schemeClr val="tx2"/>
-                </a:solidFill>
-              </a:rPr>
-              <a:t>First check of the RA5 report: the numbers don't match</a:t>
-            </a:r>
-            <a:endParaRPr lang="en-US" sz="3200" dirty="0"/>
-          </a:p>
-        </p:txBody>
-      </p:sp>
-      <p:sp>
-        <p:nvSpPr>
-          <p:cNvPr id="3" name="Text 0"/>
-          <p:cNvSpPr/>
-          <p:nvPr>
-            <p:ph idx="101" type="body" hasCustomPrompt="1"/>
-          </p:nvPr>
-        </p:nvSpPr>
-        <p:spPr>
-          <a:xfrm>
-            <a:off x="548640" y="1005840"/>
-            <a:ext cx="11064240" cy="411480"/>
-          </a:xfrm>
-          <a:prstGeom prst="rect">
-            <a:avLst/>
-          </a:prstGeom>
-          <a:noFill/>
-          <a:ln/>
-        </p:spPr>
-        <p:txBody>
-          <a:bodyPr wrap="square" lIns="0" tIns="0" rIns="0" bIns="0" rtlCol="0" anchor="t"/>
-          <a:lstStyle/>
-          <a:p>
-            <a:pPr indent="0" marL="0">
-              <a:buNone/>
-            </a:pPr>
-            <a:r>
-              <a:rPr lang="en-US" sz="1500" dirty="0">
-                <a:solidFill>
-                  <a:schemeClr val="tx1"/>
-                </a:solidFill>
-              </a:rPr>
-              <a:t>Application-to-offer rate for two construction courses, worked out three ways (2026 session, 30 Sep)</a:t>
-            </a:r>
-            <a:endParaRPr lang="en-US" sz="1500" dirty="0"/>
-          </a:p>
-        </p:txBody>
-      </p:sp>
-      <p:graphicFrame>
-        <p:nvGraphicFramePr>
-          <p:cNvPr id="4" name="RA5 check chart" descr=""/>
-          <p:cNvGraphicFramePr/>
-          <p:nvPr/>
-        </p:nvGraphicFramePr>
-        <p:xfrm>
-          <a:off x="548640" y="1600200"/>
-          <a:ext cx="6766560" cy="4572000"/>
-        </p:xfrm>
-        <a:graphic xmlns:a="http://schemas.openxmlformats.org/drawingml/2006/main">
-          <a:graphicData uri="http://schemas.openxmlformats.org/drawingml/2006/chart">
-            <c:chart xmlns:c="http://schemas.openxmlformats.org/drawingml/2006/chart" r:id="rId1"/>
-          </a:graphicData>
-        </a:graphic>
-      </p:graphicFrame>
-      <p:sp>
-        <p:nvSpPr>
-          <p:cNvPr id="5" name="evidence 1"/>
-          <p:cNvSpPr/>
-          <p:nvPr/>
-        </p:nvSpPr>
-        <p:spPr>
-          <a:xfrm>
-            <a:off x="7589520" y="1645920"/>
-            <a:ext cx="4023360" cy="1371600"/>
-          </a:xfrm>
-          <a:prstGeom prst="roundRect">
-            <a:avLst>
-              <a:gd name="adj" fmla="val 5333"/>
-            </a:avLst>
-          </a:prstGeom>
-          <a:solidFill>
-            <a:srgbClr val="FDF0DF"/>
-          </a:solidFill>
-          <a:ln w="12700">
-            <a:solidFill>
-              <a:srgbClr val="FDF0DF"/>
-            </a:solidFill>
-            <a:prstDash val="solid"/>
-          </a:ln>
-        </p:spPr>
-      </p:sp>
-      <p:sp>
-        <p:nvSpPr>
-          <p:cNvPr id="6" name="Text 3"/>
-          <p:cNvSpPr txBox="1"/>
-          <p:nvPr/>
-        </p:nvSpPr>
-        <p:spPr>
-          <a:xfrm>
-            <a:off x="7772400" y="1691640"/>
-            <a:ext cx="3703320" cy="1280160"/>
-          </a:xfrm>
-          <a:prstGeom prst="rect">
-            <a:avLst/>
-          </a:prstGeom>
-          <a:noFill/>
-          <a:ln/>
-        </p:spPr>
-        <p:txBody>
-          <a:bodyPr wrap="square" lIns="0" tIns="0" rIns="0" bIns="0" rtlCol="0" anchor="ctr"/>
-          <a:lstStyle/>
-          <a:p>
-            <a:pPr indent="0" marL="0">
-              <a:buNone/>
-            </a:pPr>
-            <a:r>
-              <a:rPr lang="en-US" sz="1400" b="1" dirty="0">
-                <a:solidFill>
-                  <a:schemeClr val="tx2"/>
-                </a:solidFill>
-              </a:rPr>
-              <a:t>The RA5 rate sits between the two</a:t>
-            </a:r>
-            <a:endParaRPr lang="en-US" sz="1400" dirty="0"/>
-          </a:p>
-          <a:p>
-            <a:pPr indent="0" marL="0">
-              <a:buNone/>
-            </a:pPr>
-            <a:r>
-              <a:rPr lang="en-US" sz="1200" dirty="0">
-                <a:solidFill>
-                  <a:schemeClr val="tx1"/>
-                </a:solidFill>
-              </a:rPr>
-              <a:t>It matches neither total nor live applications, so the conversion measure uses a different application count. This is the main question for Lesley.</a:t>
-            </a:r>
-            <a:endParaRPr lang="en-US" sz="1400" dirty="0"/>
-          </a:p>
-        </p:txBody>
-      </p:sp>
-      <p:sp>
-        <p:nvSpPr>
-          <p:cNvPr id="7" name="evidence 2"/>
-          <p:cNvSpPr/>
-          <p:nvPr/>
-        </p:nvSpPr>
-        <p:spPr>
-          <a:xfrm>
-            <a:off x="7589520" y="3182112"/>
-            <a:ext cx="4023360" cy="1371600"/>
-          </a:xfrm>
-          <a:prstGeom prst="roundRect">
-            <a:avLst>
-              <a:gd name="adj" fmla="val 5333"/>
-            </a:avLst>
-          </a:prstGeom>
-          <a:solidFill>
-            <a:schemeClr val="bg2"/>
-          </a:solidFill>
-          <a:ln w="12700">
-            <a:solidFill>
-              <a:schemeClr val="bg2"/>
-            </a:solidFill>
-            <a:prstDash val="solid"/>
-          </a:ln>
-        </p:spPr>
-      </p:sp>
-      <p:sp>
-        <p:nvSpPr>
-          <p:cNvPr id="8" name="Text 5"/>
-          <p:cNvSpPr txBox="1"/>
-          <p:nvPr/>
-        </p:nvSpPr>
-        <p:spPr>
-          <a:xfrm>
-            <a:off x="7772400" y="3227832"/>
-            <a:ext cx="3703320" cy="1280160"/>
-          </a:xfrm>
-          <a:prstGeom prst="rect">
-            <a:avLst/>
-          </a:prstGeom>
-          <a:noFill/>
-          <a:ln/>
-        </p:spPr>
-        <p:txBody>
-          <a:bodyPr wrap="square" lIns="0" tIns="0" rIns="0" bIns="0" rtlCol="0" anchor="ctr"/>
-          <a:lstStyle/>
-          <a:p>
-            <a:pPr indent="0" marL="0">
-              <a:buNone/>
-            </a:pPr>
-            <a:r>
-              <a:rPr lang="en-US" sz="1400" b="1" dirty="0">
-                <a:solidFill>
-                  <a:schemeClr val="tx2"/>
-                </a:solidFill>
-              </a:rPr>
-              <a:t>Only 2026 is visible</a:t>
-            </a:r>
-            <a:endParaRPr lang="en-US" sz="1400" dirty="0"/>
-          </a:p>
-          <a:p>
-            <a:pPr indent="0" marL="0">
-              <a:buNone/>
-            </a:pPr>
-            <a:r>
-              <a:rPr lang="en-US" sz="1200" dirty="0">
-                <a:solidFill>
-                  <a:schemeClr val="tx1"/>
-                </a:solidFill>
-              </a:rPr>
-              <a:t>The Session filter shows 2026 only, and the Summary page has no session filter. We need past years for a 3-year baseline.</a:t>
-            </a:r>
-            <a:endParaRPr lang="en-US" sz="1400" dirty="0"/>
-          </a:p>
-        </p:txBody>
-      </p:sp>
-      <p:sp>
-        <p:nvSpPr>
-          <p:cNvPr id="9" name="evidence 3"/>
-          <p:cNvSpPr/>
-          <p:nvPr/>
-        </p:nvSpPr>
-        <p:spPr>
-          <a:xfrm>
-            <a:off x="7589520" y="4718304"/>
-            <a:ext cx="4023360" cy="1371600"/>
-          </a:xfrm>
-          <a:prstGeom prst="roundRect">
-            <a:avLst>
-              <a:gd name="adj" fmla="val 5333"/>
-            </a:avLst>
-          </a:prstGeom>
-          <a:solidFill>
-            <a:schemeClr val="bg2"/>
-          </a:solidFill>
-          <a:ln w="12700">
-            <a:solidFill>
-              <a:schemeClr val="bg2"/>
-            </a:solidFill>
-            <a:prstDash val="solid"/>
-          </a:ln>
-        </p:spPr>
-      </p:sp>
-      <p:sp>
-        <p:nvSpPr>
-          <p:cNvPr id="10" name="Text 7"/>
-          <p:cNvSpPr txBox="1"/>
-          <p:nvPr/>
-        </p:nvSpPr>
-        <p:spPr>
-          <a:xfrm>
-            <a:off x="7772400" y="4764024"/>
-            <a:ext cx="3703320" cy="1280160"/>
-          </a:xfrm>
-          <a:prstGeom prst="rect">
-            <a:avLst/>
-          </a:prstGeom>
-          <a:noFill/>
-          <a:ln/>
-        </p:spPr>
-        <p:txBody>
-          <a:bodyPr wrap="square" lIns="0" tIns="0" rIns="0" bIns="0" rtlCol="0" anchor="ctr"/>
-          <a:lstStyle/>
-          <a:p>
-            <a:pPr indent="0" marL="0">
-              <a:buNone/>
-            </a:pPr>
-            <a:r>
-              <a:rPr lang="en-US" sz="1400" b="1" dirty="0">
-                <a:solidFill>
-                  <a:schemeClr val="tx2"/>
-                </a:solidFill>
-              </a:rPr>
-              <a:t>Source tables not visible</a:t>
-            </a:r>
-            <a:endParaRPr lang="en-US" sz="1400" dirty="0"/>
-          </a:p>
-          <a:p>
-            <a:pPr indent="0" marL="0">
-              <a:buNone/>
-            </a:pPr>
-            <a:r>
-              <a:rPr lang="en-US" sz="1200" dirty="0">
-                <a:solidFill>
-                  <a:schemeClr val="tx1"/>
-                </a:solidFill>
-              </a:rPr>
-              <a:t>Lineage shows semantic model → RA5 report, but not the database behind it. Kevin can confirm which tables feed it.</a:t>
-            </a:r>
-            <a:endParaRPr lang="en-US" sz="1400" dirty="0"/>
-          </a:p>
-        </p:txBody>
-      </p:sp>
-      <p:sp>
-        <p:nvSpPr>
-          <p:cNvPr id="25" name="Slide Number Placeholder 0"/>
-          <p:cNvSpPr>
-            <a:spLocks noGrp="1"/>
-          </p:cNvSpPr>
-          <p:nvPr>
-            <p:ph type="sldNum" sz="quarter" idx="4294967295"/>
-          </p:nvPr>
-        </p:nvSpPr>
-        <p:spPr>
-          <a:xfrm>
-            <a:off x="11247120" y="6446520"/>
-            <a:ext cx="457200" cy="274320"/>
-          </a:xfrm>
-          <a:prstGeom prst="rect">
-            <a:avLst/>
-          </a:prstGeom>
-          <a:extLst>
-            <a:ext uri="{C572A759-6A51-4108-AA02-DFA0A04FC94B}">
-              <ma14:wrappingTextBoxFlag xmlns:ma14="http://schemas.microsoft.com/office/mac/drawingml/2011/main" val="0"/>
-            </a:ext>
-          </a:extLst>
-        </p:spPr>
-        <p:txBody>
-          <a:bodyPr/>
-          <a:lstStyle>
-            <a:lvl1pPr>
-              <a:defRPr sz="1000">
-                <a:solidFill>
-                  <a:srgbClr val="6B6F80"/>
-                </a:solidFill>
-              </a:defRPr>
-            </a:lvl1pPr>
-          </a:lstStyle>
-          <a:p>
-            <a:pPr algn="r"/>
-            <a:fld id="{F7021451-1387-4CA6-816F-3879F97B5CBC}" type="slidenum">
-              <a:rPr b="0" lang="en-US"/>
               <a:t>7</a:t>
             </a:fld>
             <a:endParaRPr lang="en-US"/>
@@ -9946,7 +11327,7 @@
                   <a:schemeClr val="tx2"/>
                 </a:solidFill>
               </a:rPr>
-              <a:t>Data limits to agree before we build</a:t>
+              <a:t>First check of the RA5 report: the numbers don't match</a:t>
             </a:r>
             <a:endParaRPr lang="en-US" sz="3200" dirty="0"/>
           </a:p>
@@ -9984,26 +11365,119 @@
                   <a:schemeClr val="tx1"/>
                 </a:solidFill>
               </a:rPr>
-              <a:t>Lesley's concerns from the meeting, alongside the gaps the data map shows</a:t>
+              <a:t>Application-to-offer rate for two construction courses, worked out three ways (2026 session, 30 Sep)</a:t>
             </a:r>
             <a:endParaRPr lang="en-US" sz="1500" dirty="0"/>
           </a:p>
         </p:txBody>
       </p:sp>
-      <p:sp>
-        <p:nvSpPr>
-          <p:cNvPr id="4" name="lesley col"/>
+      <p:graphicFrame>
+        <p:nvGraphicFramePr>
+          <p:cNvPr id="4" name="RA5 check chart" descr=""/>
+          <p:cNvGraphicFramePr/>
+          <p:nvPr/>
+        </p:nvGraphicFramePr>
+        <p:xfrm>
+          <a:off x="548640" y="1600200"/>
+          <a:ext cx="6766560" cy="4572000"/>
+        </p:xfrm>
+        <a:graphic xmlns:a="http://schemas.openxmlformats.org/drawingml/2006/main">
+          <a:graphicData uri="http://schemas.openxmlformats.org/drawingml/2006/chart">
+            <c:chart xmlns:c="http://schemas.openxmlformats.org/drawingml/2006/chart" r:id="rId1"/>
+          </a:graphicData>
+        </a:graphic>
+      </p:graphicFrame>
+      <p:sp>
+        <p:nvSpPr>
+          <p:cNvPr id="5" name="evidence 1"/>
           <p:cNvSpPr/>
           <p:nvPr/>
         </p:nvSpPr>
         <p:spPr>
           <a:xfrm>
-            <a:off x="548640" y="1645920"/>
-            <a:ext cx="5394960" cy="4480560"/>
+            <a:off x="7589520" y="1645920"/>
+            <a:ext cx="4023360" cy="1371600"/>
           </a:xfrm>
           <a:prstGeom prst="roundRect">
             <a:avLst>
-              <a:gd name="adj" fmla="val 1633"/>
+              <a:gd name="adj" fmla="val 5333"/>
+            </a:avLst>
+          </a:prstGeom>
+          <a:solidFill>
+            <a:srgbClr val="FDF0DF"/>
+          </a:solidFill>
+          <a:ln w="12700">
+            <a:solidFill>
+              <a:srgbClr val="FDF0DF"/>
+            </a:solidFill>
+            <a:prstDash val="solid"/>
+          </a:ln>
+        </p:spPr>
+      </p:sp>
+      <p:sp>
+        <p:nvSpPr>
+          <p:cNvPr id="6" name="Text 3"/>
+          <p:cNvSpPr txBox="1"/>
+          <p:nvPr/>
+        </p:nvSpPr>
+        <p:spPr>
+          <a:xfrm>
+            <a:off x="7772400" y="1691640"/>
+            <a:ext cx="3703320" cy="1280160"/>
+          </a:xfrm>
+          <a:prstGeom prst="rect">
+            <a:avLst/>
+          </a:prstGeom>
+          <a:noFill/>
+          <a:ln/>
+        </p:spPr>
+        <p:txBody>
+          <a:bodyPr wrap="square" lIns="0" tIns="0" rIns="0" bIns="0" rtlCol="0" anchor="ctr"/>
+          <a:lstStyle/>
+          <a:p>
+            <a:pPr indent="0" marL="0">
+              <a:buNone/>
+            </a:pPr>
+            <a:r>
+              <a:rPr lang="en-US" sz="1400" b="1" dirty="0">
+                <a:solidFill>
+                  <a:schemeClr val="tx2"/>
+                </a:solidFill>
+              </a:rPr>
+              <a:t>The RA5 rate sits between the two</a:t>
+            </a:r>
+            <a:endParaRPr lang="en-US" sz="1400" dirty="0"/>
+          </a:p>
+          <a:p>
+            <a:pPr indent="0" marL="0">
+              <a:buNone/>
+            </a:pPr>
+            <a:r>
+              <a:rPr lang="en-US" sz="1200" dirty="0">
+                <a:solidFill>
+                  <a:schemeClr val="tx1"/>
+                </a:solidFill>
+              </a:rPr>
+              <a:t>It matches neither total nor live applications, so the conversion measure uses a different application count. This is the main question for Lesley.</a:t>
+            </a:r>
+            <a:endParaRPr lang="en-US" sz="1400" dirty="0"/>
+          </a:p>
+        </p:txBody>
+      </p:sp>
+      <p:sp>
+        <p:nvSpPr>
+          <p:cNvPr id="7" name="evidence 2"/>
+          <p:cNvSpPr/>
+          <p:nvPr/>
+        </p:nvSpPr>
+        <p:spPr>
+          <a:xfrm>
+            <a:off x="7589520" y="3182112"/>
+            <a:ext cx="4023360" cy="1371600"/>
+          </a:xfrm>
+          <a:prstGeom prst="roundRect">
+            <a:avLst>
+              <a:gd name="adj" fmla="val 5333"/>
             </a:avLst>
           </a:prstGeom>
           <a:solidFill>
@@ -10019,14 +11493,14 @@
       </p:sp>
       <p:sp>
         <p:nvSpPr>
-          <p:cNvPr id="5" name="Text 3"/>
+          <p:cNvPr id="8" name="Text 5"/>
           <p:cNvSpPr txBox="1"/>
           <p:nvPr/>
         </p:nvSpPr>
         <p:spPr>
           <a:xfrm>
-            <a:off x="822960" y="1783080"/>
-            <a:ext cx="4846320" cy="411480"/>
+            <a:off x="7772400" y="3227832"/>
+            <a:ext cx="3703320" cy="1280160"/>
           </a:xfrm>
           <a:prstGeom prst="rect">
             <a:avLst/>
@@ -10042,151 +11516,53 @@
               <a:buNone/>
             </a:pPr>
             <a:r>
-              <a:rPr lang="en-US" sz="1800" b="1" dirty="0">
+              <a:rPr lang="en-US" sz="1400" b="1" dirty="0">
                 <a:solidFill>
                   <a:schemeClr val="tx2"/>
                 </a:solidFill>
               </a:rPr>
-              <a:t>Lesley's concerns</a:t>
-            </a:r>
-            <a:endParaRPr lang="en-US" sz="1800" dirty="0"/>
-          </a:p>
-        </p:txBody>
-      </p:sp>
-      <p:sp>
-        <p:nvSpPr>
-          <p:cNvPr id="6" name="Text 4"/>
-          <p:cNvSpPr txBox="1"/>
-          <p:nvPr/>
-        </p:nvSpPr>
-        <p:spPr>
-          <a:xfrm>
-            <a:off x="822960" y="2286000"/>
-            <a:ext cx="4892040" cy="3657600"/>
-          </a:xfrm>
-          <a:prstGeom prst="rect">
-            <a:avLst/>
-          </a:prstGeom>
-          <a:noFill/>
-          <a:ln/>
-        </p:spPr>
-        <p:txBody>
-          <a:bodyPr wrap="square" lIns="0" tIns="0" rIns="0" bIns="0" rtlCol="0" anchor="t"/>
-          <a:lstStyle/>
-          <a:p>
-            <a:pPr marL="342900" indent="-342900">
-              <a:spcAft>
-                <a:spcPts val="1000"/>
-              </a:spcAft>
-              <a:buSzPct val="100000"/>
-              <a:buChar char="•"/>
-            </a:pPr>
-            <a:r>
-              <a:rPr lang="en-US" sz="1500" dirty="0">
+              <a:t>Only 2026 is visible</a:t>
+            </a:r>
+            <a:endParaRPr lang="en-US" sz="1400" dirty="0"/>
+          </a:p>
+          <a:p>
+            <a:pPr indent="0" marL="0">
+              <a:buNone/>
+            </a:pPr>
+            <a:r>
+              <a:rPr lang="en-US" sz="1200" dirty="0">
                 <a:solidFill>
                   <a:schemeClr val="tx1"/>
                 </a:solidFill>
               </a:rPr>
-              <a:t>No audit trail of application statuses, only the current one</a:t>
-            </a:r>
-            <a:endParaRPr lang="en-US" sz="1500" dirty="0"/>
-          </a:p>
-          <a:p>
-            <a:pPr marL="342900" indent="-342900">
-              <a:spcAft>
-                <a:spcPts val="1000"/>
-              </a:spcAft>
-              <a:buSzPct val="100000"/>
-              <a:buChar char="•"/>
-            </a:pPr>
-            <a:r>
-              <a:rPr lang="en-US" sz="1500" dirty="0">
-                <a:solidFill>
-                  <a:schemeClr val="tx1"/>
-                </a:solidFill>
-              </a:rPr>
-              <a:t>Only live applications are reliable</a:t>
-            </a:r>
-            <a:endParaRPr lang="en-US" sz="1500" dirty="0"/>
-          </a:p>
-          <a:p>
-            <a:pPr marL="342900" indent="-342900">
-              <a:spcAft>
-                <a:spcPts val="1000"/>
-              </a:spcAft>
-              <a:buSzPct val="100000"/>
-              <a:buChar char="•"/>
-            </a:pPr>
-            <a:r>
-              <a:rPr lang="en-US" sz="1500" dirty="0">
-                <a:solidFill>
-                  <a:schemeClr val="tx1"/>
-                </a:solidFill>
-              </a:rPr>
-              <a:t>The conversion page is 2026/27, still in progress</a:t>
-            </a:r>
-            <a:endParaRPr lang="en-US" sz="1500" dirty="0"/>
-          </a:p>
-          <a:p>
-            <a:pPr marL="342900" indent="-342900">
-              <a:spcAft>
-                <a:spcPts val="1000"/>
-              </a:spcAft>
-              <a:buSzPct val="100000"/>
-              <a:buChar char="•"/>
-            </a:pPr>
-            <a:r>
-              <a:rPr lang="en-US" sz="1500" dirty="0">
-                <a:solidFill>
-                  <a:schemeClr val="tx1"/>
-                </a:solidFill>
-              </a:rPr>
-              <a:t>Not sure the 6-week enrolment point can be pulled</a:t>
-            </a:r>
-            <a:endParaRPr lang="en-US" sz="1500" dirty="0"/>
-          </a:p>
-          <a:p>
-            <a:pPr marL="342900" indent="-342900">
-              <a:spcAft>
-                <a:spcPts val="1000"/>
-              </a:spcAft>
-              <a:buSzPct val="100000"/>
-              <a:buChar char="•"/>
-            </a:pPr>
-            <a:r>
-              <a:rPr lang="en-US" sz="1500" dirty="0">
-                <a:solidFill>
-                  <a:schemeClr val="tx1"/>
-                </a:solidFill>
-              </a:rPr>
-              <a:t>Over-recruiting could mean students "haven't got a seat"</a:t>
-            </a:r>
-            <a:endParaRPr lang="en-US" sz="1500" dirty="0"/>
-          </a:p>
-        </p:txBody>
-      </p:sp>
-      <p:sp>
-        <p:nvSpPr>
-          <p:cNvPr id="7" name="map col"/>
+              <a:t>The Session filter shows 2026 only, and the Summary page has no session filter. We need past years for a 3-year baseline.</a:t>
+            </a:r>
+            <a:endParaRPr lang="en-US" sz="1400" dirty="0"/>
+          </a:p>
+        </p:txBody>
+      </p:sp>
+      <p:sp>
+        <p:nvSpPr>
+          <p:cNvPr id="9" name="evidence 3"/>
           <p:cNvSpPr/>
           <p:nvPr/>
         </p:nvSpPr>
         <p:spPr>
           <a:xfrm>
-            <a:off x="6217920" y="1645920"/>
-            <a:ext cx="5394960" cy="4480560"/>
+            <a:off x="7589520" y="4718304"/>
+            <a:ext cx="4023360" cy="1371600"/>
           </a:xfrm>
           <a:prstGeom prst="roundRect">
             <a:avLst>
-              <a:gd name="adj" fmla="val 1633"/>
+              <a:gd name="adj" fmla="val 5333"/>
             </a:avLst>
           </a:prstGeom>
           <a:solidFill>
-            <a:srgbClr val="FDF0DF"/>
+            <a:schemeClr val="bg2"/>
           </a:solidFill>
           <a:ln w="12700">
             <a:solidFill>
-              <a:srgbClr val="FDF0DF"/>
+              <a:schemeClr val="bg2"/>
             </a:solidFill>
             <a:prstDash val="solid"/>
           </a:ln>
@@ -10194,14 +11570,14 @@
       </p:sp>
       <p:sp>
         <p:nvSpPr>
-          <p:cNvPr id="8" name="Text 6"/>
+          <p:cNvPr id="10" name="Text 7"/>
           <p:cNvSpPr txBox="1"/>
           <p:nvPr/>
         </p:nvSpPr>
         <p:spPr>
           <a:xfrm>
-            <a:off x="6492240" y="1783080"/>
-            <a:ext cx="4846320" cy="411480"/>
+            <a:off x="7772400" y="4764024"/>
+            <a:ext cx="3703320" cy="1280160"/>
           </a:xfrm>
           <a:prstGeom prst="rect">
             <a:avLst/>
@@ -10217,126 +11593,28 @@
               <a:buNone/>
             </a:pPr>
             <a:r>
-              <a:rPr lang="en-US" sz="1800" b="1" dirty="0">
+              <a:rPr lang="en-US" sz="1400" b="1" dirty="0">
                 <a:solidFill>
                   <a:schemeClr val="tx2"/>
                 </a:solidFill>
               </a:rPr>
-              <a:t>What the data map adds</a:t>
-            </a:r>
-            <a:endParaRPr lang="en-US" sz="1800" dirty="0"/>
-          </a:p>
-        </p:txBody>
-      </p:sp>
-      <p:sp>
-        <p:nvSpPr>
-          <p:cNvPr id="9" name="Text 7"/>
-          <p:cNvSpPr txBox="1"/>
-          <p:nvPr/>
-        </p:nvSpPr>
-        <p:spPr>
-          <a:xfrm>
-            <a:off x="6492240" y="2286000"/>
-            <a:ext cx="4892040" cy="3657600"/>
-          </a:xfrm>
-          <a:prstGeom prst="rect">
-            <a:avLst/>
-          </a:prstGeom>
-          <a:noFill/>
-          <a:ln/>
-        </p:spPr>
-        <p:txBody>
-          <a:bodyPr wrap="square" lIns="0" tIns="0" rIns="0" bIns="0" rtlCol="0" anchor="t"/>
-          <a:lstStyle/>
-          <a:p>
-            <a:pPr marL="342900" indent="-342900">
-              <a:spcAft>
-                <a:spcPts val="1000"/>
-              </a:spcAft>
-              <a:buSzPct val="100000"/>
-              <a:buChar char="•"/>
-            </a:pPr>
-            <a:r>
-              <a:rPr lang="en-US" sz="1500" dirty="0">
+              <a:t>Source tables not visible</a:t>
+            </a:r>
+            <a:endParaRPr lang="en-US" sz="1400" dirty="0"/>
+          </a:p>
+          <a:p>
+            <a:pPr indent="0" marL="0">
+              <a:buNone/>
+            </a:pPr>
+            <a:r>
+              <a:rPr lang="en-US" sz="1200" dirty="0">
                 <a:solidFill>
                   <a:schemeClr val="tx1"/>
                 </a:solidFill>
               </a:rPr>
-              <a:t>23 of 98 system connections are manual</a:t>
-            </a:r>
-            <a:endParaRPr lang="en-US" sz="1500" dirty="0"/>
-          </a:p>
-          <a:p>
-            <a:pPr marL="342900" indent="-342900">
-              <a:spcAft>
-                <a:spcPts val="1000"/>
-              </a:spcAft>
-              <a:buSzPct val="100000"/>
-              <a:buChar char="•"/>
-            </a:pPr>
-            <a:r>
-              <a:rPr lang="en-US" sz="1500" dirty="0">
-                <a:solidFill>
-                  <a:schemeClr val="tx1"/>
-                </a:solidFill>
-              </a:rPr>
-              <a:t>Enquirer → UnitE is a manual step on the recruitment path</a:t>
-            </a:r>
-            <a:endParaRPr lang="en-US" sz="1500" dirty="0"/>
-          </a:p>
-          <a:p>
-            <a:pPr marL="342900" indent="-342900">
-              <a:spcAft>
-                <a:spcPts val="1000"/>
-              </a:spcAft>
-              <a:buSzPct val="100000"/>
-              <a:buChar char="•"/>
-            </a:pPr>
-            <a:r>
-              <a:rPr lang="en-US" sz="1500" dirty="0">
-                <a:solidFill>
-                  <a:schemeClr val="tx1"/>
-                </a:solidFill>
-              </a:rPr>
-              <a:t>Student destinations are assembled by hand from UCAS, NAD and universities</a:t>
-            </a:r>
-            <a:endParaRPr lang="en-US" sz="1500" dirty="0"/>
-          </a:p>
-          <a:p>
-            <a:pPr marL="342900" indent="-342900">
-              <a:spcAft>
-                <a:spcPts val="1000"/>
-              </a:spcAft>
-              <a:buSzPct val="100000"/>
-              <a:buChar char="•"/>
-            </a:pPr>
-            <a:r>
-              <a:rPr lang="en-US" sz="1500" dirty="0">
-                <a:solidFill>
-                  <a:schemeClr val="tx1"/>
-                </a:solidFill>
-              </a:rPr>
-              <a:t>Five systems feed Power BI through one SQL Server connector</a:t>
-            </a:r>
-            <a:endParaRPr lang="en-US" sz="1500" dirty="0"/>
-          </a:p>
-          <a:p>
-            <a:pPr marL="342900" indent="-342900">
-              <a:spcAft>
-                <a:spcPts val="1000"/>
-              </a:spcAft>
-              <a:buSzPct val="100000"/>
-              <a:buChar char="•"/>
-            </a:pPr>
-            <a:r>
-              <a:rPr lang="en-US" sz="1500" dirty="0">
-                <a:solidFill>
-                  <a:schemeClr val="tx1"/>
-                </a:solidFill>
-              </a:rPr>
-              <a:t>RA5's semantic model source is not yet confirmed</a:t>
-            </a:r>
-            <a:endParaRPr lang="en-US" sz="1500" dirty="0"/>
+              <a:t>Lineage shows semantic model → RA5 report, but not the database behind it. Kevin can confirm which tables feed it.</a:t>
+            </a:r>
+            <a:endParaRPr lang="en-US" sz="1400" dirty="0"/>
           </a:p>
         </p:txBody>
       </p:sp>
@@ -10442,7 +11720,7 @@
                   <a:schemeClr val="tx2"/>
                 </a:solidFill>
               </a:rPr>
-              <a:t>How we will build the baseline</a:t>
+              <a:t>Data limits to agree before we build</a:t>
             </a:r>
             <a:endParaRPr lang="en-US" sz="3200" dirty="0"/>
           </a:p>
@@ -10480,7 +11758,7 @@
                   <a:schemeClr val="tx1"/>
                 </a:solidFill>
               </a:rPr>
-              <a:t>Seven steps, starting with construction as the pilot area</a:t>
+              <a:t>Lesley's concerns from the meeting, alongside the gaps the data map shows</a:t>
             </a:r>
             <a:endParaRPr lang="en-US" sz="1500" dirty="0"/>
           </a:p>
@@ -10488,79 +11766,18 @@
       </p:sp>
       <p:sp>
         <p:nvSpPr>
-          <p:cNvPr id="4" name="dot 1"/>
+          <p:cNvPr id="4" name="lesley col"/>
           <p:cNvSpPr/>
           <p:nvPr/>
         </p:nvSpPr>
         <p:spPr>
           <a:xfrm>
-            <a:off x="1005840" y="1783080"/>
-            <a:ext cx="548640" cy="548640"/>
-          </a:xfrm>
-          <a:prstGeom prst="ellipse">
-            <a:avLst/>
-          </a:prstGeom>
-          <a:solidFill>
-            <a:schemeClr val="accent1"/>
-          </a:solidFill>
-          <a:ln w="12700">
-            <a:solidFill>
-              <a:schemeClr val="accent1"/>
-            </a:solidFill>
-            <a:prstDash val="solid"/>
-          </a:ln>
-        </p:spPr>
-      </p:sp>
-      <p:sp>
-        <p:nvSpPr>
-          <p:cNvPr id="5" name="Text 3"/>
-          <p:cNvSpPr txBox="1"/>
-          <p:nvPr/>
-        </p:nvSpPr>
-        <p:spPr>
-          <a:xfrm>
-            <a:off x="1005840" y="1783080"/>
-            <a:ext cx="548640" cy="548640"/>
-          </a:xfrm>
-          <a:prstGeom prst="rect">
-            <a:avLst/>
-          </a:prstGeom>
-          <a:noFill/>
-          <a:ln/>
-        </p:spPr>
-        <p:txBody>
-          <a:bodyPr wrap="square" lIns="0" tIns="0" rIns="0" bIns="0" rtlCol="0" anchor="ctr"/>
-          <a:lstStyle/>
-          <a:p>
-            <a:pPr algn="ctr" indent="0" marL="0">
-              <a:buNone/>
-            </a:pPr>
-            <a:r>
-              <a:rPr lang="en-US" sz="1400" b="1" dirty="0">
-                <a:solidFill>
-                  <a:schemeClr val="bg1"/>
-                </a:solidFill>
-              </a:rPr>
-              <a:t>1</a:t>
-            </a:r>
-            <a:endParaRPr lang="en-US" sz="1400" dirty="0"/>
-          </a:p>
-        </p:txBody>
-      </p:sp>
-      <p:sp>
-        <p:nvSpPr>
-          <p:cNvPr id="6" name="step 1"/>
-          <p:cNvSpPr/>
-          <p:nvPr/>
-        </p:nvSpPr>
-        <p:spPr>
-          <a:xfrm>
-            <a:off x="548640" y="2560320"/>
-            <a:ext cx="1463040" cy="2377440"/>
+            <a:off x="548640" y="1645920"/>
+            <a:ext cx="5394960" cy="4480560"/>
           </a:xfrm>
           <a:prstGeom prst="roundRect">
             <a:avLst>
-              <a:gd name="adj" fmla="val 5000"/>
+              <a:gd name="adj" fmla="val 1633"/>
             </a:avLst>
           </a:prstGeom>
           <a:solidFill>
@@ -10576,14 +11793,14 @@
       </p:sp>
       <p:sp>
         <p:nvSpPr>
-          <p:cNvPr id="7" name="Text 5"/>
+          <p:cNvPr id="5" name="Text 3"/>
           <p:cNvSpPr txBox="1"/>
           <p:nvPr/>
         </p:nvSpPr>
         <p:spPr>
           <a:xfrm>
-            <a:off x="640080" y="2697480"/>
-            <a:ext cx="1280160" cy="411480"/>
+            <a:off x="822960" y="1783080"/>
+            <a:ext cx="4846320" cy="411480"/>
           </a:xfrm>
           <a:prstGeom prst="rect">
             <a:avLst/>
@@ -10595,77 +11812,155 @@
           <a:bodyPr wrap="square" lIns="0" tIns="0" rIns="0" bIns="0" rtlCol="0" anchor="ctr"/>
           <a:lstStyle/>
           <a:p>
-            <a:pPr algn="ctr" indent="0" marL="0">
-              <a:buNone/>
-            </a:pPr>
-            <a:r>
-              <a:rPr lang="en-US" sz="1500" b="1" dirty="0">
+            <a:pPr indent="0" marL="0">
+              <a:buNone/>
+            </a:pPr>
+            <a:r>
+              <a:rPr lang="en-US" sz="1800" b="1" dirty="0">
                 <a:solidFill>
                   <a:schemeClr val="tx2"/>
                 </a:solidFill>
               </a:rPr>
-              <a:t>Collect</a:t>
+              <a:t>Lesley's concerns</a:t>
+            </a:r>
+            <a:endParaRPr lang="en-US" sz="1800" dirty="0"/>
+          </a:p>
+        </p:txBody>
+      </p:sp>
+      <p:sp>
+        <p:nvSpPr>
+          <p:cNvPr id="6" name="Text 4"/>
+          <p:cNvSpPr txBox="1"/>
+          <p:nvPr/>
+        </p:nvSpPr>
+        <p:spPr>
+          <a:xfrm>
+            <a:off x="822960" y="2286000"/>
+            <a:ext cx="4892040" cy="3657600"/>
+          </a:xfrm>
+          <a:prstGeom prst="rect">
+            <a:avLst/>
+          </a:prstGeom>
+          <a:noFill/>
+          <a:ln/>
+        </p:spPr>
+        <p:txBody>
+          <a:bodyPr wrap="square" lIns="0" tIns="0" rIns="0" bIns="0" rtlCol="0" anchor="t"/>
+          <a:lstStyle/>
+          <a:p>
+            <a:pPr marL="342900" indent="-342900">
+              <a:spcAft>
+                <a:spcPts val="1000"/>
+              </a:spcAft>
+              <a:buSzPct val="100000"/>
+              <a:buChar char="•"/>
+            </a:pPr>
+            <a:r>
+              <a:rPr lang="en-US" sz="1500" dirty="0">
+                <a:solidFill>
+                  <a:schemeClr val="tx1"/>
+                </a:solidFill>
+              </a:rPr>
+              <a:t>No audit trail of application statuses, only the current one</a:t>
             </a:r>
             <a:endParaRPr lang="en-US" sz="1500" dirty="0"/>
           </a:p>
-        </p:txBody>
-      </p:sp>
-      <p:sp>
-        <p:nvSpPr>
-          <p:cNvPr id="8" name="Text 6"/>
-          <p:cNvSpPr txBox="1"/>
-          <p:nvPr/>
-        </p:nvSpPr>
-        <p:spPr>
-          <a:xfrm>
-            <a:off x="640080" y="3200400"/>
-            <a:ext cx="1280160" cy="1645920"/>
-          </a:xfrm>
-          <a:prstGeom prst="rect">
-            <a:avLst/>
-          </a:prstGeom>
-          <a:noFill/>
-          <a:ln/>
-        </p:spPr>
-        <p:txBody>
-          <a:bodyPr wrap="square" lIns="0" tIns="0" rIns="0" bIns="0" rtlCol="0" anchor="t"/>
-          <a:lstStyle/>
-          <a:p>
-            <a:pPr algn="ctr" indent="0" marL="0">
-              <a:buNone/>
-            </a:pPr>
-            <a:r>
-              <a:rPr lang="en-US" sz="1250" dirty="0">
+          <a:p>
+            <a:pPr marL="342900" indent="-342900">
+              <a:spcAft>
+                <a:spcPts val="1000"/>
+              </a:spcAft>
+              <a:buSzPct val="100000"/>
+              <a:buChar char="•"/>
+            </a:pPr>
+            <a:r>
+              <a:rPr lang="en-US" sz="1500" dirty="0">
                 <a:solidFill>
                   <a:schemeClr val="tx1"/>
                 </a:solidFill>
               </a:rPr>
-              <a:t>3 final years (2023/24 to 2025/26), course level</a:t>
-            </a:r>
-            <a:endParaRPr lang="en-US" sz="1250" dirty="0"/>
-          </a:p>
-        </p:txBody>
-      </p:sp>
-      <p:sp>
-        <p:nvSpPr>
-          <p:cNvPr id="9" name="dot 2"/>
+              <a:t>Only live applications are reliable</a:t>
+            </a:r>
+            <a:endParaRPr lang="en-US" sz="1500" dirty="0"/>
+          </a:p>
+          <a:p>
+            <a:pPr marL="342900" indent="-342900">
+              <a:spcAft>
+                <a:spcPts val="1000"/>
+              </a:spcAft>
+              <a:buSzPct val="100000"/>
+              <a:buChar char="•"/>
+            </a:pPr>
+            <a:r>
+              <a:rPr lang="en-US" sz="1500" dirty="0">
+                <a:solidFill>
+                  <a:schemeClr val="tx1"/>
+                </a:solidFill>
+              </a:rPr>
+              <a:t>The conversion page is 2026/27, still in progress</a:t>
+            </a:r>
+            <a:endParaRPr lang="en-US" sz="1500" dirty="0"/>
+          </a:p>
+          <a:p>
+            <a:pPr marL="342900" indent="-342900">
+              <a:spcAft>
+                <a:spcPts val="1000"/>
+              </a:spcAft>
+              <a:buSzPct val="100000"/>
+              <a:buChar char="•"/>
+            </a:pPr>
+            <a:r>
+              <a:rPr lang="en-US" sz="1500" dirty="0">
+                <a:solidFill>
+                  <a:schemeClr val="tx1"/>
+                </a:solidFill>
+              </a:rPr>
+              <a:t>Not sure the 6-week enrolment point can be pulled</a:t>
+            </a:r>
+            <a:endParaRPr lang="en-US" sz="1500" dirty="0"/>
+          </a:p>
+          <a:p>
+            <a:pPr marL="342900" indent="-342900">
+              <a:spcAft>
+                <a:spcPts val="1000"/>
+              </a:spcAft>
+              <a:buSzPct val="100000"/>
+              <a:buChar char="•"/>
+            </a:pPr>
+            <a:r>
+              <a:rPr lang="en-US" sz="1500" dirty="0">
+                <a:solidFill>
+                  <a:schemeClr val="tx1"/>
+                </a:solidFill>
+              </a:rPr>
+              <a:t>Over-recruiting could mean students "haven't got a seat"</a:t>
+            </a:r>
+            <a:endParaRPr lang="en-US" sz="1500" dirty="0"/>
+          </a:p>
+        </p:txBody>
+      </p:sp>
+      <p:sp>
+        <p:nvSpPr>
+          <p:cNvPr id="7" name="map col"/>
           <p:cNvSpPr/>
           <p:nvPr/>
         </p:nvSpPr>
         <p:spPr>
           <a:xfrm>
-            <a:off x="2612441" y="1783080"/>
-            <a:ext cx="548640" cy="548640"/>
-          </a:xfrm>
-          <a:prstGeom prst="ellipse">
-            <a:avLst/>
+            <a:off x="6217920" y="1645920"/>
+            <a:ext cx="5394960" cy="4480560"/>
+          </a:xfrm>
+          <a:prstGeom prst="roundRect">
+            <a:avLst>
+              <a:gd name="adj" fmla="val 1633"/>
+            </a:avLst>
           </a:prstGeom>
           <a:solidFill>
-            <a:schemeClr val="accent1"/>
+            <a:srgbClr val="FDF0DF"/>
           </a:solidFill>
           <a:ln w="12700">
             <a:solidFill>
-              <a:schemeClr val="accent1"/>
+              <a:srgbClr val="FDF0DF"/>
             </a:solidFill>
             <a:prstDash val="solid"/>
           </a:ln>
@@ -10673,14 +11968,14 @@
       </p:sp>
       <p:sp>
         <p:nvSpPr>
-          <p:cNvPr id="10" name="Text 8"/>
+          <p:cNvPr id="8" name="Text 6"/>
           <p:cNvSpPr txBox="1"/>
           <p:nvPr/>
         </p:nvSpPr>
         <p:spPr>
           <a:xfrm>
-            <a:off x="2612441" y="1783080"/>
-            <a:ext cx="548640" cy="548640"/>
+            <a:off x="6492240" y="1783080"/>
+            <a:ext cx="4846320" cy="411480"/>
           </a:xfrm>
           <a:prstGeom prst="rect">
             <a:avLst/>
@@ -10692,991 +11987,130 @@
           <a:bodyPr wrap="square" lIns="0" tIns="0" rIns="0" bIns="0" rtlCol="0" anchor="ctr"/>
           <a:lstStyle/>
           <a:p>
-            <a:pPr algn="ctr" indent="0" marL="0">
-              <a:buNone/>
-            </a:pPr>
-            <a:r>
-              <a:rPr lang="en-US" sz="1400" b="1" dirty="0">
-                <a:solidFill>
-                  <a:schemeClr val="bg1"/>
-                </a:solidFill>
-              </a:rPr>
-              <a:t>2</a:t>
-            </a:r>
-            <a:endParaRPr lang="en-US" sz="1400" dirty="0"/>
-          </a:p>
-        </p:txBody>
-      </p:sp>
-      <p:sp>
-        <p:nvSpPr>
-          <p:cNvPr id="11" name="step 2"/>
-          <p:cNvSpPr/>
-          <p:nvPr/>
-        </p:nvSpPr>
-        <p:spPr>
-          <a:xfrm>
-            <a:off x="2155241" y="2560320"/>
-            <a:ext cx="1463040" cy="2377440"/>
-          </a:xfrm>
-          <a:prstGeom prst="roundRect">
-            <a:avLst>
-              <a:gd name="adj" fmla="val 5000"/>
-            </a:avLst>
-          </a:prstGeom>
-          <a:solidFill>
-            <a:schemeClr val="bg2"/>
-          </a:solidFill>
-          <a:ln w="12700">
-            <a:solidFill>
-              <a:schemeClr val="bg2"/>
-            </a:solidFill>
-            <a:prstDash val="solid"/>
-          </a:ln>
-        </p:spPr>
-      </p:sp>
-      <p:sp>
-        <p:nvSpPr>
-          <p:cNvPr id="12" name="Text 10"/>
+            <a:pPr indent="0" marL="0">
+              <a:buNone/>
+            </a:pPr>
+            <a:r>
+              <a:rPr lang="en-US" sz="1800" b="1" dirty="0">
+                <a:solidFill>
+                  <a:schemeClr val="tx2"/>
+                </a:solidFill>
+              </a:rPr>
+              <a:t>What the data map adds</a:t>
+            </a:r>
+            <a:endParaRPr lang="en-US" sz="1800" dirty="0"/>
+          </a:p>
+        </p:txBody>
+      </p:sp>
+      <p:sp>
+        <p:nvSpPr>
+          <p:cNvPr id="9" name="Text 7"/>
           <p:cNvSpPr txBox="1"/>
           <p:nvPr/>
         </p:nvSpPr>
         <p:spPr>
           <a:xfrm>
-            <a:off x="2246681" y="2697480"/>
-            <a:ext cx="1280160" cy="411480"/>
-          </a:xfrm>
-          <a:prstGeom prst="rect">
-            <a:avLst/>
-          </a:prstGeom>
-          <a:noFill/>
-          <a:ln/>
-        </p:spPr>
-        <p:txBody>
-          <a:bodyPr wrap="square" lIns="0" tIns="0" rIns="0" bIns="0" rtlCol="0" anchor="ctr"/>
-          <a:lstStyle/>
-          <a:p>
-            <a:pPr algn="ctr" indent="0" marL="0">
-              <a:buNone/>
-            </a:pPr>
-            <a:r>
-              <a:rPr lang="en-US" sz="1500" b="1" dirty="0">
-                <a:solidFill>
-                  <a:schemeClr val="tx2"/>
-                </a:solidFill>
-              </a:rPr>
-              <a:t>Clean</a:t>
+            <a:off x="6492240" y="2286000"/>
+            <a:ext cx="4892040" cy="3657600"/>
+          </a:xfrm>
+          <a:prstGeom prst="rect">
+            <a:avLst/>
+          </a:prstGeom>
+          <a:noFill/>
+          <a:ln/>
+        </p:spPr>
+        <p:txBody>
+          <a:bodyPr wrap="square" lIns="0" tIns="0" rIns="0" bIns="0" rtlCol="0" anchor="t"/>
+          <a:lstStyle/>
+          <a:p>
+            <a:pPr marL="342900" indent="-342900">
+              <a:spcAft>
+                <a:spcPts val="1000"/>
+              </a:spcAft>
+              <a:buSzPct val="100000"/>
+              <a:buChar char="•"/>
+            </a:pPr>
+            <a:r>
+              <a:rPr lang="en-US" sz="1500" dirty="0">
+                <a:solidFill>
+                  <a:schemeClr val="tx1"/>
+                </a:solidFill>
+              </a:rPr>
+              <a:t>23 of 98 system connections are manual</a:t>
             </a:r>
             <a:endParaRPr lang="en-US" sz="1500" dirty="0"/>
           </a:p>
-        </p:txBody>
-      </p:sp>
-      <p:sp>
-        <p:nvSpPr>
-          <p:cNvPr id="13" name="Text 11"/>
-          <p:cNvSpPr txBox="1"/>
-          <p:nvPr/>
-        </p:nvSpPr>
-        <p:spPr>
-          <a:xfrm>
-            <a:off x="2246681" y="3200400"/>
-            <a:ext cx="1280160" cy="1645920"/>
-          </a:xfrm>
-          <a:prstGeom prst="rect">
-            <a:avLst/>
-          </a:prstGeom>
-          <a:noFill/>
-          <a:ln/>
-        </p:spPr>
-        <p:txBody>
-          <a:bodyPr wrap="square" lIns="0" tIns="0" rIns="0" bIns="0" rtlCol="0" anchor="t"/>
-          <a:lstStyle/>
-          <a:p>
-            <a:pPr algn="ctr" indent="0" marL="0">
-              <a:buNone/>
-            </a:pPr>
-            <a:r>
-              <a:rPr lang="en-US" sz="1250" dirty="0">
+          <a:p>
+            <a:pPr marL="342900" indent="-342900">
+              <a:spcAft>
+                <a:spcPts val="1000"/>
+              </a:spcAft>
+              <a:buSzPct val="100000"/>
+              <a:buChar char="•"/>
+            </a:pPr>
+            <a:r>
+              <a:rPr lang="en-US" sz="1500" dirty="0">
                 <a:solidFill>
                   <a:schemeClr val="tx1"/>
                 </a:solidFill>
               </a:rPr>
-              <a:t>Live applications; group A/B sections; match code changes</a:t>
-            </a:r>
-            <a:endParaRPr lang="en-US" sz="1250" dirty="0"/>
-          </a:p>
-        </p:txBody>
-      </p:sp>
-      <p:sp>
-        <p:nvSpPr>
-          <p:cNvPr id="14" name="dot 3"/>
-          <p:cNvSpPr/>
-          <p:nvPr/>
-        </p:nvSpPr>
-        <p:spPr>
-          <a:xfrm>
-            <a:off x="4219042" y="1783080"/>
-            <a:ext cx="548640" cy="548640"/>
-          </a:xfrm>
-          <a:prstGeom prst="ellipse">
-            <a:avLst/>
-          </a:prstGeom>
-          <a:solidFill>
-            <a:schemeClr val="accent1"/>
-          </a:solidFill>
-          <a:ln w="12700">
-            <a:solidFill>
-              <a:schemeClr val="accent1"/>
-            </a:solidFill>
-            <a:prstDash val="solid"/>
-          </a:ln>
-        </p:spPr>
-      </p:sp>
-      <p:sp>
-        <p:nvSpPr>
-          <p:cNvPr id="15" name="Text 13"/>
-          <p:cNvSpPr txBox="1"/>
-          <p:nvPr/>
-        </p:nvSpPr>
-        <p:spPr>
-          <a:xfrm>
-            <a:off x="4219042" y="1783080"/>
-            <a:ext cx="548640" cy="548640"/>
-          </a:xfrm>
-          <a:prstGeom prst="rect">
-            <a:avLst/>
-          </a:prstGeom>
-          <a:noFill/>
-          <a:ln/>
-        </p:spPr>
-        <p:txBody>
-          <a:bodyPr wrap="square" lIns="0" tIns="0" rIns="0" bIns="0" rtlCol="0" anchor="ctr"/>
-          <a:lstStyle/>
-          <a:p>
-            <a:pPr algn="ctr" indent="0" marL="0">
-              <a:buNone/>
-            </a:pPr>
-            <a:r>
-              <a:rPr lang="en-US" sz="1400" b="1" dirty="0">
-                <a:solidFill>
-                  <a:schemeClr val="bg1"/>
-                </a:solidFill>
-              </a:rPr>
-              <a:t>3</a:t>
-            </a:r>
-            <a:endParaRPr lang="en-US" sz="1400" dirty="0"/>
-          </a:p>
-        </p:txBody>
-      </p:sp>
-      <p:sp>
-        <p:nvSpPr>
-          <p:cNvPr id="16" name="step 3"/>
-          <p:cNvSpPr/>
-          <p:nvPr/>
-        </p:nvSpPr>
-        <p:spPr>
-          <a:xfrm>
-            <a:off x="3761842" y="2560320"/>
-            <a:ext cx="1463040" cy="2377440"/>
-          </a:xfrm>
-          <a:prstGeom prst="roundRect">
-            <a:avLst>
-              <a:gd name="adj" fmla="val 5000"/>
-            </a:avLst>
-          </a:prstGeom>
-          <a:solidFill>
-            <a:schemeClr val="bg2"/>
-          </a:solidFill>
-          <a:ln w="12700">
-            <a:solidFill>
-              <a:schemeClr val="bg2"/>
-            </a:solidFill>
-            <a:prstDash val="solid"/>
-          </a:ln>
-        </p:spPr>
-      </p:sp>
-      <p:sp>
-        <p:nvSpPr>
-          <p:cNvPr id="17" name="Text 15"/>
-          <p:cNvSpPr txBox="1"/>
-          <p:nvPr/>
-        </p:nvSpPr>
-        <p:spPr>
-          <a:xfrm>
-            <a:off x="3853282" y="2697480"/>
-            <a:ext cx="1280160" cy="411480"/>
-          </a:xfrm>
-          <a:prstGeom prst="rect">
-            <a:avLst/>
-          </a:prstGeom>
-          <a:noFill/>
-          <a:ln/>
-        </p:spPr>
-        <p:txBody>
-          <a:bodyPr wrap="square" lIns="0" tIns="0" rIns="0" bIns="0" rtlCol="0" anchor="ctr"/>
-          <a:lstStyle/>
-          <a:p>
-            <a:pPr algn="ctr" indent="0" marL="0">
-              <a:buNone/>
-            </a:pPr>
-            <a:r>
-              <a:rPr lang="en-US" sz="1500" b="1" dirty="0">
-                <a:solidFill>
-                  <a:schemeClr val="tx2"/>
-                </a:solidFill>
-              </a:rPr>
-              <a:t>Calculate</a:t>
+              <a:t>Enquirer → UnitE is a manual step on the recruitment path</a:t>
             </a:r>
             <a:endParaRPr lang="en-US" sz="1500" dirty="0"/>
           </a:p>
-        </p:txBody>
-      </p:sp>
-      <p:sp>
-        <p:nvSpPr>
-          <p:cNvPr id="18" name="Text 16"/>
-          <p:cNvSpPr txBox="1"/>
-          <p:nvPr/>
-        </p:nvSpPr>
-        <p:spPr>
-          <a:xfrm>
-            <a:off x="3853282" y="3200400"/>
-            <a:ext cx="1280160" cy="1645920"/>
-          </a:xfrm>
-          <a:prstGeom prst="rect">
-            <a:avLst/>
-          </a:prstGeom>
-          <a:noFill/>
-          <a:ln/>
-        </p:spPr>
-        <p:txBody>
-          <a:bodyPr wrap="square" lIns="0" tIns="0" rIns="0" bIns="0" rtlCol="0" anchor="t"/>
-          <a:lstStyle/>
-          <a:p>
-            <a:pPr algn="ctr" indent="0" marL="0">
-              <a:buNone/>
-            </a:pPr>
-            <a:r>
-              <a:rPr lang="en-US" sz="1250" dirty="0">
+          <a:p>
+            <a:pPr marL="342900" indent="-342900">
+              <a:spcAft>
+                <a:spcPts val="1000"/>
+              </a:spcAft>
+              <a:buSzPct val="100000"/>
+              <a:buChar char="•"/>
+            </a:pPr>
+            <a:r>
+              <a:rPr lang="en-US" sz="1500" dirty="0">
                 <a:solidFill>
                   <a:schemeClr val="tx1"/>
                 </a:solidFill>
               </a:rPr>
-              <a:t>App → offer, offer → enrolment, enrolment → 6 weeks</a:t>
-            </a:r>
-            <a:endParaRPr lang="en-US" sz="1250" dirty="0"/>
-          </a:p>
-        </p:txBody>
-      </p:sp>
-      <p:sp>
-        <p:nvSpPr>
-          <p:cNvPr id="19" name="dot 4"/>
-          <p:cNvSpPr/>
-          <p:nvPr/>
-        </p:nvSpPr>
-        <p:spPr>
-          <a:xfrm>
-            <a:off x="5825642" y="1783080"/>
-            <a:ext cx="548640" cy="548640"/>
-          </a:xfrm>
-          <a:prstGeom prst="ellipse">
-            <a:avLst/>
-          </a:prstGeom>
-          <a:solidFill>
-            <a:schemeClr val="accent2"/>
-          </a:solidFill>
-          <a:ln w="12700">
-            <a:solidFill>
-              <a:schemeClr val="accent2"/>
-            </a:solidFill>
-            <a:prstDash val="solid"/>
-          </a:ln>
-        </p:spPr>
-      </p:sp>
-      <p:sp>
-        <p:nvSpPr>
-          <p:cNvPr id="20" name="Text 18"/>
-          <p:cNvSpPr txBox="1"/>
-          <p:nvPr/>
-        </p:nvSpPr>
-        <p:spPr>
-          <a:xfrm>
-            <a:off x="5825642" y="1783080"/>
-            <a:ext cx="548640" cy="548640"/>
-          </a:xfrm>
-          <a:prstGeom prst="rect">
-            <a:avLst/>
-          </a:prstGeom>
-          <a:noFill/>
-          <a:ln/>
-        </p:spPr>
-        <p:txBody>
-          <a:bodyPr wrap="square" lIns="0" tIns="0" rIns="0" bIns="0" rtlCol="0" anchor="ctr"/>
-          <a:lstStyle/>
-          <a:p>
-            <a:pPr algn="ctr" indent="0" marL="0">
-              <a:buNone/>
-            </a:pPr>
-            <a:r>
-              <a:rPr lang="en-US" sz="1400" b="1" dirty="0">
-                <a:solidFill>
-                  <a:schemeClr val="bg1"/>
-                </a:solidFill>
-              </a:rPr>
-              <a:t>4</a:t>
-            </a:r>
-            <a:endParaRPr lang="en-US" sz="1400" dirty="0"/>
-          </a:p>
-        </p:txBody>
-      </p:sp>
-      <p:sp>
-        <p:nvSpPr>
-          <p:cNvPr id="21" name="step 4"/>
-          <p:cNvSpPr/>
-          <p:nvPr/>
-        </p:nvSpPr>
-        <p:spPr>
-          <a:xfrm>
-            <a:off x="5368442" y="2560320"/>
-            <a:ext cx="1463040" cy="2377440"/>
-          </a:xfrm>
-          <a:prstGeom prst="roundRect">
-            <a:avLst>
-              <a:gd name="adj" fmla="val 5000"/>
-            </a:avLst>
-          </a:prstGeom>
-          <a:solidFill>
-            <a:schemeClr val="accent6"/>
-          </a:solidFill>
-          <a:ln w="12700">
-            <a:solidFill>
-              <a:schemeClr val="accent6"/>
-            </a:solidFill>
-            <a:prstDash val="solid"/>
-          </a:ln>
-        </p:spPr>
-      </p:sp>
-      <p:sp>
-        <p:nvSpPr>
-          <p:cNvPr id="22" name="Text 20"/>
-          <p:cNvSpPr txBox="1"/>
-          <p:nvPr/>
-        </p:nvSpPr>
-        <p:spPr>
-          <a:xfrm>
-            <a:off x="5459882" y="2697480"/>
-            <a:ext cx="1280160" cy="411480"/>
-          </a:xfrm>
-          <a:prstGeom prst="rect">
-            <a:avLst/>
-          </a:prstGeom>
-          <a:noFill/>
-          <a:ln/>
-        </p:spPr>
-        <p:txBody>
-          <a:bodyPr wrap="square" lIns="0" tIns="0" rIns="0" bIns="0" rtlCol="0" anchor="ctr"/>
-          <a:lstStyle/>
-          <a:p>
-            <a:pPr algn="ctr" indent="0" marL="0">
-              <a:buNone/>
-            </a:pPr>
-            <a:r>
-              <a:rPr lang="en-US" sz="1500" b="1" dirty="0">
-                <a:solidFill>
-                  <a:schemeClr val="tx2"/>
-                </a:solidFill>
-              </a:rPr>
-              <a:t>Work back</a:t>
+              <a:t>Student destinations are assembled by hand from UCAS, NAD and universities</a:t>
             </a:r>
             <a:endParaRPr lang="en-US" sz="1500" dirty="0"/>
           </a:p>
-        </p:txBody>
-      </p:sp>
-      <p:sp>
-        <p:nvSpPr>
-          <p:cNvPr id="23" name="Text 21"/>
-          <p:cNvSpPr txBox="1"/>
-          <p:nvPr/>
-        </p:nvSpPr>
-        <p:spPr>
-          <a:xfrm>
-            <a:off x="5459882" y="3200400"/>
-            <a:ext cx="1280160" cy="1645920"/>
-          </a:xfrm>
-          <a:prstGeom prst="rect">
-            <a:avLst/>
-          </a:prstGeom>
-          <a:noFill/>
-          <a:ln/>
-        </p:spPr>
-        <p:txBody>
-          <a:bodyPr wrap="square" lIns="0" tIns="0" rIns="0" bIns="0" rtlCol="0" anchor="t"/>
-          <a:lstStyle/>
-          <a:p>
-            <a:pPr algn="ctr" indent="0" marL="0">
-              <a:buNone/>
-            </a:pPr>
-            <a:r>
-              <a:rPr lang="en-US" sz="1250" dirty="0">
+          <a:p>
+            <a:pPr marL="342900" indent="-342900">
+              <a:spcAft>
+                <a:spcPts val="1000"/>
+              </a:spcAft>
+              <a:buSzPct val="100000"/>
+              <a:buChar char="•"/>
+            </a:pPr>
+            <a:r>
+              <a:rPr lang="en-US" sz="1500" dirty="0">
                 <a:solidFill>
                   <a:schemeClr val="tx1"/>
                 </a:solidFill>
               </a:rPr>
-              <a:t>Target enrolments ÷ rates = target offers and applications</a:t>
-            </a:r>
-            <a:endParaRPr lang="en-US" sz="1250" dirty="0"/>
-          </a:p>
-        </p:txBody>
-      </p:sp>
-      <p:sp>
-        <p:nvSpPr>
-          <p:cNvPr id="24" name="dot 5"/>
-          <p:cNvSpPr/>
-          <p:nvPr/>
-        </p:nvSpPr>
-        <p:spPr>
-          <a:xfrm>
-            <a:off x="7432243" y="1783080"/>
-            <a:ext cx="548640" cy="548640"/>
-          </a:xfrm>
-          <a:prstGeom prst="ellipse">
-            <a:avLst/>
-          </a:prstGeom>
-          <a:solidFill>
-            <a:schemeClr val="accent1"/>
-          </a:solidFill>
-          <a:ln w="12700">
-            <a:solidFill>
-              <a:schemeClr val="accent1"/>
-            </a:solidFill>
-            <a:prstDash val="solid"/>
-          </a:ln>
-        </p:spPr>
-      </p:sp>
-      <p:sp>
-        <p:nvSpPr>
-          <p:cNvPr id="25" name="Text 23"/>
-          <p:cNvSpPr txBox="1"/>
-          <p:nvPr/>
-        </p:nvSpPr>
-        <p:spPr>
-          <a:xfrm>
-            <a:off x="7432243" y="1783080"/>
-            <a:ext cx="548640" cy="548640"/>
-          </a:xfrm>
-          <a:prstGeom prst="rect">
-            <a:avLst/>
-          </a:prstGeom>
-          <a:noFill/>
-          <a:ln/>
-        </p:spPr>
-        <p:txBody>
-          <a:bodyPr wrap="square" lIns="0" tIns="0" rIns="0" bIns="0" rtlCol="0" anchor="ctr"/>
-          <a:lstStyle/>
-          <a:p>
-            <a:pPr algn="ctr" indent="0" marL="0">
-              <a:buNone/>
-            </a:pPr>
-            <a:r>
-              <a:rPr lang="en-US" sz="1400" b="1" dirty="0">
-                <a:solidFill>
-                  <a:schemeClr val="bg1"/>
-                </a:solidFill>
-              </a:rPr>
-              <a:t>5</a:t>
-            </a:r>
-            <a:endParaRPr lang="en-US" sz="1400" dirty="0"/>
-          </a:p>
-        </p:txBody>
-      </p:sp>
-      <p:sp>
-        <p:nvSpPr>
-          <p:cNvPr id="26" name="step 5"/>
-          <p:cNvSpPr/>
-          <p:nvPr/>
-        </p:nvSpPr>
-        <p:spPr>
-          <a:xfrm>
-            <a:off x="6975043" y="2560320"/>
-            <a:ext cx="1463040" cy="2377440"/>
-          </a:xfrm>
-          <a:prstGeom prst="roundRect">
-            <a:avLst>
-              <a:gd name="adj" fmla="val 5000"/>
-            </a:avLst>
-          </a:prstGeom>
-          <a:solidFill>
-            <a:schemeClr val="bg2"/>
-          </a:solidFill>
-          <a:ln w="12700">
-            <a:solidFill>
-              <a:schemeClr val="bg2"/>
-            </a:solidFill>
-            <a:prstDash val="solid"/>
-          </a:ln>
-        </p:spPr>
-      </p:sp>
-      <p:sp>
-        <p:nvSpPr>
-          <p:cNvPr id="27" name="Text 25"/>
-          <p:cNvSpPr txBox="1"/>
-          <p:nvPr/>
-        </p:nvSpPr>
-        <p:spPr>
-          <a:xfrm>
-            <a:off x="7066483" y="2697480"/>
-            <a:ext cx="1280160" cy="411480"/>
-          </a:xfrm>
-          <a:prstGeom prst="rect">
-            <a:avLst/>
-          </a:prstGeom>
-          <a:noFill/>
-          <a:ln/>
-        </p:spPr>
-        <p:txBody>
-          <a:bodyPr wrap="square" lIns="0" tIns="0" rIns="0" bIns="0" rtlCol="0" anchor="ctr"/>
-          <a:lstStyle/>
-          <a:p>
-            <a:pPr algn="ctr" indent="0" marL="0">
-              <a:buNone/>
-            </a:pPr>
-            <a:r>
-              <a:rPr lang="en-US" sz="1500" b="1" dirty="0">
-                <a:solidFill>
-                  <a:schemeClr val="tx2"/>
-                </a:solidFill>
-              </a:rPr>
-              <a:t>Compare</a:t>
+              <a:t>Five systems feed Power BI through one SQL Server connector</a:t>
             </a:r>
             <a:endParaRPr lang="en-US" sz="1500" dirty="0"/>
           </a:p>
-        </p:txBody>
-      </p:sp>
-      <p:sp>
-        <p:nvSpPr>
-          <p:cNvPr id="28" name="Text 26"/>
-          <p:cNvSpPr txBox="1"/>
-          <p:nvPr/>
-        </p:nvSpPr>
-        <p:spPr>
-          <a:xfrm>
-            <a:off x="7066483" y="3200400"/>
-            <a:ext cx="1280160" cy="1645920"/>
-          </a:xfrm>
-          <a:prstGeom prst="rect">
-            <a:avLst/>
-          </a:prstGeom>
-          <a:noFill/>
-          <a:ln/>
-        </p:spPr>
-        <p:txBody>
-          <a:bodyPr wrap="square" lIns="0" tIns="0" rIns="0" bIns="0" rtlCol="0" anchor="t"/>
-          <a:lstStyle/>
-          <a:p>
-            <a:pPr algn="ctr" indent="0" marL="0">
-              <a:buNone/>
-            </a:pPr>
-            <a:r>
-              <a:rPr lang="en-US" sz="1250" dirty="0">
+          <a:p>
+            <a:pPr marL="342900" indent="-342900">
+              <a:spcAft>
+                <a:spcPts val="1000"/>
+              </a:spcAft>
+              <a:buSzPct val="100000"/>
+              <a:buChar char="•"/>
+            </a:pPr>
+            <a:r>
+              <a:rPr lang="en-US" sz="1500" dirty="0">
                 <a:solidFill>
                   <a:schemeClr val="tx1"/>
                 </a:solidFill>
               </a:rPr>
-              <a:t>Course-specific targets vs the 200% / 120% rule</a:t>
-            </a:r>
-            <a:endParaRPr lang="en-US" sz="1250" dirty="0"/>
-          </a:p>
-        </p:txBody>
-      </p:sp>
-      <p:sp>
-        <p:nvSpPr>
-          <p:cNvPr id="29" name="dot 6"/>
-          <p:cNvSpPr/>
-          <p:nvPr/>
-        </p:nvSpPr>
-        <p:spPr>
-          <a:xfrm>
-            <a:off x="9038844" y="1783080"/>
-            <a:ext cx="548640" cy="548640"/>
-          </a:xfrm>
-          <a:prstGeom prst="ellipse">
-            <a:avLst/>
-          </a:prstGeom>
-          <a:solidFill>
-            <a:schemeClr val="accent1"/>
-          </a:solidFill>
-          <a:ln w="12700">
-            <a:solidFill>
-              <a:schemeClr val="accent1"/>
-            </a:solidFill>
-            <a:prstDash val="solid"/>
-          </a:ln>
-        </p:spPr>
-      </p:sp>
-      <p:sp>
-        <p:nvSpPr>
-          <p:cNvPr id="30" name="Text 28"/>
-          <p:cNvSpPr txBox="1"/>
-          <p:nvPr/>
-        </p:nvSpPr>
-        <p:spPr>
-          <a:xfrm>
-            <a:off x="9038844" y="1783080"/>
-            <a:ext cx="548640" cy="548640"/>
-          </a:xfrm>
-          <a:prstGeom prst="rect">
-            <a:avLst/>
-          </a:prstGeom>
-          <a:noFill/>
-          <a:ln/>
-        </p:spPr>
-        <p:txBody>
-          <a:bodyPr wrap="square" lIns="0" tIns="0" rIns="0" bIns="0" rtlCol="0" anchor="ctr"/>
-          <a:lstStyle/>
-          <a:p>
-            <a:pPr algn="ctr" indent="0" marL="0">
-              <a:buNone/>
-            </a:pPr>
-            <a:r>
-              <a:rPr lang="en-US" sz="1400" b="1" dirty="0">
-                <a:solidFill>
-                  <a:schemeClr val="bg1"/>
-                </a:solidFill>
-              </a:rPr>
-              <a:t>6</a:t>
-            </a:r>
-            <a:endParaRPr lang="en-US" sz="1400" dirty="0"/>
-          </a:p>
-        </p:txBody>
-      </p:sp>
-      <p:sp>
-        <p:nvSpPr>
-          <p:cNvPr id="31" name="step 6"/>
-          <p:cNvSpPr/>
-          <p:nvPr/>
-        </p:nvSpPr>
-        <p:spPr>
-          <a:xfrm>
-            <a:off x="8581644" y="2560320"/>
-            <a:ext cx="1463040" cy="2377440"/>
-          </a:xfrm>
-          <a:prstGeom prst="roundRect">
-            <a:avLst>
-              <a:gd name="adj" fmla="val 5000"/>
-            </a:avLst>
-          </a:prstGeom>
-          <a:solidFill>
-            <a:schemeClr val="bg2"/>
-          </a:solidFill>
-          <a:ln w="12700">
-            <a:solidFill>
-              <a:schemeClr val="bg2"/>
-            </a:solidFill>
-            <a:prstDash val="solid"/>
-          </a:ln>
-        </p:spPr>
-      </p:sp>
-      <p:sp>
-        <p:nvSpPr>
-          <p:cNvPr id="32" name="Text 30"/>
-          <p:cNvSpPr txBox="1"/>
-          <p:nvPr/>
-        </p:nvSpPr>
-        <p:spPr>
-          <a:xfrm>
-            <a:off x="8673084" y="2697480"/>
-            <a:ext cx="1280160" cy="411480"/>
-          </a:xfrm>
-          <a:prstGeom prst="rect">
-            <a:avLst/>
-          </a:prstGeom>
-          <a:noFill/>
-          <a:ln/>
-        </p:spPr>
-        <p:txBody>
-          <a:bodyPr wrap="square" lIns="0" tIns="0" rIns="0" bIns="0" rtlCol="0" anchor="ctr"/>
-          <a:lstStyle/>
-          <a:p>
-            <a:pPr algn="ctr" indent="0" marL="0">
-              <a:buNone/>
-            </a:pPr>
-            <a:r>
-              <a:rPr lang="en-US" sz="1500" b="1" dirty="0">
-                <a:solidFill>
-                  <a:schemeClr val="tx2"/>
-                </a:solidFill>
-              </a:rPr>
-              <a:t>Flag</a:t>
+              <a:t>RA5's semantic model source is not yet confirmed</a:t>
             </a:r>
             <a:endParaRPr lang="en-US" sz="1500" dirty="0"/>
-          </a:p>
-        </p:txBody>
-      </p:sp>
-      <p:sp>
-        <p:nvSpPr>
-          <p:cNvPr id="33" name="Text 31"/>
-          <p:cNvSpPr txBox="1"/>
-          <p:nvPr/>
-        </p:nvSpPr>
-        <p:spPr>
-          <a:xfrm>
-            <a:off x="8673084" y="3200400"/>
-            <a:ext cx="1280160" cy="1645920"/>
-          </a:xfrm>
-          <a:prstGeom prst="rect">
-            <a:avLst/>
-          </a:prstGeom>
-          <a:noFill/>
-          <a:ln/>
-        </p:spPr>
-        <p:txBody>
-          <a:bodyPr wrap="square" lIns="0" tIns="0" rIns="0" bIns="0" rtlCol="0" anchor="t"/>
-          <a:lstStyle/>
-          <a:p>
-            <a:pPr algn="ctr" indent="0" marL="0">
-              <a:buNone/>
-            </a:pPr>
-            <a:r>
-              <a:rPr lang="en-US" sz="1250" dirty="0">
-                <a:solidFill>
-                  <a:schemeClr val="tx1"/>
-                </a:solidFill>
-              </a:rPr>
-              <a:t>Low converters, drop-off stage, small or new courses</a:t>
-            </a:r>
-            <a:endParaRPr lang="en-US" sz="1250" dirty="0"/>
-          </a:p>
-        </p:txBody>
-      </p:sp>
-      <p:sp>
-        <p:nvSpPr>
-          <p:cNvPr id="34" name="dot 7"/>
-          <p:cNvSpPr/>
-          <p:nvPr/>
-        </p:nvSpPr>
-        <p:spPr>
-          <a:xfrm>
-            <a:off x="10645445" y="1783080"/>
-            <a:ext cx="548640" cy="548640"/>
-          </a:xfrm>
-          <a:prstGeom prst="ellipse">
-            <a:avLst/>
-          </a:prstGeom>
-          <a:solidFill>
-            <a:schemeClr val="accent1"/>
-          </a:solidFill>
-          <a:ln w="12700">
-            <a:solidFill>
-              <a:schemeClr val="accent1"/>
-            </a:solidFill>
-            <a:prstDash val="solid"/>
-          </a:ln>
-        </p:spPr>
-      </p:sp>
-      <p:sp>
-        <p:nvSpPr>
-          <p:cNvPr id="35" name="Text 33"/>
-          <p:cNvSpPr txBox="1"/>
-          <p:nvPr/>
-        </p:nvSpPr>
-        <p:spPr>
-          <a:xfrm>
-            <a:off x="10645445" y="1783080"/>
-            <a:ext cx="548640" cy="548640"/>
-          </a:xfrm>
-          <a:prstGeom prst="rect">
-            <a:avLst/>
-          </a:prstGeom>
-          <a:noFill/>
-          <a:ln/>
-        </p:spPr>
-        <p:txBody>
-          <a:bodyPr wrap="square" lIns="0" tIns="0" rIns="0" bIns="0" rtlCol="0" anchor="ctr"/>
-          <a:lstStyle/>
-          <a:p>
-            <a:pPr algn="ctr" indent="0" marL="0">
-              <a:buNone/>
-            </a:pPr>
-            <a:r>
-              <a:rPr lang="en-US" sz="1400" b="1" dirty="0">
-                <a:solidFill>
-                  <a:schemeClr val="bg1"/>
-                </a:solidFill>
-              </a:rPr>
-              <a:t>7</a:t>
-            </a:r>
-            <a:endParaRPr lang="en-US" sz="1400" dirty="0"/>
-          </a:p>
-        </p:txBody>
-      </p:sp>
-      <p:sp>
-        <p:nvSpPr>
-          <p:cNvPr id="36" name="step 7"/>
-          <p:cNvSpPr/>
-          <p:nvPr/>
-        </p:nvSpPr>
-        <p:spPr>
-          <a:xfrm>
-            <a:off x="10188245" y="2560320"/>
-            <a:ext cx="1463040" cy="2377440"/>
-          </a:xfrm>
-          <a:prstGeom prst="roundRect">
-            <a:avLst>
-              <a:gd name="adj" fmla="val 5000"/>
-            </a:avLst>
-          </a:prstGeom>
-          <a:solidFill>
-            <a:schemeClr val="bg2"/>
-          </a:solidFill>
-          <a:ln w="12700">
-            <a:solidFill>
-              <a:schemeClr val="bg2"/>
-            </a:solidFill>
-            <a:prstDash val="solid"/>
-          </a:ln>
-        </p:spPr>
-      </p:sp>
-      <p:sp>
-        <p:nvSpPr>
-          <p:cNvPr id="37" name="Text 35"/>
-          <p:cNvSpPr txBox="1"/>
-          <p:nvPr/>
-        </p:nvSpPr>
-        <p:spPr>
-          <a:xfrm>
-            <a:off x="10279685" y="2697480"/>
-            <a:ext cx="1280160" cy="411480"/>
-          </a:xfrm>
-          <a:prstGeom prst="rect">
-            <a:avLst/>
-          </a:prstGeom>
-          <a:noFill/>
-          <a:ln/>
-        </p:spPr>
-        <p:txBody>
-          <a:bodyPr wrap="square" lIns="0" tIns="0" rIns="0" bIns="0" rtlCol="0" anchor="ctr"/>
-          <a:lstStyle/>
-          <a:p>
-            <a:pPr algn="ctr" indent="0" marL="0">
-              <a:buNone/>
-            </a:pPr>
-            <a:r>
-              <a:rPr lang="en-US" sz="1500" b="1" dirty="0">
-                <a:solidFill>
-                  <a:schemeClr val="tx2"/>
-                </a:solidFill>
-              </a:rPr>
-              <a:t>Review</a:t>
-            </a:r>
-            <a:endParaRPr lang="en-US" sz="1500" dirty="0"/>
-          </a:p>
-        </p:txBody>
-      </p:sp>
-      <p:sp>
-        <p:nvSpPr>
-          <p:cNvPr id="38" name="Text 36"/>
-          <p:cNvSpPr txBox="1"/>
-          <p:nvPr/>
-        </p:nvSpPr>
-        <p:spPr>
-          <a:xfrm>
-            <a:off x="10279685" y="3200400"/>
-            <a:ext cx="1280160" cy="1645920"/>
-          </a:xfrm>
-          <a:prstGeom prst="rect">
-            <a:avLst/>
-          </a:prstGeom>
-          <a:noFill/>
-          <a:ln/>
-        </p:spPr>
-        <p:txBody>
-          <a:bodyPr wrap="square" lIns="0" tIns="0" rIns="0" bIns="0" rtlCol="0" anchor="t"/>
-          <a:lstStyle/>
-          <a:p>
-            <a:pPr algn="ctr" indent="0" marL="0">
-              <a:buNone/>
-            </a:pPr>
-            <a:r>
-              <a:rPr lang="en-US" sz="1250" dirty="0">
-                <a:solidFill>
-                  <a:schemeClr val="tx1"/>
-                </a:solidFill>
-              </a:rPr>
-              <a:t>Lesley and Lyndsay, then Directors and Sarah</a:t>
-            </a:r>
-            <a:endParaRPr lang="en-US" sz="1250" dirty="0"/>
-          </a:p>
-        </p:txBody>
-      </p:sp>
-      <p:sp>
-        <p:nvSpPr>
-          <p:cNvPr id="39" name="example"/>
-          <p:cNvSpPr/>
-          <p:nvPr/>
-        </p:nvSpPr>
-        <p:spPr>
-          <a:xfrm>
-            <a:off x="548640" y="5257800"/>
-            <a:ext cx="11064240" cy="868680"/>
-          </a:xfrm>
-          <a:prstGeom prst="roundRect">
-            <a:avLst>
-              <a:gd name="adj" fmla="val 8421"/>
-            </a:avLst>
-          </a:prstGeom>
-          <a:solidFill>
-            <a:schemeClr val="accent5"/>
-          </a:solidFill>
-          <a:ln w="12700">
-            <a:solidFill>
-              <a:schemeClr val="accent5"/>
-            </a:solidFill>
-            <a:prstDash val="solid"/>
-          </a:ln>
-        </p:spPr>
-      </p:sp>
-      <p:sp>
-        <p:nvSpPr>
-          <p:cNvPr id="40" name="Text 38"/>
-          <p:cNvSpPr txBox="1"/>
-          <p:nvPr/>
-        </p:nvSpPr>
-        <p:spPr>
-          <a:xfrm>
-            <a:off x="822960" y="5257800"/>
-            <a:ext cx="10607040" cy="868680"/>
-          </a:xfrm>
-          <a:prstGeom prst="rect">
-            <a:avLst/>
-          </a:prstGeom>
-          <a:noFill/>
-          <a:ln/>
-        </p:spPr>
-        <p:txBody>
-          <a:bodyPr wrap="square" lIns="0" tIns="0" rIns="0" bIns="0" rtlCol="0" anchor="ctr"/>
-          <a:lstStyle/>
-          <a:p>
-            <a:pPr indent="0" marL="0">
-              <a:buNone/>
-            </a:pPr>
-            <a:r>
-              <a:rPr lang="en-US" sz="1400" b="1" dirty="0">
-                <a:solidFill>
-                  <a:schemeClr val="tx2"/>
-                </a:solidFill>
-              </a:rPr>
-              <a:t>Example of step 4:  </a:t>
-            </a:r>
-            <a:pPr indent="0" marL="0">
-              <a:buNone/>
-            </a:pPr>
-            <a:r>
-              <a:rPr lang="en-US" sz="1400" dirty="0">
-                <a:solidFill>
-                  <a:schemeClr val="tx1"/>
-                </a:solidFill>
-              </a:rPr>
-              <a:t>if 75% of a course's offers become enrolments, 20 places need about 27 offers, not the 24 the blanket rule gives.</a:t>
-            </a:r>
-            <a:endParaRPr lang="en-US" sz="1400" dirty="0"/>
           </a:p>
         </p:txBody>
       </p:sp>
